--- a/data-eng/decks/w6d2s2.pptx
+++ b/data-eng/decks/w6d2s2.pptx
@@ -16,6 +16,7 @@
     <p:sldId id="264" r:id="rId15"/>
     <p:sldId id="265" r:id="rId16"/>
     <p:sldId id="266" r:id="rId17"/>
+    <p:sldId id="267" r:id="rId18"/>
   </p:sldIdLst>
   <p:sldSz cx="18288000" cy="10287000" type="screen4x3"/>
   <p:notesSz cx="6858000" cy="9144000"/>
@@ -3100,7 +3101,7 @@
       <p:grpSpPr/>
       <p:sp>
         <p:nvSpPr>
-          <p:cNvPr id="2" name="Oval 1"/>
+          <p:cNvPr id="2" name="deckgen:decor"/>
           <p:cNvSpPr/>
           <p:nvPr/>
         </p:nvSpPr>
@@ -3130,7 +3131,7 @@
       </p:sp>
       <p:sp>
         <p:nvSpPr>
-          <p:cNvPr id="3" name="Oval 2"/>
+          <p:cNvPr id="3" name="deckgen:decor"/>
           <p:cNvSpPr/>
           <p:nvPr/>
         </p:nvSpPr>
@@ -3160,7 +3161,7 @@
       </p:sp>
       <p:sp>
         <p:nvSpPr>
-          <p:cNvPr id="4" name="Oval 3"/>
+          <p:cNvPr id="4" name="deckgen:decor"/>
           <p:cNvSpPr/>
           <p:nvPr/>
         </p:nvSpPr>
@@ -3190,7 +3191,7 @@
       </p:sp>
       <p:sp>
         <p:nvSpPr>
-          <p:cNvPr id="5" name="Rectangle 4"/>
+          <p:cNvPr id="5" name="deckgen:decor"/>
           <p:cNvSpPr/>
           <p:nvPr/>
         </p:nvSpPr>
@@ -3220,7 +3221,7 @@
       </p:sp>
       <p:sp>
         <p:nvSpPr>
-          <p:cNvPr id="6" name="Oval 5"/>
+          <p:cNvPr id="6" name="deckgen:decor"/>
           <p:cNvSpPr/>
           <p:nvPr/>
         </p:nvSpPr>
@@ -3250,7 +3251,7 @@
       </p:sp>
       <p:sp>
         <p:nvSpPr>
-          <p:cNvPr id="7" name="Oval 6"/>
+          <p:cNvPr id="7" name="deckgen:decor"/>
           <p:cNvSpPr/>
           <p:nvPr/>
         </p:nvSpPr>
@@ -3280,7 +3281,7 @@
       </p:sp>
       <p:sp>
         <p:nvSpPr>
-          <p:cNvPr id="8" name="Oval 7"/>
+          <p:cNvPr id="8" name="deckgen:decor"/>
           <p:cNvSpPr/>
           <p:nvPr/>
         </p:nvSpPr>
@@ -3310,7 +3311,7 @@
       </p:sp>
       <p:sp>
         <p:nvSpPr>
-          <p:cNvPr id="9" name="Oval 8"/>
+          <p:cNvPr id="9" name="deckgen:decor"/>
           <p:cNvSpPr/>
           <p:nvPr/>
         </p:nvSpPr>
@@ -3340,7 +3341,7 @@
       </p:sp>
       <p:sp>
         <p:nvSpPr>
-          <p:cNvPr id="10" name="Rectangle 9"/>
+          <p:cNvPr id="10" name="deckgen:decor"/>
           <p:cNvSpPr/>
           <p:nvPr/>
         </p:nvSpPr>
@@ -3600,7 +3601,7 @@
       <p:grpSpPr/>
       <p:sp>
         <p:nvSpPr>
-          <p:cNvPr id="2" name="Oval 1"/>
+          <p:cNvPr id="2" name="deckgen:decor"/>
           <p:cNvSpPr/>
           <p:nvPr/>
         </p:nvSpPr>
@@ -3630,7 +3631,7 @@
       </p:sp>
       <p:sp>
         <p:nvSpPr>
-          <p:cNvPr id="3" name="Oval 2"/>
+          <p:cNvPr id="3" name="deckgen:decor"/>
           <p:cNvSpPr/>
           <p:nvPr/>
         </p:nvSpPr>
@@ -3660,7 +3661,7 @@
       </p:sp>
       <p:sp>
         <p:nvSpPr>
-          <p:cNvPr id="4" name="Oval 3"/>
+          <p:cNvPr id="4" name="deckgen:decor"/>
           <p:cNvSpPr/>
           <p:nvPr/>
         </p:nvSpPr>
@@ -3724,7 +3725,7 @@
                 <a:ea typeface="Pretendard"/>
                 <a:cs typeface="Pretendard"/>
               </a:rPr>
-              <a:t>확인 포인트</a:t>
+              <a:t>8단계</a:t>
             </a:r>
           </a:p>
         </p:txBody>
@@ -3765,7 +3766,7 @@
                 <a:ea typeface="Pretendard"/>
                 <a:cs typeface="Pretendard"/>
               </a:rPr>
-              <a:t>이 2.5시간이 끝날 때 확인할 것</a:t>
+              <a:t>다른 그룹은 독립적이다 — 그룹마다 오프셋을 따로 관리</a:t>
             </a:r>
           </a:p>
         </p:txBody>
@@ -3802,18 +3803,100 @@
       </p:sp>
       <p:sp>
         <p:nvSpPr>
-          <p:cNvPr id="8" name="Rounded Rectangle 7"/>
-          <p:cNvSpPr/>
-          <p:nvPr/>
-        </p:nvSpPr>
-        <p:spPr>
-          <a:xfrm>
-            <a:off x="1143000" y="2876550"/>
-            <a:ext cx="16002000" cy="542925"/>
+          <p:cNvPr id="8" name="TextBox 7"/>
+          <p:cNvSpPr txBox="1"/>
+          <p:nvPr/>
+        </p:nvSpPr>
+        <p:spPr>
+          <a:xfrm>
+            <a:off x="1143000" y="2857500"/>
+            <a:ext cx="7372350" cy="533400"/>
+          </a:xfrm>
+          <a:prstGeom prst="rect">
+            <a:avLst/>
+          </a:prstGeom>
+          <a:noFill/>
+        </p:spPr>
+        <p:txBody>
+          <a:bodyPr wrap="square" lIns="0" rIns="0" tIns="0" bIns="0" anchor="t">
+            <a:spAutoFit/>
+          </a:bodyPr>
+          <a:lstStyle/>
+          <a:p>
+            <a:pPr algn="l">
+              <a:lnSpc>
+                <a:spcPct val="110000"/>
+              </a:lnSpc>
+            </a:pPr>
+            <a:r>
+              <a:rPr sz="3150" b="1">
+                <a:solidFill>
+                  <a:srgbClr val="0D2B5E"/>
+                </a:solidFill>
+                <a:latin typeface="Pretendard"/>
+                <a:ea typeface="Pretendard"/>
+                <a:cs typeface="Pretendard"/>
+              </a:rPr>
+              <a:t>order-app</a:t>
+            </a:r>
+          </a:p>
+        </p:txBody>
+      </p:sp>
+      <p:sp>
+        <p:nvSpPr>
+          <p:cNvPr id="9" name="TextBox 8"/>
+          <p:cNvSpPr txBox="1"/>
+          <p:nvPr/>
+        </p:nvSpPr>
+        <p:spPr>
+          <a:xfrm>
+            <a:off x="1143000" y="3467100"/>
+            <a:ext cx="7372350" cy="876300"/>
+          </a:xfrm>
+          <a:prstGeom prst="rect">
+            <a:avLst/>
+          </a:prstGeom>
+          <a:noFill/>
+        </p:spPr>
+        <p:txBody>
+          <a:bodyPr wrap="square" lIns="0" rIns="0" tIns="0" bIns="0" anchor="t">
+            <a:spAutoFit/>
+          </a:bodyPr>
+          <a:lstStyle/>
+          <a:p>
+            <a:pPr algn="l">
+              <a:lnSpc>
+                <a:spcPct val="146000"/>
+              </a:lnSpc>
+            </a:pPr>
+            <a:r>
+              <a:rPr sz="2250" b="0">
+                <a:solidFill>
+                  <a:srgbClr val="3D3D3D"/>
+                </a:solidFill>
+                <a:latin typeface="Pretendard"/>
+                <a:ea typeface="Pretendard"/>
+                <a:cs typeface="Pretendard"/>
+              </a:rPr>
+              <a:t>이미 읽은 메시지는 다시 오지 않는다</a:t>
+            </a:r>
+          </a:p>
+        </p:txBody>
+      </p:sp>
+      <p:sp>
+        <p:nvSpPr>
+          <p:cNvPr id="10" name="Rounded Rectangle 9"/>
+          <p:cNvSpPr/>
+          <p:nvPr/>
+        </p:nvSpPr>
+        <p:spPr>
+          <a:xfrm>
+            <a:off x="1143000" y="4610100"/>
+            <a:ext cx="7372350" cy="2857500"/>
           </a:xfrm>
           <a:prstGeom prst="roundRect">
             <a:avLst>
-              <a:gd name="adj" fmla="val 8771"/>
+              <a:gd name="adj" fmla="val 1666"/>
             </a:avLst>
           </a:prstGeom>
           <a:solidFill>
@@ -3836,20 +3919,20 @@
       </p:sp>
       <p:sp>
         <p:nvSpPr>
-          <p:cNvPr id="9" name="Oval 8"/>
-          <p:cNvSpPr/>
-          <p:nvPr/>
-        </p:nvSpPr>
-        <p:spPr>
-          <a:xfrm>
-            <a:off x="1390650" y="2881312"/>
-            <a:ext cx="533400" cy="533400"/>
+          <p:cNvPr id="11" name="Oval 10"/>
+          <p:cNvSpPr/>
+          <p:nvPr/>
+        </p:nvSpPr>
+        <p:spPr>
+          <a:xfrm>
+            <a:off x="1447800" y="5016817"/>
+            <a:ext cx="97155" cy="97155"/>
           </a:xfrm>
           <a:prstGeom prst="ellipse">
             <a:avLst/>
           </a:prstGeom>
           <a:solidFill>
-            <a:srgbClr val="0D2B5E"/>
+            <a:srgbClr val="1E5BC6"/>
           </a:solidFill>
           <a:ln>
             <a:noFill/>
@@ -3866,14 +3949,126 @@
       </p:sp>
       <p:sp>
         <p:nvSpPr>
-          <p:cNvPr id="10" name="TextBox 9"/>
-          <p:cNvSpPr txBox="1"/>
-          <p:nvPr/>
-        </p:nvSpPr>
-        <p:spPr>
-          <a:xfrm>
-            <a:off x="1390650" y="3005138"/>
-            <a:ext cx="533400" cy="323850"/>
+          <p:cNvPr id="12" name="TextBox 11"/>
+          <p:cNvSpPr txBox="1"/>
+          <p:nvPr/>
+        </p:nvSpPr>
+        <p:spPr>
+          <a:xfrm>
+            <a:off x="1633538" y="4838700"/>
+            <a:ext cx="6634162" cy="453390"/>
+          </a:xfrm>
+          <a:prstGeom prst="rect">
+            <a:avLst/>
+          </a:prstGeom>
+          <a:noFill/>
+        </p:spPr>
+        <p:txBody>
+          <a:bodyPr wrap="square" lIns="0" rIns="0" tIns="0" bIns="0" anchor="ctr">
+            <a:spAutoFit/>
+          </a:bodyPr>
+          <a:lstStyle/>
+          <a:p>
+            <a:pPr algn="l">
+              <a:lnSpc>
+                <a:spcPct val="120000"/>
+              </a:lnSpc>
+            </a:pPr>
+            <a:r>
+              <a:rPr sz="1575" b="0">
+                <a:solidFill>
+                  <a:srgbClr val="3D3D3D"/>
+                </a:solidFill>
+                <a:latin typeface="Pretendard"/>
+                <a:ea typeface="Pretendard"/>
+                <a:cs typeface="Pretendard"/>
+              </a:rPr>
+              <a:t>그룹의 오프셋이 저장돼 있다</a:t>
+            </a:r>
+          </a:p>
+        </p:txBody>
+      </p:sp>
+      <p:sp>
+        <p:nvSpPr>
+          <p:cNvPr id="13" name="Oval 12"/>
+          <p:cNvSpPr/>
+          <p:nvPr/>
+        </p:nvSpPr>
+        <p:spPr>
+          <a:xfrm>
+            <a:off x="1447800" y="5527358"/>
+            <a:ext cx="97155" cy="97155"/>
+          </a:xfrm>
+          <a:prstGeom prst="ellipse">
+            <a:avLst/>
+          </a:prstGeom>
+          <a:solidFill>
+            <a:srgbClr val="1E5BC6"/>
+          </a:solidFill>
+          <a:ln>
+            <a:noFill/>
+          </a:ln>
+          <a:effectLst/>
+        </p:spPr>
+        <p:txBody>
+          <a:bodyPr rtlCol="0" anchor="ctr" wrap="square"/>
+          <a:lstStyle/>
+          <a:p>
+            <a:pPr algn="ctr"/>
+          </a:p>
+        </p:txBody>
+      </p:sp>
+      <p:sp>
+        <p:nvSpPr>
+          <p:cNvPr id="14" name="TextBox 13"/>
+          <p:cNvSpPr txBox="1"/>
+          <p:nvPr/>
+        </p:nvSpPr>
+        <p:spPr>
+          <a:xfrm>
+            <a:off x="1633538" y="5349240"/>
+            <a:ext cx="6634162" cy="453390"/>
+          </a:xfrm>
+          <a:prstGeom prst="rect">
+            <a:avLst/>
+          </a:prstGeom>
+          <a:noFill/>
+        </p:spPr>
+        <p:txBody>
+          <a:bodyPr wrap="square" lIns="0" rIns="0" tIns="0" bIns="0" anchor="ctr">
+            <a:spAutoFit/>
+          </a:bodyPr>
+          <a:lstStyle/>
+          <a:p>
+            <a:pPr algn="l">
+              <a:lnSpc>
+                <a:spcPct val="120000"/>
+              </a:lnSpc>
+            </a:pPr>
+            <a:r>
+              <a:rPr sz="1575" b="0">
+                <a:solidFill>
+                  <a:srgbClr val="3D3D3D"/>
+                </a:solidFill>
+                <a:latin typeface="Pretendard"/>
+                <a:ea typeface="Pretendard"/>
+                <a:cs typeface="Pretendard"/>
+              </a:rPr>
+              <a:t>다시 붙으면 이어서 읽는다</a:t>
+            </a:r>
+          </a:p>
+        </p:txBody>
+      </p:sp>
+      <p:sp>
+        <p:nvSpPr>
+          <p:cNvPr id="15" name="TextBox 14"/>
+          <p:cNvSpPr txBox="1"/>
+          <p:nvPr/>
+        </p:nvSpPr>
+        <p:spPr>
+          <a:xfrm>
+            <a:off x="9772650" y="2857500"/>
+            <a:ext cx="7372350" cy="533400"/>
           </a:xfrm>
           <a:prstGeom prst="rect">
             <a:avLst/>
@@ -3886,54 +4081,13 @@
           </a:bodyPr>
           <a:lstStyle/>
           <a:p>
-            <a:pPr algn="ctr">
-              <a:lnSpc>
-                <a:spcPct val="100000"/>
-              </a:lnSpc>
-            </a:pPr>
-            <a:r>
-              <a:rPr sz="2100" b="1">
-                <a:solidFill>
-                  <a:srgbClr val="FFFFFF"/>
-                </a:solidFill>
-                <a:latin typeface="Pretendard"/>
-                <a:ea typeface="Pretendard"/>
-                <a:cs typeface="Pretendard"/>
-              </a:rPr>
-              <a:t>1</a:t>
-            </a:r>
-          </a:p>
-        </p:txBody>
-      </p:sp>
-      <p:sp>
-        <p:nvSpPr>
-          <p:cNvPr id="11" name="TextBox 10"/>
-          <p:cNvSpPr txBox="1"/>
-          <p:nvPr/>
-        </p:nvSpPr>
-        <p:spPr>
-          <a:xfrm>
-            <a:off x="2190750" y="2876550"/>
-            <a:ext cx="14573250" cy="542925"/>
-          </a:xfrm>
-          <a:prstGeom prst="rect">
-            <a:avLst/>
-          </a:prstGeom>
-          <a:noFill/>
-        </p:spPr>
-        <p:txBody>
-          <a:bodyPr wrap="square" lIns="0" rIns="0" tIns="0" bIns="0" anchor="ctr">
-            <a:spAutoFit/>
-          </a:bodyPr>
-          <a:lstStyle/>
-          <a:p>
             <a:pPr algn="l">
               <a:lnSpc>
-                <a:spcPct val="100000"/>
-              </a:lnSpc>
-            </a:pPr>
-            <a:r>
-              <a:rPr sz="2100" b="1">
+                <a:spcPct val="110000"/>
+              </a:lnSpc>
+            </a:pPr>
+            <a:r>
+              <a:rPr sz="3150" b="1">
                 <a:solidFill>
                   <a:srgbClr val="0D2B5E"/>
                 </a:solidFill>
@@ -3941,25 +4095,66 @@
                 <a:ea typeface="Pretendard"/>
                 <a:cs typeface="Pretendard"/>
               </a:rPr>
-              <a:t>docker compose ps 의 STATUS 가 running 이다</a:t>
-            </a:r>
-          </a:p>
-        </p:txBody>
-      </p:sp>
-      <p:sp>
-        <p:nvSpPr>
-          <p:cNvPr id="12" name="Rounded Rectangle 11"/>
-          <p:cNvSpPr/>
-          <p:nvPr/>
-        </p:nvSpPr>
-        <p:spPr>
-          <a:xfrm>
-            <a:off x="1143000" y="3533775"/>
-            <a:ext cx="16002000" cy="542925"/>
+              <a:t>analytics-app --from-beginning</a:t>
+            </a:r>
+          </a:p>
+        </p:txBody>
+      </p:sp>
+      <p:sp>
+        <p:nvSpPr>
+          <p:cNvPr id="16" name="TextBox 15"/>
+          <p:cNvSpPr txBox="1"/>
+          <p:nvPr/>
+        </p:nvSpPr>
+        <p:spPr>
+          <a:xfrm>
+            <a:off x="9772650" y="3467100"/>
+            <a:ext cx="7372350" cy="876300"/>
+          </a:xfrm>
+          <a:prstGeom prst="rect">
+            <a:avLst/>
+          </a:prstGeom>
+          <a:noFill/>
+        </p:spPr>
+        <p:txBody>
+          <a:bodyPr wrap="square" lIns="0" rIns="0" tIns="0" bIns="0" anchor="t">
+            <a:spAutoFit/>
+          </a:bodyPr>
+          <a:lstStyle/>
+          <a:p>
+            <a:pPr algn="l">
+              <a:lnSpc>
+                <a:spcPct val="146000"/>
+              </a:lnSpc>
+            </a:pPr>
+            <a:r>
+              <a:rPr sz="2250" b="0">
+                <a:solidFill>
+                  <a:srgbClr val="3D3D3D"/>
+                </a:solidFill>
+                <a:latin typeface="Pretendard"/>
+                <a:ea typeface="Pretendard"/>
+                <a:cs typeface="Pretendard"/>
+              </a:rPr>
+              <a:t>처음부터 다시 받는다</a:t>
+            </a:r>
+          </a:p>
+        </p:txBody>
+      </p:sp>
+      <p:sp>
+        <p:nvSpPr>
+          <p:cNvPr id="17" name="Rounded Rectangle 16"/>
+          <p:cNvSpPr/>
+          <p:nvPr/>
+        </p:nvSpPr>
+        <p:spPr>
+          <a:xfrm>
+            <a:off x="9772650" y="4610100"/>
+            <a:ext cx="7372350" cy="2857500"/>
           </a:xfrm>
           <a:prstGeom prst="roundRect">
             <a:avLst>
-              <a:gd name="adj" fmla="val 8771"/>
+              <a:gd name="adj" fmla="val 1666"/>
             </a:avLst>
           </a:prstGeom>
           <a:solidFill>
@@ -3982,20 +4177,20 @@
       </p:sp>
       <p:sp>
         <p:nvSpPr>
-          <p:cNvPr id="13" name="Oval 12"/>
-          <p:cNvSpPr/>
-          <p:nvPr/>
-        </p:nvSpPr>
-        <p:spPr>
-          <a:xfrm>
-            <a:off x="1390650" y="3538538"/>
-            <a:ext cx="533400" cy="533400"/>
+          <p:cNvPr id="18" name="Oval 17"/>
+          <p:cNvSpPr/>
+          <p:nvPr/>
+        </p:nvSpPr>
+        <p:spPr>
+          <a:xfrm>
+            <a:off x="10077450" y="5016817"/>
+            <a:ext cx="97155" cy="97155"/>
           </a:xfrm>
           <a:prstGeom prst="ellipse">
             <a:avLst/>
           </a:prstGeom>
           <a:solidFill>
-            <a:srgbClr val="0D2B5E"/>
+            <a:srgbClr val="1E5BC6"/>
           </a:solidFill>
           <a:ln>
             <a:noFill/>
@@ -4012,55 +4207,14 @@
       </p:sp>
       <p:sp>
         <p:nvSpPr>
-          <p:cNvPr id="14" name="TextBox 13"/>
-          <p:cNvSpPr txBox="1"/>
-          <p:nvPr/>
-        </p:nvSpPr>
-        <p:spPr>
-          <a:xfrm>
-            <a:off x="1390650" y="3662362"/>
-            <a:ext cx="533400" cy="323850"/>
-          </a:xfrm>
-          <a:prstGeom prst="rect">
-            <a:avLst/>
-          </a:prstGeom>
-          <a:noFill/>
-        </p:spPr>
-        <p:txBody>
-          <a:bodyPr wrap="square" lIns="0" rIns="0" tIns="0" bIns="0" anchor="t">
-            <a:spAutoFit/>
-          </a:bodyPr>
-          <a:lstStyle/>
-          <a:p>
-            <a:pPr algn="ctr">
-              <a:lnSpc>
-                <a:spcPct val="100000"/>
-              </a:lnSpc>
-            </a:pPr>
-            <a:r>
-              <a:rPr sz="2100" b="1">
-                <a:solidFill>
-                  <a:srgbClr val="FFFFFF"/>
-                </a:solidFill>
-                <a:latin typeface="Pretendard"/>
-                <a:ea typeface="Pretendard"/>
-                <a:cs typeface="Pretendard"/>
-              </a:rPr>
-              <a:t>2</a:t>
-            </a:r>
-          </a:p>
-        </p:txBody>
-      </p:sp>
-      <p:sp>
-        <p:nvSpPr>
-          <p:cNvPr id="15" name="TextBox 14"/>
-          <p:cNvSpPr txBox="1"/>
-          <p:nvPr/>
-        </p:nvSpPr>
-        <p:spPr>
-          <a:xfrm>
-            <a:off x="2190750" y="3533775"/>
-            <a:ext cx="14573250" cy="542925"/>
+          <p:cNvPr id="19" name="TextBox 18"/>
+          <p:cNvSpPr txBox="1"/>
+          <p:nvPr/>
+        </p:nvSpPr>
+        <p:spPr>
+          <a:xfrm>
+            <a:off x="10263188" y="4838700"/>
+            <a:ext cx="6634162" cy="453390"/>
           </a:xfrm>
           <a:prstGeom prst="rect">
             <a:avLst/>
@@ -4075,73 +4229,39 @@
           <a:p>
             <a:pPr algn="l">
               <a:lnSpc>
-                <a:spcPct val="100000"/>
-              </a:lnSpc>
-            </a:pPr>
-            <a:r>
-              <a:rPr sz="2100" b="1">
-                <a:solidFill>
-                  <a:srgbClr val="0D2B5E"/>
-                </a:solidFill>
-                <a:latin typeface="Pretendard"/>
-                <a:ea typeface="Pretendard"/>
-                <a:cs typeface="Pretendard"/>
-              </a:rPr>
-              <a:t>kafka:29092 · localhost:9092 두 경로 모두 브로커 정보를 돌려준다</a:t>
-            </a:r>
-          </a:p>
-        </p:txBody>
-      </p:sp>
-      <p:sp>
-        <p:nvSpPr>
-          <p:cNvPr id="16" name="Rounded Rectangle 15"/>
-          <p:cNvSpPr/>
-          <p:nvPr/>
-        </p:nvSpPr>
-        <p:spPr>
-          <a:xfrm>
-            <a:off x="1143000" y="4191000"/>
-            <a:ext cx="16002000" cy="542925"/>
-          </a:xfrm>
-          <a:prstGeom prst="roundRect">
-            <a:avLst>
-              <a:gd name="adj" fmla="val 8771"/>
-            </a:avLst>
-          </a:prstGeom>
-          <a:solidFill>
-            <a:srgbClr val="FAFBFD"/>
-          </a:solidFill>
-          <a:ln w="9525">
-            <a:solidFill>
-              <a:srgbClr val="DCE1E8"/>
-            </a:solidFill>
-          </a:ln>
-          <a:effectLst/>
-        </p:spPr>
-        <p:txBody>
-          <a:bodyPr rtlCol="0" anchor="ctr" wrap="square"/>
-          <a:lstStyle/>
-          <a:p>
-            <a:pPr algn="ctr"/>
-          </a:p>
-        </p:txBody>
-      </p:sp>
-      <p:sp>
-        <p:nvSpPr>
-          <p:cNvPr id="17" name="Oval 16"/>
-          <p:cNvSpPr/>
-          <p:nvPr/>
-        </p:nvSpPr>
-        <p:spPr>
-          <a:xfrm>
-            <a:off x="1390650" y="4195762"/>
-            <a:ext cx="533400" cy="533400"/>
+                <a:spcPct val="120000"/>
+              </a:lnSpc>
+            </a:pPr>
+            <a:r>
+              <a:rPr sz="1575" b="0">
+                <a:solidFill>
+                  <a:srgbClr val="3D3D3D"/>
+                </a:solidFill>
+                <a:latin typeface="Pretendard"/>
+                <a:ea typeface="Pretendard"/>
+                <a:cs typeface="Pretendard"/>
+              </a:rPr>
+              <a:t>새 그룹 이름 = 새 오프셋 · 실측 일곱 건</a:t>
+            </a:r>
+          </a:p>
+        </p:txBody>
+      </p:sp>
+      <p:sp>
+        <p:nvSpPr>
+          <p:cNvPr id="20" name="Oval 19"/>
+          <p:cNvSpPr/>
+          <p:nvPr/>
+        </p:nvSpPr>
+        <p:spPr>
+          <a:xfrm>
+            <a:off x="10077450" y="5527358"/>
+            <a:ext cx="97155" cy="97155"/>
           </a:xfrm>
           <a:prstGeom prst="ellipse">
             <a:avLst/>
           </a:prstGeom>
           <a:solidFill>
-            <a:srgbClr val="0D2B5E"/>
+            <a:srgbClr val="1E5BC6"/>
           </a:solidFill>
           <a:ln>
             <a:noFill/>
@@ -4158,55 +4278,14 @@
       </p:sp>
       <p:sp>
         <p:nvSpPr>
-          <p:cNvPr id="18" name="TextBox 17"/>
-          <p:cNvSpPr txBox="1"/>
-          <p:nvPr/>
-        </p:nvSpPr>
-        <p:spPr>
-          <a:xfrm>
-            <a:off x="1390650" y="4319588"/>
-            <a:ext cx="533400" cy="323850"/>
-          </a:xfrm>
-          <a:prstGeom prst="rect">
-            <a:avLst/>
-          </a:prstGeom>
-          <a:noFill/>
-        </p:spPr>
-        <p:txBody>
-          <a:bodyPr wrap="square" lIns="0" rIns="0" tIns="0" bIns="0" anchor="t">
-            <a:spAutoFit/>
-          </a:bodyPr>
-          <a:lstStyle/>
-          <a:p>
-            <a:pPr algn="ctr">
-              <a:lnSpc>
-                <a:spcPct val="100000"/>
-              </a:lnSpc>
-            </a:pPr>
-            <a:r>
-              <a:rPr sz="2100" b="1">
-                <a:solidFill>
-                  <a:srgbClr val="FFFFFF"/>
-                </a:solidFill>
-                <a:latin typeface="Pretendard"/>
-                <a:ea typeface="Pretendard"/>
-                <a:cs typeface="Pretendard"/>
-              </a:rPr>
-              <a:t>3</a:t>
-            </a:r>
-          </a:p>
-        </p:txBody>
-      </p:sp>
-      <p:sp>
-        <p:nvSpPr>
-          <p:cNvPr id="19" name="TextBox 18"/>
-          <p:cNvSpPr txBox="1"/>
-          <p:nvPr/>
-        </p:nvSpPr>
-        <p:spPr>
-          <a:xfrm>
-            <a:off x="2190750" y="4191000"/>
-            <a:ext cx="14573250" cy="542925"/>
+          <p:cNvPr id="21" name="TextBox 20"/>
+          <p:cNvSpPr txBox="1"/>
+          <p:nvPr/>
+        </p:nvSpPr>
+        <p:spPr>
+          <a:xfrm>
+            <a:off x="10263188" y="5349240"/>
+            <a:ext cx="6634162" cy="453390"/>
           </a:xfrm>
           <a:prstGeom prst="rect">
             <a:avLst/>
@@ -4221,67 +4300,33 @@
           <a:p>
             <a:pPr algn="l">
               <a:lnSpc>
-                <a:spcPct val="100000"/>
-              </a:lnSpc>
-            </a:pPr>
-            <a:r>
-              <a:rPr sz="2100" b="1">
-                <a:solidFill>
-                  <a:srgbClr val="0D2B5E"/>
-                </a:solidFill>
-                <a:latin typeface="Pretendard"/>
-                <a:ea typeface="Pretendard"/>
-                <a:cs typeface="Pretendard"/>
-              </a:rPr>
-              <a:t>describe 에 retention.ms=3600000 이 보였다가 되돌렸다</a:t>
-            </a:r>
-          </a:p>
-        </p:txBody>
-      </p:sp>
-      <p:sp>
-        <p:nvSpPr>
-          <p:cNvPr id="20" name="Rounded Rectangle 19"/>
-          <p:cNvSpPr/>
-          <p:nvPr/>
-        </p:nvSpPr>
-        <p:spPr>
-          <a:xfrm>
-            <a:off x="1143000" y="4848225"/>
-            <a:ext cx="16002000" cy="542925"/>
-          </a:xfrm>
-          <a:prstGeom prst="roundRect">
-            <a:avLst>
-              <a:gd name="adj" fmla="val 8771"/>
-            </a:avLst>
-          </a:prstGeom>
-          <a:solidFill>
-            <a:srgbClr val="FAFBFD"/>
-          </a:solidFill>
-          <a:ln w="9525">
-            <a:solidFill>
-              <a:srgbClr val="DCE1E8"/>
-            </a:solidFill>
-          </a:ln>
-          <a:effectLst/>
-        </p:spPr>
-        <p:txBody>
-          <a:bodyPr rtlCol="0" anchor="ctr" wrap="square"/>
-          <a:lstStyle/>
-          <a:p>
-            <a:pPr algn="ctr"/>
-          </a:p>
-        </p:txBody>
-      </p:sp>
-      <p:sp>
-        <p:nvSpPr>
-          <p:cNvPr id="21" name="Oval 20"/>
-          <p:cNvSpPr/>
-          <p:nvPr/>
-        </p:nvSpPr>
-        <p:spPr>
-          <a:xfrm>
-            <a:off x="1390650" y="4852988"/>
-            <a:ext cx="533400" cy="533400"/>
+                <a:spcPct val="120000"/>
+              </a:lnSpc>
+            </a:pPr>
+            <a:r>
+              <a:rPr sz="1575" b="0">
+                <a:solidFill>
+                  <a:srgbClr val="3D3D3D"/>
+                </a:solidFill>
+                <a:latin typeface="Pretendard"/>
+                <a:ea typeface="Pretendard"/>
+                <a:cs typeface="Pretendard"/>
+              </a:rPr>
+              <a:t>6-1 의 「여러 부서가 같은 편지를 각자 읽는다」의 실물</a:t>
+            </a:r>
+          </a:p>
+        </p:txBody>
+      </p:sp>
+      <p:sp>
+        <p:nvSpPr>
+          <p:cNvPr id="22" name="Oval 21"/>
+          <p:cNvSpPr/>
+          <p:nvPr/>
+        </p:nvSpPr>
+        <p:spPr>
+          <a:xfrm>
+            <a:off x="8686800" y="3771900"/>
+            <a:ext cx="914400" cy="914400"/>
           </a:xfrm>
           <a:prstGeom prst="ellipse">
             <a:avLst/>
@@ -4304,14 +4349,14 @@
       </p:sp>
       <p:sp>
         <p:nvSpPr>
-          <p:cNvPr id="22" name="TextBox 21"/>
-          <p:cNvSpPr txBox="1"/>
-          <p:nvPr/>
-        </p:nvSpPr>
-        <p:spPr>
-          <a:xfrm>
-            <a:off x="1390650" y="4976812"/>
-            <a:ext cx="533400" cy="323850"/>
+          <p:cNvPr id="23" name="TextBox 22"/>
+          <p:cNvSpPr txBox="1"/>
+          <p:nvPr/>
+        </p:nvSpPr>
+        <p:spPr>
+          <a:xfrm>
+            <a:off x="8686800" y="4057650"/>
+            <a:ext cx="914400" cy="381000"/>
           </a:xfrm>
           <a:prstGeom prst="rect">
             <a:avLst/>
@@ -4330,7 +4375,7 @@
               </a:lnSpc>
             </a:pPr>
             <a:r>
-              <a:rPr sz="2100" b="1">
+              <a:rPr sz="2250" b="1">
                 <a:solidFill>
                   <a:srgbClr val="FFFFFF"/>
                 </a:solidFill>
@@ -4338,102 +4383,27 @@
                 <a:ea typeface="Pretendard"/>
                 <a:cs typeface="Pretendard"/>
               </a:rPr>
-              <a:t>4</a:t>
-            </a:r>
-          </a:p>
-        </p:txBody>
-      </p:sp>
-      <p:sp>
-        <p:nvSpPr>
-          <p:cNvPr id="23" name="TextBox 22"/>
-          <p:cNvSpPr txBox="1"/>
-          <p:nvPr/>
-        </p:nvSpPr>
-        <p:spPr>
-          <a:xfrm>
-            <a:off x="2190750" y="4848225"/>
-            <a:ext cx="14573250" cy="542925"/>
-          </a:xfrm>
-          <a:prstGeom prst="rect">
-            <a:avLst/>
-          </a:prstGeom>
-          <a:noFill/>
-        </p:spPr>
-        <p:txBody>
-          <a:bodyPr wrap="square" lIns="0" rIns="0" tIns="0" bIns="0" anchor="ctr">
-            <a:spAutoFit/>
-          </a:bodyPr>
-          <a:lstStyle/>
-          <a:p>
-            <a:pPr algn="l">
-              <a:lnSpc>
-                <a:spcPct val="100000"/>
-              </a:lnSpc>
-            </a:pPr>
-            <a:r>
-              <a:rPr sz="2100" b="1">
-                <a:solidFill>
-                  <a:srgbClr val="0D2B5E"/>
-                </a:solidFill>
-                <a:latin typeface="Pretendard"/>
-                <a:ea typeface="Pretendard"/>
-                <a:cs typeface="Pretendard"/>
-              </a:rPr>
-              <a:t>같은 키(user1)는 항상 같은 Partition 번호로 찍힌다</a:t>
-            </a:r>
-          </a:p>
-        </p:txBody>
-      </p:sp>
-      <p:sp>
-        <p:nvSpPr>
-          <p:cNvPr id="24" name="Rounded Rectangle 23"/>
-          <p:cNvSpPr/>
-          <p:nvPr/>
-        </p:nvSpPr>
-        <p:spPr>
-          <a:xfrm>
-            <a:off x="1143000" y="5505450"/>
-            <a:ext cx="16002000" cy="542925"/>
-          </a:xfrm>
-          <a:prstGeom prst="roundRect">
-            <a:avLst>
-              <a:gd name="adj" fmla="val 8771"/>
-            </a:avLst>
-          </a:prstGeom>
-          <a:solidFill>
-            <a:srgbClr val="FAFBFD"/>
-          </a:solidFill>
-          <a:ln w="9525">
-            <a:solidFill>
-              <a:srgbClr val="DCE1E8"/>
-            </a:solidFill>
-          </a:ln>
-          <a:effectLst/>
-        </p:spPr>
-        <p:txBody>
-          <a:bodyPr rtlCol="0" anchor="ctr" wrap="square"/>
-          <a:lstStyle/>
-          <a:p>
-            <a:pPr algn="ctr"/>
-          </a:p>
-        </p:txBody>
-      </p:sp>
-      <p:sp>
-        <p:nvSpPr>
-          <p:cNvPr id="25" name="Oval 24"/>
-          <p:cNvSpPr/>
-          <p:nvPr/>
-        </p:nvSpPr>
-        <p:spPr>
-          <a:xfrm>
-            <a:off x="1390650" y="5510212"/>
-            <a:ext cx="533400" cy="533400"/>
-          </a:xfrm>
-          <a:prstGeom prst="ellipse">
-            <a:avLst/>
-          </a:prstGeom>
-          <a:solidFill>
-            <a:srgbClr val="0D2B5E"/>
+              <a:t>VS</a:t>
+            </a:r>
+          </a:p>
+        </p:txBody>
+      </p:sp>
+      <p:sp>
+        <p:nvSpPr>
+          <p:cNvPr id="24" name="Rectangle 23"/>
+          <p:cNvSpPr/>
+          <p:nvPr/>
+        </p:nvSpPr>
+        <p:spPr>
+          <a:xfrm>
+            <a:off x="1143000" y="8058150"/>
+            <a:ext cx="16002000" cy="9525"/>
+          </a:xfrm>
+          <a:prstGeom prst="rect">
+            <a:avLst/>
+          </a:prstGeom>
+          <a:solidFill>
+            <a:srgbClr val="DCE1E8"/>
           </a:solidFill>
           <a:ln>
             <a:noFill/>
@@ -4450,340 +4420,7 @@
       </p:sp>
       <p:sp>
         <p:nvSpPr>
-          <p:cNvPr id="26" name="TextBox 25"/>
-          <p:cNvSpPr txBox="1"/>
-          <p:nvPr/>
-        </p:nvSpPr>
-        <p:spPr>
-          <a:xfrm>
-            <a:off x="1390650" y="5634038"/>
-            <a:ext cx="533400" cy="323850"/>
-          </a:xfrm>
-          <a:prstGeom prst="rect">
-            <a:avLst/>
-          </a:prstGeom>
-          <a:noFill/>
-        </p:spPr>
-        <p:txBody>
-          <a:bodyPr wrap="square" lIns="0" rIns="0" tIns="0" bIns="0" anchor="t">
-            <a:spAutoFit/>
-          </a:bodyPr>
-          <a:lstStyle/>
-          <a:p>
-            <a:pPr algn="ctr">
-              <a:lnSpc>
-                <a:spcPct val="100000"/>
-              </a:lnSpc>
-            </a:pPr>
-            <a:r>
-              <a:rPr sz="2100" b="1">
-                <a:solidFill>
-                  <a:srgbClr val="FFFFFF"/>
-                </a:solidFill>
-                <a:latin typeface="Pretendard"/>
-                <a:ea typeface="Pretendard"/>
-                <a:cs typeface="Pretendard"/>
-              </a:rPr>
-              <a:t>5</a:t>
-            </a:r>
-          </a:p>
-        </p:txBody>
-      </p:sp>
-      <p:sp>
-        <p:nvSpPr>
-          <p:cNvPr id="27" name="TextBox 26"/>
-          <p:cNvSpPr txBox="1"/>
-          <p:nvPr/>
-        </p:nvSpPr>
-        <p:spPr>
-          <a:xfrm>
-            <a:off x="2190750" y="5505450"/>
-            <a:ext cx="14573250" cy="542925"/>
-          </a:xfrm>
-          <a:prstGeom prst="rect">
-            <a:avLst/>
-          </a:prstGeom>
-          <a:noFill/>
-        </p:spPr>
-        <p:txBody>
-          <a:bodyPr wrap="square" lIns="0" rIns="0" tIns="0" bIns="0" anchor="ctr">
-            <a:spAutoFit/>
-          </a:bodyPr>
-          <a:lstStyle/>
-          <a:p>
-            <a:pPr algn="l">
-              <a:lnSpc>
-                <a:spcPct val="100000"/>
-              </a:lnSpc>
-            </a:pPr>
-            <a:r>
-              <a:rPr sz="2100" b="1">
-                <a:solidFill>
-                  <a:srgbClr val="0D2B5E"/>
-                </a:solidFill>
-                <a:latin typeface="Pretendard"/>
-                <a:ea typeface="Pretendard"/>
-                <a:cs typeface="Pretendard"/>
-              </a:rPr>
-              <a:t>컨슈머를 끄면 LAG 이 커지고, 둘을 붙이면 2:1 로 나뉜다</a:t>
-            </a:r>
-          </a:p>
-        </p:txBody>
-      </p:sp>
-      <p:sp>
-        <p:nvSpPr>
-          <p:cNvPr id="28" name="Rounded Rectangle 27"/>
-          <p:cNvSpPr/>
-          <p:nvPr/>
-        </p:nvSpPr>
-        <p:spPr>
-          <a:xfrm>
-            <a:off x="1143000" y="6162675"/>
-            <a:ext cx="16002000" cy="542925"/>
-          </a:xfrm>
-          <a:prstGeom prst="roundRect">
-            <a:avLst>
-              <a:gd name="adj" fmla="val 8771"/>
-            </a:avLst>
-          </a:prstGeom>
-          <a:solidFill>
-            <a:srgbClr val="FAFBFD"/>
-          </a:solidFill>
-          <a:ln w="9525">
-            <a:solidFill>
-              <a:srgbClr val="DCE1E8"/>
-            </a:solidFill>
-          </a:ln>
-          <a:effectLst/>
-        </p:spPr>
-        <p:txBody>
-          <a:bodyPr rtlCol="0" anchor="ctr" wrap="square"/>
-          <a:lstStyle/>
-          <a:p>
-            <a:pPr algn="ctr"/>
-          </a:p>
-        </p:txBody>
-      </p:sp>
-      <p:sp>
-        <p:nvSpPr>
-          <p:cNvPr id="29" name="Oval 28"/>
-          <p:cNvSpPr/>
-          <p:nvPr/>
-        </p:nvSpPr>
-        <p:spPr>
-          <a:xfrm>
-            <a:off x="1390650" y="6167438"/>
-            <a:ext cx="533400" cy="533400"/>
-          </a:xfrm>
-          <a:prstGeom prst="ellipse">
-            <a:avLst/>
-          </a:prstGeom>
-          <a:solidFill>
-            <a:srgbClr val="0D2B5E"/>
-          </a:solidFill>
-          <a:ln>
-            <a:noFill/>
-          </a:ln>
-          <a:effectLst/>
-        </p:spPr>
-        <p:txBody>
-          <a:bodyPr rtlCol="0" anchor="ctr" wrap="square"/>
-          <a:lstStyle/>
-          <a:p>
-            <a:pPr algn="ctr"/>
-          </a:p>
-        </p:txBody>
-      </p:sp>
-      <p:sp>
-        <p:nvSpPr>
-          <p:cNvPr id="30" name="TextBox 29"/>
-          <p:cNvSpPr txBox="1"/>
-          <p:nvPr/>
-        </p:nvSpPr>
-        <p:spPr>
-          <a:xfrm>
-            <a:off x="1390650" y="6291262"/>
-            <a:ext cx="533400" cy="323850"/>
-          </a:xfrm>
-          <a:prstGeom prst="rect">
-            <a:avLst/>
-          </a:prstGeom>
-          <a:noFill/>
-        </p:spPr>
-        <p:txBody>
-          <a:bodyPr wrap="square" lIns="0" rIns="0" tIns="0" bIns="0" anchor="t">
-            <a:spAutoFit/>
-          </a:bodyPr>
-          <a:lstStyle/>
-          <a:p>
-            <a:pPr algn="ctr">
-              <a:lnSpc>
-                <a:spcPct val="100000"/>
-              </a:lnSpc>
-            </a:pPr>
-            <a:r>
-              <a:rPr sz="2100" b="1">
-                <a:solidFill>
-                  <a:srgbClr val="FFFFFF"/>
-                </a:solidFill>
-                <a:latin typeface="Pretendard"/>
-                <a:ea typeface="Pretendard"/>
-                <a:cs typeface="Pretendard"/>
-              </a:rPr>
-              <a:t>6</a:t>
-            </a:r>
-          </a:p>
-        </p:txBody>
-      </p:sp>
-      <p:sp>
-        <p:nvSpPr>
-          <p:cNvPr id="31" name="TextBox 30"/>
-          <p:cNvSpPr txBox="1"/>
-          <p:nvPr/>
-        </p:nvSpPr>
-        <p:spPr>
-          <a:xfrm>
-            <a:off x="2190750" y="6162675"/>
-            <a:ext cx="14573250" cy="542925"/>
-          </a:xfrm>
-          <a:prstGeom prst="rect">
-            <a:avLst/>
-          </a:prstGeom>
-          <a:noFill/>
-        </p:spPr>
-        <p:txBody>
-          <a:bodyPr wrap="square" lIns="0" rIns="0" tIns="0" bIns="0" anchor="ctr">
-            <a:spAutoFit/>
-          </a:bodyPr>
-          <a:lstStyle/>
-          <a:p>
-            <a:pPr algn="l">
-              <a:lnSpc>
-                <a:spcPct val="100000"/>
-              </a:lnSpc>
-            </a:pPr>
-            <a:r>
-              <a:rPr sz="2100" b="1">
-                <a:solidFill>
-                  <a:srgbClr val="0D2B5E"/>
-                </a:solidFill>
-                <a:latin typeface="Pretendard"/>
-                <a:ea typeface="Pretendard"/>
-                <a:cs typeface="Pretendard"/>
-              </a:rPr>
-              <a:t>하나를 끄면 남은 쪽이 3개를 넘겨받고, analytics-app 은 처음부터 받는다</a:t>
-            </a:r>
-          </a:p>
-        </p:txBody>
-      </p:sp>
-      <p:sp>
-        <p:nvSpPr>
-          <p:cNvPr id="32" name="Rounded Rectangle 31"/>
-          <p:cNvSpPr/>
-          <p:nvPr/>
-        </p:nvSpPr>
-        <p:spPr>
-          <a:xfrm>
-            <a:off x="1143000" y="6953250"/>
-            <a:ext cx="16002000" cy="876300"/>
-          </a:xfrm>
-          <a:prstGeom prst="roundRect">
-            <a:avLst>
-              <a:gd name="adj" fmla="val 5434"/>
-            </a:avLst>
-          </a:prstGeom>
-          <a:solidFill>
-            <a:srgbClr val="EDF3FD"/>
-          </a:solidFill>
-          <a:ln w="9525">
-            <a:solidFill>
-              <a:srgbClr val="BFD3F5"/>
-            </a:solidFill>
-          </a:ln>
-          <a:effectLst/>
-        </p:spPr>
-        <p:txBody>
-          <a:bodyPr rtlCol="0" anchor="ctr" wrap="square"/>
-          <a:lstStyle/>
-          <a:p>
-            <a:pPr algn="ctr"/>
-          </a:p>
-        </p:txBody>
-      </p:sp>
-      <p:sp>
-        <p:nvSpPr>
-          <p:cNvPr id="33" name="TextBox 32"/>
-          <p:cNvSpPr txBox="1"/>
-          <p:nvPr/>
-        </p:nvSpPr>
-        <p:spPr>
-          <a:xfrm>
-            <a:off x="1143000" y="7200900"/>
-            <a:ext cx="16002000" cy="438150"/>
-          </a:xfrm>
-          <a:prstGeom prst="rect">
-            <a:avLst/>
-          </a:prstGeom>
-          <a:noFill/>
-        </p:spPr>
-        <p:txBody>
-          <a:bodyPr wrap="square" lIns="0" rIns="0" tIns="0" bIns="0" anchor="t">
-            <a:spAutoFit/>
-          </a:bodyPr>
-          <a:lstStyle/>
-          <a:p>
-            <a:pPr algn="ctr">
-              <a:lnSpc>
-                <a:spcPct val="100000"/>
-              </a:lnSpc>
-            </a:pPr>
-            <a:r>
-              <a:rPr sz="2475" b="1">
-                <a:solidFill>
-                  <a:srgbClr val="0D2B5E"/>
-                </a:solidFill>
-                <a:latin typeface="Pretendard"/>
-                <a:ea typeface="Pretendard"/>
-                <a:cs typeface="Pretendard"/>
-              </a:rPr>
-              <a:t>리밸런싱 중엔 소비가 잠시 멈춥니다 — 자주 반복되면 「리밸런싱 폭풍」</a:t>
-            </a:r>
-          </a:p>
-        </p:txBody>
-      </p:sp>
-      <p:sp>
-        <p:nvSpPr>
-          <p:cNvPr id="34" name="Rectangle 33"/>
-          <p:cNvSpPr/>
-          <p:nvPr/>
-        </p:nvSpPr>
-        <p:spPr>
-          <a:xfrm>
-            <a:off x="1143000" y="8058150"/>
-            <a:ext cx="16002000" cy="9525"/>
-          </a:xfrm>
-          <a:prstGeom prst="rect">
-            <a:avLst/>
-          </a:prstGeom>
-          <a:solidFill>
-            <a:srgbClr val="DCE1E8"/>
-          </a:solidFill>
-          <a:ln>
-            <a:noFill/>
-          </a:ln>
-          <a:effectLst/>
-        </p:spPr>
-        <p:txBody>
-          <a:bodyPr rtlCol="0" anchor="ctr" wrap="square"/>
-          <a:lstStyle/>
-          <a:p>
-            <a:pPr algn="ctr"/>
-          </a:p>
-        </p:txBody>
-      </p:sp>
-      <p:sp>
-        <p:nvSpPr>
-          <p:cNvPr id="35" name="TextBox 34"/>
+          <p:cNvPr id="25" name="TextBox 24"/>
           <p:cNvSpPr txBox="1"/>
           <p:nvPr/>
         </p:nvSpPr>
@@ -4824,7 +4461,7 @@
       </p:sp>
       <p:sp>
         <p:nvSpPr>
-          <p:cNvPr id="36" name="TextBox 35"/>
+          <p:cNvPr id="26" name="TextBox 25"/>
           <p:cNvSpPr txBox="1"/>
           <p:nvPr/>
         </p:nvSpPr>
@@ -4883,7 +4520,1290 @@
       <p:grpSpPr/>
       <p:sp>
         <p:nvSpPr>
-          <p:cNvPr id="2" name="Oval 1"/>
+          <p:cNvPr id="2" name="deckgen:decor"/>
+          <p:cNvSpPr/>
+          <p:nvPr/>
+        </p:nvSpPr>
+        <p:spPr>
+          <a:xfrm>
+            <a:off x="15811500" y="8382000"/>
+            <a:ext cx="4953000" cy="4953000"/>
+          </a:xfrm>
+          <a:prstGeom prst="ellipse">
+            <a:avLst/>
+          </a:prstGeom>
+          <a:solidFill>
+            <a:srgbClr val="F3F6FC"/>
+          </a:solidFill>
+          <a:ln>
+            <a:noFill/>
+          </a:ln>
+          <a:effectLst/>
+        </p:spPr>
+        <p:txBody>
+          <a:bodyPr rtlCol="0" anchor="ctr" wrap="square"/>
+          <a:lstStyle/>
+          <a:p>
+            <a:pPr algn="ctr"/>
+          </a:p>
+        </p:txBody>
+      </p:sp>
+      <p:sp>
+        <p:nvSpPr>
+          <p:cNvPr id="3" name="deckgen:decor"/>
+          <p:cNvSpPr/>
+          <p:nvPr/>
+        </p:nvSpPr>
+        <p:spPr>
+          <a:xfrm>
+            <a:off x="16859250" y="9429750"/>
+            <a:ext cx="2857500" cy="2857500"/>
+          </a:xfrm>
+          <a:prstGeom prst="ellipse">
+            <a:avLst/>
+          </a:prstGeom>
+          <a:solidFill>
+            <a:srgbClr val="FFFFFF"/>
+          </a:solidFill>
+          <a:ln>
+            <a:noFill/>
+          </a:ln>
+          <a:effectLst/>
+        </p:spPr>
+        <p:txBody>
+          <a:bodyPr rtlCol="0" anchor="ctr" wrap="square"/>
+          <a:lstStyle/>
+          <a:p>
+            <a:pPr algn="ctr"/>
+          </a:p>
+        </p:txBody>
+      </p:sp>
+      <p:sp>
+        <p:nvSpPr>
+          <p:cNvPr id="4" name="deckgen:decor"/>
+          <p:cNvSpPr/>
+          <p:nvPr/>
+        </p:nvSpPr>
+        <p:spPr>
+          <a:xfrm>
+            <a:off x="-1428750" y="1428750"/>
+            <a:ext cx="2857500" cy="2857500"/>
+          </a:xfrm>
+          <a:prstGeom prst="ellipse">
+            <a:avLst/>
+          </a:prstGeom>
+          <a:solidFill>
+            <a:srgbClr val="F7F8FA"/>
+          </a:solidFill>
+          <a:ln>
+            <a:noFill/>
+          </a:ln>
+          <a:effectLst/>
+        </p:spPr>
+        <p:txBody>
+          <a:bodyPr rtlCol="0" anchor="ctr" wrap="square"/>
+          <a:lstStyle/>
+          <a:p>
+            <a:pPr algn="ctr"/>
+          </a:p>
+        </p:txBody>
+      </p:sp>
+      <p:sp>
+        <p:nvSpPr>
+          <p:cNvPr id="5" name="TextBox 4"/>
+          <p:cNvSpPr txBox="1"/>
+          <p:nvPr/>
+        </p:nvSpPr>
+        <p:spPr>
+          <a:xfrm>
+            <a:off x="1143000" y="838200"/>
+            <a:ext cx="16002000" cy="342900"/>
+          </a:xfrm>
+          <a:prstGeom prst="rect">
+            <a:avLst/>
+          </a:prstGeom>
+          <a:noFill/>
+        </p:spPr>
+        <p:txBody>
+          <a:bodyPr wrap="square" lIns="0" rIns="0" tIns="0" bIns="0" anchor="t">
+            <a:spAutoFit/>
+          </a:bodyPr>
+          <a:lstStyle/>
+          <a:p>
+            <a:pPr algn="l">
+              <a:lnSpc>
+                <a:spcPct val="100000"/>
+              </a:lnSpc>
+            </a:pPr>
+            <a:r>
+              <a:rPr sz="1950" b="1" spc="160">
+                <a:solidFill>
+                  <a:srgbClr val="1E5BC6"/>
+                </a:solidFill>
+                <a:latin typeface="Pretendard"/>
+                <a:ea typeface="Pretendard"/>
+                <a:cs typeface="Pretendard"/>
+              </a:rPr>
+              <a:t>확인 포인트</a:t>
+            </a:r>
+          </a:p>
+        </p:txBody>
+      </p:sp>
+      <p:sp>
+        <p:nvSpPr>
+          <p:cNvPr id="6" name="TextBox 5"/>
+          <p:cNvSpPr txBox="1"/>
+          <p:nvPr/>
+        </p:nvSpPr>
+        <p:spPr>
+          <a:xfrm>
+            <a:off x="1143000" y="1162050"/>
+            <a:ext cx="16002000" cy="762000"/>
+          </a:xfrm>
+          <a:prstGeom prst="rect">
+            <a:avLst/>
+          </a:prstGeom>
+          <a:noFill/>
+        </p:spPr>
+        <p:txBody>
+          <a:bodyPr wrap="square" lIns="0" rIns="0" tIns="0" bIns="0" anchor="t">
+            <a:spAutoFit/>
+          </a:bodyPr>
+          <a:lstStyle/>
+          <a:p>
+            <a:pPr algn="l">
+              <a:lnSpc>
+                <a:spcPct val="100000"/>
+              </a:lnSpc>
+            </a:pPr>
+            <a:r>
+              <a:rPr sz="5100" b="1">
+                <a:solidFill>
+                  <a:srgbClr val="0D2B5E"/>
+                </a:solidFill>
+                <a:latin typeface="Pretendard"/>
+                <a:ea typeface="Pretendard"/>
+                <a:cs typeface="Pretendard"/>
+              </a:rPr>
+              <a:t>이 2.5시간이 끝날 때 확인할 것</a:t>
+            </a:r>
+          </a:p>
+        </p:txBody>
+      </p:sp>
+      <p:sp>
+        <p:nvSpPr>
+          <p:cNvPr id="7" name="Rectangle 6"/>
+          <p:cNvSpPr/>
+          <p:nvPr/>
+        </p:nvSpPr>
+        <p:spPr>
+          <a:xfrm>
+            <a:off x="1143000" y="2038350"/>
+            <a:ext cx="16002000" cy="28575"/>
+          </a:xfrm>
+          <a:prstGeom prst="rect">
+            <a:avLst/>
+          </a:prstGeom>
+          <a:solidFill>
+            <a:srgbClr val="0D2B5E"/>
+          </a:solidFill>
+          <a:ln>
+            <a:noFill/>
+          </a:ln>
+          <a:effectLst/>
+        </p:spPr>
+        <p:txBody>
+          <a:bodyPr rtlCol="0" anchor="ctr" wrap="square"/>
+          <a:lstStyle/>
+          <a:p>
+            <a:pPr algn="ctr"/>
+          </a:p>
+        </p:txBody>
+      </p:sp>
+      <p:sp>
+        <p:nvSpPr>
+          <p:cNvPr id="8" name="Rounded Rectangle 7"/>
+          <p:cNvSpPr/>
+          <p:nvPr/>
+        </p:nvSpPr>
+        <p:spPr>
+          <a:xfrm>
+            <a:off x="1143000" y="2876550"/>
+            <a:ext cx="16002000" cy="542925"/>
+          </a:xfrm>
+          <a:prstGeom prst="roundRect">
+            <a:avLst>
+              <a:gd name="adj" fmla="val 8771"/>
+            </a:avLst>
+          </a:prstGeom>
+          <a:solidFill>
+            <a:srgbClr val="FAFBFD"/>
+          </a:solidFill>
+          <a:ln w="9525">
+            <a:solidFill>
+              <a:srgbClr val="DCE1E8"/>
+            </a:solidFill>
+          </a:ln>
+          <a:effectLst/>
+        </p:spPr>
+        <p:txBody>
+          <a:bodyPr rtlCol="0" anchor="ctr" wrap="square"/>
+          <a:lstStyle/>
+          <a:p>
+            <a:pPr algn="ctr"/>
+          </a:p>
+        </p:txBody>
+      </p:sp>
+      <p:sp>
+        <p:nvSpPr>
+          <p:cNvPr id="9" name="Oval 8"/>
+          <p:cNvSpPr/>
+          <p:nvPr/>
+        </p:nvSpPr>
+        <p:spPr>
+          <a:xfrm>
+            <a:off x="1390650" y="2881312"/>
+            <a:ext cx="533400" cy="533400"/>
+          </a:xfrm>
+          <a:prstGeom prst="ellipse">
+            <a:avLst/>
+          </a:prstGeom>
+          <a:solidFill>
+            <a:srgbClr val="0D2B5E"/>
+          </a:solidFill>
+          <a:ln>
+            <a:noFill/>
+          </a:ln>
+          <a:effectLst/>
+        </p:spPr>
+        <p:txBody>
+          <a:bodyPr rtlCol="0" anchor="ctr" wrap="square"/>
+          <a:lstStyle/>
+          <a:p>
+            <a:pPr algn="ctr"/>
+          </a:p>
+        </p:txBody>
+      </p:sp>
+      <p:sp>
+        <p:nvSpPr>
+          <p:cNvPr id="10" name="TextBox 9"/>
+          <p:cNvSpPr txBox="1"/>
+          <p:nvPr/>
+        </p:nvSpPr>
+        <p:spPr>
+          <a:xfrm>
+            <a:off x="1390650" y="3005138"/>
+            <a:ext cx="533400" cy="323850"/>
+          </a:xfrm>
+          <a:prstGeom prst="rect">
+            <a:avLst/>
+          </a:prstGeom>
+          <a:noFill/>
+        </p:spPr>
+        <p:txBody>
+          <a:bodyPr wrap="square" lIns="0" rIns="0" tIns="0" bIns="0" anchor="t">
+            <a:spAutoFit/>
+          </a:bodyPr>
+          <a:lstStyle/>
+          <a:p>
+            <a:pPr algn="ctr">
+              <a:lnSpc>
+                <a:spcPct val="100000"/>
+              </a:lnSpc>
+            </a:pPr>
+            <a:r>
+              <a:rPr sz="2100" b="1">
+                <a:solidFill>
+                  <a:srgbClr val="FFFFFF"/>
+                </a:solidFill>
+                <a:latin typeface="Pretendard"/>
+                <a:ea typeface="Pretendard"/>
+                <a:cs typeface="Pretendard"/>
+              </a:rPr>
+              <a:t>1</a:t>
+            </a:r>
+          </a:p>
+        </p:txBody>
+      </p:sp>
+      <p:sp>
+        <p:nvSpPr>
+          <p:cNvPr id="11" name="TextBox 10"/>
+          <p:cNvSpPr txBox="1"/>
+          <p:nvPr/>
+        </p:nvSpPr>
+        <p:spPr>
+          <a:xfrm>
+            <a:off x="2190750" y="2876550"/>
+            <a:ext cx="14573250" cy="542925"/>
+          </a:xfrm>
+          <a:prstGeom prst="rect">
+            <a:avLst/>
+          </a:prstGeom>
+          <a:noFill/>
+        </p:spPr>
+        <p:txBody>
+          <a:bodyPr wrap="square" lIns="0" rIns="0" tIns="0" bIns="0" anchor="ctr">
+            <a:spAutoFit/>
+          </a:bodyPr>
+          <a:lstStyle/>
+          <a:p>
+            <a:pPr algn="l">
+              <a:lnSpc>
+                <a:spcPct val="100000"/>
+              </a:lnSpc>
+            </a:pPr>
+            <a:r>
+              <a:rPr sz="2100" b="1">
+                <a:solidFill>
+                  <a:srgbClr val="0D2B5E"/>
+                </a:solidFill>
+                <a:latin typeface="Pretendard"/>
+                <a:ea typeface="Pretendard"/>
+                <a:cs typeface="Pretendard"/>
+              </a:rPr>
+              <a:t>docker compose ps 의 STATUS 가 Up … 이다</a:t>
+            </a:r>
+          </a:p>
+        </p:txBody>
+      </p:sp>
+      <p:sp>
+        <p:nvSpPr>
+          <p:cNvPr id="12" name="Rounded Rectangle 11"/>
+          <p:cNvSpPr/>
+          <p:nvPr/>
+        </p:nvSpPr>
+        <p:spPr>
+          <a:xfrm>
+            <a:off x="1143000" y="3533775"/>
+            <a:ext cx="16002000" cy="542925"/>
+          </a:xfrm>
+          <a:prstGeom prst="roundRect">
+            <a:avLst>
+              <a:gd name="adj" fmla="val 8771"/>
+            </a:avLst>
+          </a:prstGeom>
+          <a:solidFill>
+            <a:srgbClr val="FAFBFD"/>
+          </a:solidFill>
+          <a:ln w="9525">
+            <a:solidFill>
+              <a:srgbClr val="DCE1E8"/>
+            </a:solidFill>
+          </a:ln>
+          <a:effectLst/>
+        </p:spPr>
+        <p:txBody>
+          <a:bodyPr rtlCol="0" anchor="ctr" wrap="square"/>
+          <a:lstStyle/>
+          <a:p>
+            <a:pPr algn="ctr"/>
+          </a:p>
+        </p:txBody>
+      </p:sp>
+      <p:sp>
+        <p:nvSpPr>
+          <p:cNvPr id="13" name="Oval 12"/>
+          <p:cNvSpPr/>
+          <p:nvPr/>
+        </p:nvSpPr>
+        <p:spPr>
+          <a:xfrm>
+            <a:off x="1390650" y="3538538"/>
+            <a:ext cx="533400" cy="533400"/>
+          </a:xfrm>
+          <a:prstGeom prst="ellipse">
+            <a:avLst/>
+          </a:prstGeom>
+          <a:solidFill>
+            <a:srgbClr val="0D2B5E"/>
+          </a:solidFill>
+          <a:ln>
+            <a:noFill/>
+          </a:ln>
+          <a:effectLst/>
+        </p:spPr>
+        <p:txBody>
+          <a:bodyPr rtlCol="0" anchor="ctr" wrap="square"/>
+          <a:lstStyle/>
+          <a:p>
+            <a:pPr algn="ctr"/>
+          </a:p>
+        </p:txBody>
+      </p:sp>
+      <p:sp>
+        <p:nvSpPr>
+          <p:cNvPr id="14" name="TextBox 13"/>
+          <p:cNvSpPr txBox="1"/>
+          <p:nvPr/>
+        </p:nvSpPr>
+        <p:spPr>
+          <a:xfrm>
+            <a:off x="1390650" y="3662362"/>
+            <a:ext cx="533400" cy="323850"/>
+          </a:xfrm>
+          <a:prstGeom prst="rect">
+            <a:avLst/>
+          </a:prstGeom>
+          <a:noFill/>
+        </p:spPr>
+        <p:txBody>
+          <a:bodyPr wrap="square" lIns="0" rIns="0" tIns="0" bIns="0" anchor="t">
+            <a:spAutoFit/>
+          </a:bodyPr>
+          <a:lstStyle/>
+          <a:p>
+            <a:pPr algn="ctr">
+              <a:lnSpc>
+                <a:spcPct val="100000"/>
+              </a:lnSpc>
+            </a:pPr>
+            <a:r>
+              <a:rPr sz="2100" b="1">
+                <a:solidFill>
+                  <a:srgbClr val="FFFFFF"/>
+                </a:solidFill>
+                <a:latin typeface="Pretendard"/>
+                <a:ea typeface="Pretendard"/>
+                <a:cs typeface="Pretendard"/>
+              </a:rPr>
+              <a:t>2</a:t>
+            </a:r>
+          </a:p>
+        </p:txBody>
+      </p:sp>
+      <p:sp>
+        <p:nvSpPr>
+          <p:cNvPr id="15" name="TextBox 14"/>
+          <p:cNvSpPr txBox="1"/>
+          <p:nvPr/>
+        </p:nvSpPr>
+        <p:spPr>
+          <a:xfrm>
+            <a:off x="2190750" y="3533775"/>
+            <a:ext cx="14573250" cy="542925"/>
+          </a:xfrm>
+          <a:prstGeom prst="rect">
+            <a:avLst/>
+          </a:prstGeom>
+          <a:noFill/>
+        </p:spPr>
+        <p:txBody>
+          <a:bodyPr wrap="square" lIns="0" rIns="0" tIns="0" bIns="0" anchor="ctr">
+            <a:spAutoFit/>
+          </a:bodyPr>
+          <a:lstStyle/>
+          <a:p>
+            <a:pPr algn="l">
+              <a:lnSpc>
+                <a:spcPct val="100000"/>
+              </a:lnSpc>
+            </a:pPr>
+            <a:r>
+              <a:rPr sz="2100" b="1">
+                <a:solidFill>
+                  <a:srgbClr val="0D2B5E"/>
+                </a:solidFill>
+                <a:latin typeface="Pretendard"/>
+                <a:ea typeface="Pretendard"/>
+                <a:cs typeface="Pretendard"/>
+              </a:rPr>
+              <a:t>kafka:29092 · localhost:9092 두 경로 모두 브로커 정보를 돌려준다</a:t>
+            </a:r>
+          </a:p>
+        </p:txBody>
+      </p:sp>
+      <p:sp>
+        <p:nvSpPr>
+          <p:cNvPr id="16" name="Rounded Rectangle 15"/>
+          <p:cNvSpPr/>
+          <p:nvPr/>
+        </p:nvSpPr>
+        <p:spPr>
+          <a:xfrm>
+            <a:off x="1143000" y="4191000"/>
+            <a:ext cx="16002000" cy="542925"/>
+          </a:xfrm>
+          <a:prstGeom prst="roundRect">
+            <a:avLst>
+              <a:gd name="adj" fmla="val 8771"/>
+            </a:avLst>
+          </a:prstGeom>
+          <a:solidFill>
+            <a:srgbClr val="FAFBFD"/>
+          </a:solidFill>
+          <a:ln w="9525">
+            <a:solidFill>
+              <a:srgbClr val="DCE1E8"/>
+            </a:solidFill>
+          </a:ln>
+          <a:effectLst/>
+        </p:spPr>
+        <p:txBody>
+          <a:bodyPr rtlCol="0" anchor="ctr" wrap="square"/>
+          <a:lstStyle/>
+          <a:p>
+            <a:pPr algn="ctr"/>
+          </a:p>
+        </p:txBody>
+      </p:sp>
+      <p:sp>
+        <p:nvSpPr>
+          <p:cNvPr id="17" name="Oval 16"/>
+          <p:cNvSpPr/>
+          <p:nvPr/>
+        </p:nvSpPr>
+        <p:spPr>
+          <a:xfrm>
+            <a:off x="1390650" y="4195762"/>
+            <a:ext cx="533400" cy="533400"/>
+          </a:xfrm>
+          <a:prstGeom prst="ellipse">
+            <a:avLst/>
+          </a:prstGeom>
+          <a:solidFill>
+            <a:srgbClr val="0D2B5E"/>
+          </a:solidFill>
+          <a:ln>
+            <a:noFill/>
+          </a:ln>
+          <a:effectLst/>
+        </p:spPr>
+        <p:txBody>
+          <a:bodyPr rtlCol="0" anchor="ctr" wrap="square"/>
+          <a:lstStyle/>
+          <a:p>
+            <a:pPr algn="ctr"/>
+          </a:p>
+        </p:txBody>
+      </p:sp>
+      <p:sp>
+        <p:nvSpPr>
+          <p:cNvPr id="18" name="TextBox 17"/>
+          <p:cNvSpPr txBox="1"/>
+          <p:nvPr/>
+        </p:nvSpPr>
+        <p:spPr>
+          <a:xfrm>
+            <a:off x="1390650" y="4319588"/>
+            <a:ext cx="533400" cy="323850"/>
+          </a:xfrm>
+          <a:prstGeom prst="rect">
+            <a:avLst/>
+          </a:prstGeom>
+          <a:noFill/>
+        </p:spPr>
+        <p:txBody>
+          <a:bodyPr wrap="square" lIns="0" rIns="0" tIns="0" bIns="0" anchor="t">
+            <a:spAutoFit/>
+          </a:bodyPr>
+          <a:lstStyle/>
+          <a:p>
+            <a:pPr algn="ctr">
+              <a:lnSpc>
+                <a:spcPct val="100000"/>
+              </a:lnSpc>
+            </a:pPr>
+            <a:r>
+              <a:rPr sz="2100" b="1">
+                <a:solidFill>
+                  <a:srgbClr val="FFFFFF"/>
+                </a:solidFill>
+                <a:latin typeface="Pretendard"/>
+                <a:ea typeface="Pretendard"/>
+                <a:cs typeface="Pretendard"/>
+              </a:rPr>
+              <a:t>3</a:t>
+            </a:r>
+          </a:p>
+        </p:txBody>
+      </p:sp>
+      <p:sp>
+        <p:nvSpPr>
+          <p:cNvPr id="19" name="TextBox 18"/>
+          <p:cNvSpPr txBox="1"/>
+          <p:nvPr/>
+        </p:nvSpPr>
+        <p:spPr>
+          <a:xfrm>
+            <a:off x="2190750" y="4191000"/>
+            <a:ext cx="14573250" cy="542925"/>
+          </a:xfrm>
+          <a:prstGeom prst="rect">
+            <a:avLst/>
+          </a:prstGeom>
+          <a:noFill/>
+        </p:spPr>
+        <p:txBody>
+          <a:bodyPr wrap="square" lIns="0" rIns="0" tIns="0" bIns="0" anchor="ctr">
+            <a:spAutoFit/>
+          </a:bodyPr>
+          <a:lstStyle/>
+          <a:p>
+            <a:pPr algn="l">
+              <a:lnSpc>
+                <a:spcPct val="100000"/>
+              </a:lnSpc>
+            </a:pPr>
+            <a:r>
+              <a:rPr sz="2100" b="1">
+                <a:solidFill>
+                  <a:srgbClr val="0D2B5E"/>
+                </a:solidFill>
+                <a:latin typeface="Pretendard"/>
+                <a:ea typeface="Pretendard"/>
+                <a:cs typeface="Pretendard"/>
+              </a:rPr>
+              <a:t>describe 에 retention.ms=3600000 이 보였다가 되돌렸다</a:t>
+            </a:r>
+          </a:p>
+        </p:txBody>
+      </p:sp>
+      <p:sp>
+        <p:nvSpPr>
+          <p:cNvPr id="20" name="Rounded Rectangle 19"/>
+          <p:cNvSpPr/>
+          <p:nvPr/>
+        </p:nvSpPr>
+        <p:spPr>
+          <a:xfrm>
+            <a:off x="1143000" y="4848225"/>
+            <a:ext cx="16002000" cy="542925"/>
+          </a:xfrm>
+          <a:prstGeom prst="roundRect">
+            <a:avLst>
+              <a:gd name="adj" fmla="val 8771"/>
+            </a:avLst>
+          </a:prstGeom>
+          <a:solidFill>
+            <a:srgbClr val="FAFBFD"/>
+          </a:solidFill>
+          <a:ln w="9525">
+            <a:solidFill>
+              <a:srgbClr val="DCE1E8"/>
+            </a:solidFill>
+          </a:ln>
+          <a:effectLst/>
+        </p:spPr>
+        <p:txBody>
+          <a:bodyPr rtlCol="0" anchor="ctr" wrap="square"/>
+          <a:lstStyle/>
+          <a:p>
+            <a:pPr algn="ctr"/>
+          </a:p>
+        </p:txBody>
+      </p:sp>
+      <p:sp>
+        <p:nvSpPr>
+          <p:cNvPr id="21" name="Oval 20"/>
+          <p:cNvSpPr/>
+          <p:nvPr/>
+        </p:nvSpPr>
+        <p:spPr>
+          <a:xfrm>
+            <a:off x="1390650" y="4852988"/>
+            <a:ext cx="533400" cy="533400"/>
+          </a:xfrm>
+          <a:prstGeom prst="ellipse">
+            <a:avLst/>
+          </a:prstGeom>
+          <a:solidFill>
+            <a:srgbClr val="0D2B5E"/>
+          </a:solidFill>
+          <a:ln>
+            <a:noFill/>
+          </a:ln>
+          <a:effectLst/>
+        </p:spPr>
+        <p:txBody>
+          <a:bodyPr rtlCol="0" anchor="ctr" wrap="square"/>
+          <a:lstStyle/>
+          <a:p>
+            <a:pPr algn="ctr"/>
+          </a:p>
+        </p:txBody>
+      </p:sp>
+      <p:sp>
+        <p:nvSpPr>
+          <p:cNvPr id="22" name="TextBox 21"/>
+          <p:cNvSpPr txBox="1"/>
+          <p:nvPr/>
+        </p:nvSpPr>
+        <p:spPr>
+          <a:xfrm>
+            <a:off x="1390650" y="4976812"/>
+            <a:ext cx="533400" cy="323850"/>
+          </a:xfrm>
+          <a:prstGeom prst="rect">
+            <a:avLst/>
+          </a:prstGeom>
+          <a:noFill/>
+        </p:spPr>
+        <p:txBody>
+          <a:bodyPr wrap="square" lIns="0" rIns="0" tIns="0" bIns="0" anchor="t">
+            <a:spAutoFit/>
+          </a:bodyPr>
+          <a:lstStyle/>
+          <a:p>
+            <a:pPr algn="ctr">
+              <a:lnSpc>
+                <a:spcPct val="100000"/>
+              </a:lnSpc>
+            </a:pPr>
+            <a:r>
+              <a:rPr sz="2100" b="1">
+                <a:solidFill>
+                  <a:srgbClr val="FFFFFF"/>
+                </a:solidFill>
+                <a:latin typeface="Pretendard"/>
+                <a:ea typeface="Pretendard"/>
+                <a:cs typeface="Pretendard"/>
+              </a:rPr>
+              <a:t>4</a:t>
+            </a:r>
+          </a:p>
+        </p:txBody>
+      </p:sp>
+      <p:sp>
+        <p:nvSpPr>
+          <p:cNvPr id="23" name="TextBox 22"/>
+          <p:cNvSpPr txBox="1"/>
+          <p:nvPr/>
+        </p:nvSpPr>
+        <p:spPr>
+          <a:xfrm>
+            <a:off x="2190750" y="4848225"/>
+            <a:ext cx="14573250" cy="542925"/>
+          </a:xfrm>
+          <a:prstGeom prst="rect">
+            <a:avLst/>
+          </a:prstGeom>
+          <a:noFill/>
+        </p:spPr>
+        <p:txBody>
+          <a:bodyPr wrap="square" lIns="0" rIns="0" tIns="0" bIns="0" anchor="ctr">
+            <a:spAutoFit/>
+          </a:bodyPr>
+          <a:lstStyle/>
+          <a:p>
+            <a:pPr algn="l">
+              <a:lnSpc>
+                <a:spcPct val="100000"/>
+              </a:lnSpc>
+            </a:pPr>
+            <a:r>
+              <a:rPr sz="2100" b="1">
+                <a:solidFill>
+                  <a:srgbClr val="0D2B5E"/>
+                </a:solidFill>
+                <a:latin typeface="Pretendard"/>
+                <a:ea typeface="Pretendard"/>
+                <a:cs typeface="Pretendard"/>
+              </a:rPr>
+              <a:t>같은 키는 같은 칸 — user1 은 0, user2 · user3 은 2</a:t>
+            </a:r>
+          </a:p>
+        </p:txBody>
+      </p:sp>
+      <p:sp>
+        <p:nvSpPr>
+          <p:cNvPr id="24" name="Rounded Rectangle 23"/>
+          <p:cNvSpPr/>
+          <p:nvPr/>
+        </p:nvSpPr>
+        <p:spPr>
+          <a:xfrm>
+            <a:off x="1143000" y="5505450"/>
+            <a:ext cx="16002000" cy="542925"/>
+          </a:xfrm>
+          <a:prstGeom prst="roundRect">
+            <a:avLst>
+              <a:gd name="adj" fmla="val 8771"/>
+            </a:avLst>
+          </a:prstGeom>
+          <a:solidFill>
+            <a:srgbClr val="FAFBFD"/>
+          </a:solidFill>
+          <a:ln w="9525">
+            <a:solidFill>
+              <a:srgbClr val="DCE1E8"/>
+            </a:solidFill>
+          </a:ln>
+          <a:effectLst/>
+        </p:spPr>
+        <p:txBody>
+          <a:bodyPr rtlCol="0" anchor="ctr" wrap="square"/>
+          <a:lstStyle/>
+          <a:p>
+            <a:pPr algn="ctr"/>
+          </a:p>
+        </p:txBody>
+      </p:sp>
+      <p:sp>
+        <p:nvSpPr>
+          <p:cNvPr id="25" name="Oval 24"/>
+          <p:cNvSpPr/>
+          <p:nvPr/>
+        </p:nvSpPr>
+        <p:spPr>
+          <a:xfrm>
+            <a:off x="1390650" y="5510212"/>
+            <a:ext cx="533400" cy="533400"/>
+          </a:xfrm>
+          <a:prstGeom prst="ellipse">
+            <a:avLst/>
+          </a:prstGeom>
+          <a:solidFill>
+            <a:srgbClr val="0D2B5E"/>
+          </a:solidFill>
+          <a:ln>
+            <a:noFill/>
+          </a:ln>
+          <a:effectLst/>
+        </p:spPr>
+        <p:txBody>
+          <a:bodyPr rtlCol="0" anchor="ctr" wrap="square"/>
+          <a:lstStyle/>
+          <a:p>
+            <a:pPr algn="ctr"/>
+          </a:p>
+        </p:txBody>
+      </p:sp>
+      <p:sp>
+        <p:nvSpPr>
+          <p:cNvPr id="26" name="TextBox 25"/>
+          <p:cNvSpPr txBox="1"/>
+          <p:nvPr/>
+        </p:nvSpPr>
+        <p:spPr>
+          <a:xfrm>
+            <a:off x="1390650" y="5634038"/>
+            <a:ext cx="533400" cy="323850"/>
+          </a:xfrm>
+          <a:prstGeom prst="rect">
+            <a:avLst/>
+          </a:prstGeom>
+          <a:noFill/>
+        </p:spPr>
+        <p:txBody>
+          <a:bodyPr wrap="square" lIns="0" rIns="0" tIns="0" bIns="0" anchor="t">
+            <a:spAutoFit/>
+          </a:bodyPr>
+          <a:lstStyle/>
+          <a:p>
+            <a:pPr algn="ctr">
+              <a:lnSpc>
+                <a:spcPct val="100000"/>
+              </a:lnSpc>
+            </a:pPr>
+            <a:r>
+              <a:rPr sz="2100" b="1">
+                <a:solidFill>
+                  <a:srgbClr val="FFFFFF"/>
+                </a:solidFill>
+                <a:latin typeface="Pretendard"/>
+                <a:ea typeface="Pretendard"/>
+                <a:cs typeface="Pretendard"/>
+              </a:rPr>
+              <a:t>5</a:t>
+            </a:r>
+          </a:p>
+        </p:txBody>
+      </p:sp>
+      <p:sp>
+        <p:nvSpPr>
+          <p:cNvPr id="27" name="TextBox 26"/>
+          <p:cNvSpPr txBox="1"/>
+          <p:nvPr/>
+        </p:nvSpPr>
+        <p:spPr>
+          <a:xfrm>
+            <a:off x="2190750" y="5505450"/>
+            <a:ext cx="14573250" cy="542925"/>
+          </a:xfrm>
+          <a:prstGeom prst="rect">
+            <a:avLst/>
+          </a:prstGeom>
+          <a:noFill/>
+        </p:spPr>
+        <p:txBody>
+          <a:bodyPr wrap="square" lIns="0" rIns="0" tIns="0" bIns="0" anchor="ctr">
+            <a:spAutoFit/>
+          </a:bodyPr>
+          <a:lstStyle/>
+          <a:p>
+            <a:pPr algn="l">
+              <a:lnSpc>
+                <a:spcPct val="100000"/>
+              </a:lnSpc>
+            </a:pPr>
+            <a:r>
+              <a:rPr sz="2100" b="1">
+                <a:solidFill>
+                  <a:srgbClr val="0D2B5E"/>
+                </a:solidFill>
+                <a:latin typeface="Pretendard"/>
+                <a:ea typeface="Pretendard"/>
+                <a:cs typeface="Pretendard"/>
+              </a:rPr>
+              <a:t>컨슈머를 끄면 LAG 이 커지고, 둘을 붙이면 0·1번 / 2번</a:t>
+            </a:r>
+          </a:p>
+        </p:txBody>
+      </p:sp>
+      <p:sp>
+        <p:nvSpPr>
+          <p:cNvPr id="28" name="Rounded Rectangle 27"/>
+          <p:cNvSpPr/>
+          <p:nvPr/>
+        </p:nvSpPr>
+        <p:spPr>
+          <a:xfrm>
+            <a:off x="1143000" y="6162675"/>
+            <a:ext cx="16002000" cy="542925"/>
+          </a:xfrm>
+          <a:prstGeom prst="roundRect">
+            <a:avLst>
+              <a:gd name="adj" fmla="val 8771"/>
+            </a:avLst>
+          </a:prstGeom>
+          <a:solidFill>
+            <a:srgbClr val="FAFBFD"/>
+          </a:solidFill>
+          <a:ln w="9525">
+            <a:solidFill>
+              <a:srgbClr val="DCE1E8"/>
+            </a:solidFill>
+          </a:ln>
+          <a:effectLst/>
+        </p:spPr>
+        <p:txBody>
+          <a:bodyPr rtlCol="0" anchor="ctr" wrap="square"/>
+          <a:lstStyle/>
+          <a:p>
+            <a:pPr algn="ctr"/>
+          </a:p>
+        </p:txBody>
+      </p:sp>
+      <p:sp>
+        <p:nvSpPr>
+          <p:cNvPr id="29" name="Oval 28"/>
+          <p:cNvSpPr/>
+          <p:nvPr/>
+        </p:nvSpPr>
+        <p:spPr>
+          <a:xfrm>
+            <a:off x="1390650" y="6167438"/>
+            <a:ext cx="533400" cy="533400"/>
+          </a:xfrm>
+          <a:prstGeom prst="ellipse">
+            <a:avLst/>
+          </a:prstGeom>
+          <a:solidFill>
+            <a:srgbClr val="0D2B5E"/>
+          </a:solidFill>
+          <a:ln>
+            <a:noFill/>
+          </a:ln>
+          <a:effectLst/>
+        </p:spPr>
+        <p:txBody>
+          <a:bodyPr rtlCol="0" anchor="ctr" wrap="square"/>
+          <a:lstStyle/>
+          <a:p>
+            <a:pPr algn="ctr"/>
+          </a:p>
+        </p:txBody>
+      </p:sp>
+      <p:sp>
+        <p:nvSpPr>
+          <p:cNvPr id="30" name="TextBox 29"/>
+          <p:cNvSpPr txBox="1"/>
+          <p:nvPr/>
+        </p:nvSpPr>
+        <p:spPr>
+          <a:xfrm>
+            <a:off x="1390650" y="6291262"/>
+            <a:ext cx="533400" cy="323850"/>
+          </a:xfrm>
+          <a:prstGeom prst="rect">
+            <a:avLst/>
+          </a:prstGeom>
+          <a:noFill/>
+        </p:spPr>
+        <p:txBody>
+          <a:bodyPr wrap="square" lIns="0" rIns="0" tIns="0" bIns="0" anchor="t">
+            <a:spAutoFit/>
+          </a:bodyPr>
+          <a:lstStyle/>
+          <a:p>
+            <a:pPr algn="ctr">
+              <a:lnSpc>
+                <a:spcPct val="100000"/>
+              </a:lnSpc>
+            </a:pPr>
+            <a:r>
+              <a:rPr sz="2100" b="1">
+                <a:solidFill>
+                  <a:srgbClr val="FFFFFF"/>
+                </a:solidFill>
+                <a:latin typeface="Pretendard"/>
+                <a:ea typeface="Pretendard"/>
+                <a:cs typeface="Pretendard"/>
+              </a:rPr>
+              <a:t>6</a:t>
+            </a:r>
+          </a:p>
+        </p:txBody>
+      </p:sp>
+      <p:sp>
+        <p:nvSpPr>
+          <p:cNvPr id="31" name="TextBox 30"/>
+          <p:cNvSpPr txBox="1"/>
+          <p:nvPr/>
+        </p:nvSpPr>
+        <p:spPr>
+          <a:xfrm>
+            <a:off x="2190750" y="6162675"/>
+            <a:ext cx="14573250" cy="542925"/>
+          </a:xfrm>
+          <a:prstGeom prst="rect">
+            <a:avLst/>
+          </a:prstGeom>
+          <a:noFill/>
+        </p:spPr>
+        <p:txBody>
+          <a:bodyPr wrap="square" lIns="0" rIns="0" tIns="0" bIns="0" anchor="ctr">
+            <a:spAutoFit/>
+          </a:bodyPr>
+          <a:lstStyle/>
+          <a:p>
+            <a:pPr algn="l">
+              <a:lnSpc>
+                <a:spcPct val="100000"/>
+              </a:lnSpc>
+            </a:pPr>
+            <a:r>
+              <a:rPr sz="2100" b="1">
+                <a:solidFill>
+                  <a:srgbClr val="0D2B5E"/>
+                </a:solidFill>
+                <a:latin typeface="Pretendard"/>
+                <a:ea typeface="Pretendard"/>
+                <a:cs typeface="Pretendard"/>
+              </a:rPr>
+              <a:t>하나를 끄면 남은 쪽이 3개를 넘겨받고, analytics-app 은 처음부터 받는다</a:t>
+            </a:r>
+          </a:p>
+        </p:txBody>
+      </p:sp>
+      <p:sp>
+        <p:nvSpPr>
+          <p:cNvPr id="32" name="Rounded Rectangle 31"/>
+          <p:cNvSpPr/>
+          <p:nvPr/>
+        </p:nvSpPr>
+        <p:spPr>
+          <a:xfrm>
+            <a:off x="1143000" y="6953250"/>
+            <a:ext cx="16002000" cy="876300"/>
+          </a:xfrm>
+          <a:prstGeom prst="roundRect">
+            <a:avLst>
+              <a:gd name="adj" fmla="val 5434"/>
+            </a:avLst>
+          </a:prstGeom>
+          <a:solidFill>
+            <a:srgbClr val="EDF3FD"/>
+          </a:solidFill>
+          <a:ln w="9525">
+            <a:solidFill>
+              <a:srgbClr val="BFD3F5"/>
+            </a:solidFill>
+          </a:ln>
+          <a:effectLst/>
+        </p:spPr>
+        <p:txBody>
+          <a:bodyPr rtlCol="0" anchor="ctr" wrap="square"/>
+          <a:lstStyle/>
+          <a:p>
+            <a:pPr algn="ctr"/>
+          </a:p>
+        </p:txBody>
+      </p:sp>
+      <p:sp>
+        <p:nvSpPr>
+          <p:cNvPr id="33" name="TextBox 32"/>
+          <p:cNvSpPr txBox="1"/>
+          <p:nvPr/>
+        </p:nvSpPr>
+        <p:spPr>
+          <a:xfrm>
+            <a:off x="1143000" y="7200900"/>
+            <a:ext cx="16002000" cy="438150"/>
+          </a:xfrm>
+          <a:prstGeom prst="rect">
+            <a:avLst/>
+          </a:prstGeom>
+          <a:noFill/>
+        </p:spPr>
+        <p:txBody>
+          <a:bodyPr wrap="square" lIns="0" rIns="0" tIns="0" bIns="0" anchor="t">
+            <a:spAutoFit/>
+          </a:bodyPr>
+          <a:lstStyle/>
+          <a:p>
+            <a:pPr algn="ctr">
+              <a:lnSpc>
+                <a:spcPct val="100000"/>
+              </a:lnSpc>
+            </a:pPr>
+            <a:r>
+              <a:rPr sz="2475" b="1">
+                <a:solidFill>
+                  <a:srgbClr val="0D2B5E"/>
+                </a:solidFill>
+                <a:latin typeface="Pretendard"/>
+                <a:ea typeface="Pretendard"/>
+                <a:cs typeface="Pretendard"/>
+              </a:rPr>
+              <a:t>리밸런싱 중엔 소비가 잠시 멈춥니다 — 자주 반복되면 「리밸런싱 폭풍」</a:t>
+            </a:r>
+          </a:p>
+        </p:txBody>
+      </p:sp>
+      <p:sp>
+        <p:nvSpPr>
+          <p:cNvPr id="34" name="Rectangle 33"/>
+          <p:cNvSpPr/>
+          <p:nvPr/>
+        </p:nvSpPr>
+        <p:spPr>
+          <a:xfrm>
+            <a:off x="1143000" y="8058150"/>
+            <a:ext cx="16002000" cy="9525"/>
+          </a:xfrm>
+          <a:prstGeom prst="rect">
+            <a:avLst/>
+          </a:prstGeom>
+          <a:solidFill>
+            <a:srgbClr val="DCE1E8"/>
+          </a:solidFill>
+          <a:ln>
+            <a:noFill/>
+          </a:ln>
+          <a:effectLst/>
+        </p:spPr>
+        <p:txBody>
+          <a:bodyPr rtlCol="0" anchor="ctr" wrap="square"/>
+          <a:lstStyle/>
+          <a:p>
+            <a:pPr algn="ctr"/>
+          </a:p>
+        </p:txBody>
+      </p:sp>
+      <p:sp>
+        <p:nvSpPr>
+          <p:cNvPr id="35" name="TextBox 34"/>
+          <p:cNvSpPr txBox="1"/>
+          <p:nvPr/>
+        </p:nvSpPr>
+        <p:spPr>
+          <a:xfrm>
+            <a:off x="1143000" y="8248650"/>
+            <a:ext cx="13335000" cy="323850"/>
+          </a:xfrm>
+          <a:prstGeom prst="rect">
+            <a:avLst/>
+          </a:prstGeom>
+          <a:noFill/>
+        </p:spPr>
+        <p:txBody>
+          <a:bodyPr wrap="square" lIns="0" rIns="0" tIns="0" bIns="0" anchor="t">
+            <a:spAutoFit/>
+          </a:bodyPr>
+          <a:lstStyle/>
+          <a:p>
+            <a:pPr algn="l">
+              <a:lnSpc>
+                <a:spcPct val="100000"/>
+              </a:lnSpc>
+            </a:pPr>
+            <a:r>
+              <a:rPr sz="1725" b="0">
+                <a:solidFill>
+                  <a:srgbClr val="7D7D7D"/>
+                </a:solidFill>
+                <a:latin typeface="Pretendard"/>
+                <a:ea typeface="Pretendard"/>
+                <a:cs typeface="Pretendard"/>
+              </a:rPr>
+              <a:t>데이터 엔지니어링 &amp; RAG 파이프라인 160H · 6-2 · 실습 2.5H</a:t>
+            </a:r>
+          </a:p>
+        </p:txBody>
+      </p:sp>
+      <p:sp>
+        <p:nvSpPr>
+          <p:cNvPr id="36" name="TextBox 35"/>
+          <p:cNvSpPr txBox="1"/>
+          <p:nvPr/>
+        </p:nvSpPr>
+        <p:spPr>
+          <a:xfrm>
+            <a:off x="15240000" y="8248650"/>
+            <a:ext cx="1905000" cy="323850"/>
+          </a:xfrm>
+          <a:prstGeom prst="rect">
+            <a:avLst/>
+          </a:prstGeom>
+          <a:noFill/>
+        </p:spPr>
+        <p:txBody>
+          <a:bodyPr wrap="square" lIns="0" rIns="0" tIns="0" bIns="0" anchor="t">
+            <a:spAutoFit/>
+          </a:bodyPr>
+          <a:lstStyle/>
+          <a:p>
+            <a:pPr algn="r">
+              <a:lnSpc>
+                <a:spcPct val="100000"/>
+              </a:lnSpc>
+            </a:pPr>
+            <a:r>
+              <a:rPr sz="1725" b="0">
+                <a:solidFill>
+                  <a:srgbClr val="7D7D7D"/>
+                </a:solidFill>
+                <a:latin typeface="Pretendard"/>
+                <a:ea typeface="Pretendard"/>
+                <a:cs typeface="Pretendard"/>
+              </a:rPr>
+              <a:t>11</a:t>
+            </a:r>
+          </a:p>
+        </p:txBody>
+      </p:sp>
+    </p:spTree>
+  </p:cSld>
+  <p:clrMapOvr>
+    <a:masterClrMapping/>
+  </p:clrMapOvr>
+</p:sld>
+</file>
+
+<file path=ppt/slides/slide12.xml><?xml version="1.0" encoding="utf-8"?>
+<p:sld xmlns:a="http://schemas.openxmlformats.org/drawingml/2006/main" xmlns:p="http://schemas.openxmlformats.org/presentationml/2006/main" xmlns:r="http://schemas.openxmlformats.org/officeDocument/2006/relationships">
+  <p:cSld>
+    <p:spTree>
+      <p:nvGrpSpPr>
+        <p:cNvPr id="1" name=""/>
+        <p:cNvGrpSpPr/>
+        <p:nvPr/>
+      </p:nvGrpSpPr>
+      <p:grpSpPr/>
+      <p:sp>
+        <p:nvSpPr>
+          <p:cNvPr id="2" name="deckgen:decor"/>
           <p:cNvSpPr/>
           <p:nvPr/>
         </p:nvSpPr>
@@ -4913,7 +5833,7 @@
       </p:sp>
       <p:sp>
         <p:nvSpPr>
-          <p:cNvPr id="3" name="Oval 2"/>
+          <p:cNvPr id="3" name="deckgen:decor"/>
           <p:cNvSpPr/>
           <p:nvPr/>
         </p:nvSpPr>
@@ -5136,7 +6056,7 @@
         </p:nvSpPr>
         <p:spPr>
           <a:xfrm>
-            <a:off x="1428750" y="5486400"/>
+            <a:off x="1428750" y="5476875"/>
             <a:ext cx="419100" cy="381000"/>
           </a:xfrm>
           <a:prstGeom prst="rect">
@@ -5177,7 +6097,7 @@
         </p:nvSpPr>
         <p:spPr>
           <a:xfrm>
-            <a:off x="1905000" y="5486400"/>
+            <a:off x="1905000" y="5476875"/>
             <a:ext cx="6724650" cy="381000"/>
           </a:xfrm>
           <a:prstGeom prst="rect">
@@ -5252,7 +6172,7 @@
         </p:nvSpPr>
         <p:spPr>
           <a:xfrm>
-            <a:off x="9658350" y="5486400"/>
+            <a:off x="9658350" y="5476875"/>
             <a:ext cx="419100" cy="381000"/>
           </a:xfrm>
           <a:prstGeom prst="rect">
@@ -5293,7 +6213,7 @@
         </p:nvSpPr>
         <p:spPr>
           <a:xfrm>
-            <a:off x="10134600" y="5486400"/>
+            <a:off x="10134600" y="5476875"/>
             <a:ext cx="6724650" cy="381000"/>
           </a:xfrm>
           <a:prstGeom prst="rect">
@@ -5368,7 +6288,7 @@
         </p:nvSpPr>
         <p:spPr>
           <a:xfrm>
-            <a:off x="1428750" y="6515100"/>
+            <a:off x="1428750" y="6505575"/>
             <a:ext cx="419100" cy="381000"/>
           </a:xfrm>
           <a:prstGeom prst="rect">
@@ -5409,7 +6329,7 @@
         </p:nvSpPr>
         <p:spPr>
           <a:xfrm>
-            <a:off x="1905000" y="6515100"/>
+            <a:off x="1905000" y="6505575"/>
             <a:ext cx="6724650" cy="381000"/>
           </a:xfrm>
           <a:prstGeom prst="rect">
@@ -5437,7 +6357,7 @@
                 <a:ea typeface="Pretendard"/>
                 <a:cs typeface="Pretendard"/>
               </a:rPr>
-              <a:t>자주 겪는 오류 네 가지</a:t>
+              <a:t>자주 겪는 오류 다섯 가지</a:t>
             </a:r>
           </a:p>
         </p:txBody>
@@ -5484,7 +6404,7 @@
         </p:nvSpPr>
         <p:spPr>
           <a:xfrm>
-            <a:off x="9658350" y="6515100"/>
+            <a:off x="9658350" y="6505575"/>
             <a:ext cx="419100" cy="381000"/>
           </a:xfrm>
           <a:prstGeom prst="rect">
@@ -5525,7 +6445,7 @@
         </p:nvSpPr>
         <p:spPr>
           <a:xfrm>
-            <a:off x="10134600" y="6515100"/>
+            <a:off x="10134600" y="6505575"/>
             <a:ext cx="6724650" cy="381000"/>
           </a:xfrm>
           <a:prstGeom prst="rect">
@@ -5690,7 +6610,7 @@
       <p:grpSpPr/>
       <p:sp>
         <p:nvSpPr>
-          <p:cNvPr id="2" name="Oval 1"/>
+          <p:cNvPr id="2" name="deckgen:decor"/>
           <p:cNvSpPr/>
           <p:nvPr/>
         </p:nvSpPr>
@@ -5720,7 +6640,7 @@
       </p:sp>
       <p:sp>
         <p:nvSpPr>
-          <p:cNvPr id="3" name="Oval 2"/>
+          <p:cNvPr id="3" name="deckgen:decor"/>
           <p:cNvSpPr/>
           <p:nvPr/>
         </p:nvSpPr>
@@ -5750,7 +6670,7 @@
       </p:sp>
       <p:sp>
         <p:nvSpPr>
-          <p:cNvPr id="4" name="Oval 3"/>
+          <p:cNvPr id="4" name="deckgen:decor"/>
           <p:cNvSpPr/>
           <p:nvPr/>
         </p:nvSpPr>
@@ -6681,7 +7601,7 @@
       <p:grpSpPr/>
       <p:sp>
         <p:nvSpPr>
-          <p:cNvPr id="2" name="Oval 1"/>
+          <p:cNvPr id="2" name="deckgen:decor"/>
           <p:cNvSpPr/>
           <p:nvPr/>
         </p:nvSpPr>
@@ -6711,7 +7631,7 @@
       </p:sp>
       <p:sp>
         <p:nvSpPr>
-          <p:cNvPr id="3" name="Oval 2"/>
+          <p:cNvPr id="3" name="deckgen:decor"/>
           <p:cNvSpPr/>
           <p:nvPr/>
         </p:nvSpPr>
@@ -6741,7 +7661,7 @@
       </p:sp>
       <p:sp>
         <p:nvSpPr>
-          <p:cNvPr id="4" name="Oval 3"/>
+          <p:cNvPr id="4" name="deckgen:decor"/>
           <p:cNvSpPr/>
           <p:nvPr/>
         </p:nvSpPr>
@@ -7227,7 +8147,7 @@
                 <a:ea typeface="Pretendard"/>
                 <a:cs typeface="Pretendard"/>
               </a:rPr>
-              <a:t>kafka:29092</a:t>
+              <a:t>29092 · 9092</a:t>
             </a:r>
           </a:p>
           <a:p>
@@ -7245,7 +8165,7 @@
                 <a:ea typeface="Pretendard"/>
                 <a:cs typeface="Pretendard"/>
               </a:rPr>
-              <a:t>localhost:9092</a:t>
+              <a:t>+ 일부러 실패</a:t>
             </a:r>
           </a:p>
         </p:txBody>
@@ -7874,7 +8794,7 @@
       <p:grpSpPr/>
       <p:sp>
         <p:nvSpPr>
-          <p:cNvPr id="2" name="Oval 1"/>
+          <p:cNvPr id="2" name="deckgen:decor"/>
           <p:cNvSpPr/>
           <p:nvPr/>
         </p:nvSpPr>
@@ -7904,7 +8824,7 @@
       </p:sp>
       <p:sp>
         <p:nvSpPr>
-          <p:cNvPr id="3" name="Oval 2"/>
+          <p:cNvPr id="3" name="deckgen:decor"/>
           <p:cNvSpPr/>
           <p:nvPr/>
         </p:nvSpPr>
@@ -7934,7 +8854,7 @@
       </p:sp>
       <p:sp>
         <p:nvSpPr>
-          <p:cNvPr id="4" name="Oval 3"/>
+          <p:cNvPr id="4" name="deckgen:decor"/>
           <p:cNvSpPr/>
           <p:nvPr/>
         </p:nvSpPr>
@@ -9152,7 +10072,7 @@
                 <a:ea typeface="Pretendard"/>
                 <a:cs typeface="Pretendard"/>
               </a:rPr>
-              <a:t>먼저 docker rm -f kafka 로 6-1 컨테이너를 정리한다 — 9092 포트 충돌 방지</a:t>
+              <a:t>파일은 cat &gt; docker-compose.yml &lt;&lt; 'EOF' 로 · Conflict "/kafka" 가 나오면 docker rm -fv kafka</a:t>
             </a:r>
           </a:p>
         </p:txBody>
@@ -9193,7 +10113,7 @@
                 <a:ea typeface="Pretendard"/>
                 <a:cs typeface="Pretendard"/>
               </a:rPr>
-              <a:t>docker compose config 로 문법 확인 → up -d → ps 의 STATUS running · docker logs kafka 에 「Kafka Server started」</a:t>
+              <a:t>config 세 줄 → up -d → ps 의 STATUS Up … · 몇 초 뒤 docker logs kafka 에 「Kafka Server started」(실측 5초)</a:t>
             </a:r>
           </a:p>
         </p:txBody>
@@ -9330,7 +10250,7 @@
       <p:grpSpPr/>
       <p:sp>
         <p:nvSpPr>
-          <p:cNvPr id="2" name="Oval 1"/>
+          <p:cNvPr id="2" name="deckgen:decor"/>
           <p:cNvSpPr/>
           <p:nvPr/>
         </p:nvSpPr>
@@ -9360,7 +10280,7 @@
       </p:sp>
       <p:sp>
         <p:nvSpPr>
-          <p:cNvPr id="3" name="Oval 2"/>
+          <p:cNvPr id="3" name="deckgen:decor"/>
           <p:cNvSpPr/>
           <p:nvPr/>
         </p:nvSpPr>
@@ -9390,7 +10310,7 @@
       </p:sp>
       <p:sp>
         <p:nvSpPr>
-          <p:cNvPr id="4" name="Oval 3"/>
+          <p:cNvPr id="4" name="deckgen:decor"/>
           <p:cNvSpPr/>
           <p:nvPr/>
         </p:nvSpPr>
@@ -10567,7 +11487,7 @@
       <p:grpSpPr/>
       <p:sp>
         <p:nvSpPr>
-          <p:cNvPr id="2" name="Oval 1"/>
+          <p:cNvPr id="2" name="deckgen:decor"/>
           <p:cNvSpPr/>
           <p:nvPr/>
         </p:nvSpPr>
@@ -10597,7 +11517,7 @@
       </p:sp>
       <p:sp>
         <p:nvSpPr>
-          <p:cNvPr id="3" name="Oval 2"/>
+          <p:cNvPr id="3" name="deckgen:decor"/>
           <p:cNvSpPr/>
           <p:nvPr/>
         </p:nvSpPr>
@@ -10627,7 +11547,7 @@
       </p:sp>
       <p:sp>
         <p:nvSpPr>
-          <p:cNvPr id="4" name="Oval 3"/>
+          <p:cNvPr id="4" name="deckgen:decor"/>
           <p:cNvSpPr/>
           <p:nvPr/>
         </p:nvSpPr>
@@ -10691,7 +11611,7 @@
                 <a:ea typeface="Pretendard"/>
                 <a:cs typeface="Pretendard"/>
               </a:rPr>
-              <a:t>4단계</a:t>
+              <a:t>2단계 — 일부러 실패</a:t>
             </a:r>
           </a:p>
         </p:txBody>
@@ -10732,7 +11652,7 @@
                 <a:ea typeface="Pretendard"/>
                 <a:cs typeface="Pretendard"/>
               </a:rPr>
-              <a:t>메시지를 보내고 파티션 분배를 본다 — 같은 키는 같은 파티션</a:t>
+              <a:t>컨테이너 안에서 바깥용 주소 kafka:9092 로 붙으면</a:t>
             </a:r>
           </a:p>
         </p:txBody>
@@ -10769,100 +11689,18 @@
       </p:sp>
       <p:sp>
         <p:nvSpPr>
-          <p:cNvPr id="8" name="TextBox 7"/>
-          <p:cNvSpPr txBox="1"/>
-          <p:nvPr/>
-        </p:nvSpPr>
-        <p:spPr>
-          <a:xfrm>
-            <a:off x="1143000" y="2857500"/>
-            <a:ext cx="7372350" cy="533400"/>
-          </a:xfrm>
-          <a:prstGeom prst="rect">
-            <a:avLst/>
-          </a:prstGeom>
-          <a:noFill/>
-        </p:spPr>
-        <p:txBody>
-          <a:bodyPr wrap="square" lIns="0" rIns="0" tIns="0" bIns="0" anchor="t">
-            <a:spAutoFit/>
-          </a:bodyPr>
-          <a:lstStyle/>
-          <a:p>
-            <a:pPr algn="l">
-              <a:lnSpc>
-                <a:spcPct val="110000"/>
-              </a:lnSpc>
-            </a:pPr>
-            <a:r>
-              <a:rPr sz="3150" b="1">
-                <a:solidFill>
-                  <a:srgbClr val="0D2B5E"/>
-                </a:solidFill>
-                <a:latin typeface="Pretendard"/>
-                <a:ea typeface="Pretendard"/>
-                <a:cs typeface="Pretendard"/>
-              </a:rPr>
-              <a:t>터미널 1 — Consumer</a:t>
-            </a:r>
-          </a:p>
-        </p:txBody>
-      </p:sp>
-      <p:sp>
-        <p:nvSpPr>
-          <p:cNvPr id="9" name="TextBox 8"/>
-          <p:cNvSpPr txBox="1"/>
-          <p:nvPr/>
-        </p:nvSpPr>
-        <p:spPr>
-          <a:xfrm>
-            <a:off x="1143000" y="3467100"/>
-            <a:ext cx="7372350" cy="876300"/>
-          </a:xfrm>
-          <a:prstGeom prst="rect">
-            <a:avLst/>
-          </a:prstGeom>
-          <a:noFill/>
-        </p:spPr>
-        <p:txBody>
-          <a:bodyPr wrap="square" lIns="0" rIns="0" tIns="0" bIns="0" anchor="t">
-            <a:spAutoFit/>
-          </a:bodyPr>
-          <a:lstStyle/>
-          <a:p>
-            <a:pPr algn="l">
-              <a:lnSpc>
-                <a:spcPct val="146000"/>
-              </a:lnSpc>
-            </a:pPr>
-            <a:r>
-              <a:rPr sz="2250" b="0">
-                <a:solidFill>
-                  <a:srgbClr val="3D3D3D"/>
-                </a:solidFill>
-                <a:latin typeface="Pretendard"/>
-                <a:ea typeface="Pretendard"/>
-                <a:cs typeface="Pretendard"/>
-              </a:rPr>
-              <a:t>그룹 order-app · 파티션 번호를 함께 출력</a:t>
-            </a:r>
-          </a:p>
-        </p:txBody>
-      </p:sp>
-      <p:sp>
-        <p:nvSpPr>
-          <p:cNvPr id="10" name="Rounded Rectangle 9"/>
-          <p:cNvSpPr/>
-          <p:nvPr/>
-        </p:nvSpPr>
-        <p:spPr>
-          <a:xfrm>
-            <a:off x="1143000" y="4610100"/>
-            <a:ext cx="7372350" cy="2857500"/>
+          <p:cNvPr id="8" name="Rounded Rectangle 7"/>
+          <p:cNvSpPr/>
+          <p:nvPr/>
+        </p:nvSpPr>
+        <p:spPr>
+          <a:xfrm>
+            <a:off x="1143000" y="2933700"/>
+            <a:ext cx="16002000" cy="1000125"/>
           </a:xfrm>
           <a:prstGeom prst="roundRect">
             <a:avLst>
-              <a:gd name="adj" fmla="val 1666"/>
+              <a:gd name="adj" fmla="val 4761"/>
             </a:avLst>
           </a:prstGeom>
           <a:solidFill>
@@ -10885,20 +11723,20 @@
       </p:sp>
       <p:sp>
         <p:nvSpPr>
-          <p:cNvPr id="11" name="Oval 10"/>
-          <p:cNvSpPr/>
-          <p:nvPr/>
-        </p:nvSpPr>
-        <p:spPr>
-          <a:xfrm>
-            <a:off x="1447800" y="5016817"/>
-            <a:ext cx="97155" cy="97155"/>
+          <p:cNvPr id="9" name="Oval 8"/>
+          <p:cNvSpPr/>
+          <p:nvPr/>
+        </p:nvSpPr>
+        <p:spPr>
+          <a:xfrm>
+            <a:off x="1447800" y="3138488"/>
+            <a:ext cx="590550" cy="590550"/>
           </a:xfrm>
           <a:prstGeom prst="ellipse">
             <a:avLst/>
           </a:prstGeom>
           <a:solidFill>
-            <a:srgbClr val="1E5BC6"/>
+            <a:srgbClr val="0D2B5E"/>
           </a:solidFill>
           <a:ln>
             <a:noFill/>
@@ -10915,22 +11753,104 @@
       </p:sp>
       <p:sp>
         <p:nvSpPr>
+          <p:cNvPr id="10" name="TextBox 9"/>
+          <p:cNvSpPr txBox="1"/>
+          <p:nvPr/>
+        </p:nvSpPr>
+        <p:spPr>
+          <a:xfrm>
+            <a:off x="1447800" y="3290888"/>
+            <a:ext cx="590550" cy="323850"/>
+          </a:xfrm>
+          <a:prstGeom prst="rect">
+            <a:avLst/>
+          </a:prstGeom>
+          <a:noFill/>
+        </p:spPr>
+        <p:txBody>
+          <a:bodyPr wrap="square" lIns="0" rIns="0" tIns="0" bIns="0" anchor="t">
+            <a:spAutoFit/>
+          </a:bodyPr>
+          <a:lstStyle/>
+          <a:p>
+            <a:pPr algn="ctr">
+              <a:lnSpc>
+                <a:spcPct val="100000"/>
+              </a:lnSpc>
+            </a:pPr>
+            <a:r>
+              <a:rPr sz="2250" b="1">
+                <a:solidFill>
+                  <a:srgbClr val="FFFFFF"/>
+                </a:solidFill>
+                <a:latin typeface="Pretendard"/>
+                <a:ea typeface="Pretendard"/>
+                <a:cs typeface="Pretendard"/>
+              </a:rPr>
+              <a:t>1</a:t>
+            </a:r>
+          </a:p>
+        </p:txBody>
+      </p:sp>
+      <p:sp>
+        <p:nvSpPr>
+          <p:cNvPr id="11" name="TextBox 10"/>
+          <p:cNvSpPr txBox="1"/>
+          <p:nvPr/>
+        </p:nvSpPr>
+        <p:spPr>
+          <a:xfrm>
+            <a:off x="2324100" y="3024188"/>
+            <a:ext cx="14478000" cy="400050"/>
+          </a:xfrm>
+          <a:prstGeom prst="rect">
+            <a:avLst/>
+          </a:prstGeom>
+          <a:noFill/>
+        </p:spPr>
+        <p:txBody>
+          <a:bodyPr wrap="square" lIns="0" rIns="0" tIns="0" bIns="0" anchor="t">
+            <a:spAutoFit/>
+          </a:bodyPr>
+          <a:lstStyle/>
+          <a:p>
+            <a:pPr algn="l">
+              <a:lnSpc>
+                <a:spcPct val="110000"/>
+              </a:lnSpc>
+            </a:pPr>
+            <a:r>
+              <a:rPr sz="2475" b="1">
+                <a:solidFill>
+                  <a:srgbClr val="0D2B5E"/>
+                </a:solidFill>
+                <a:latin typeface="Pretendard"/>
+                <a:ea typeface="Pretendard"/>
+                <a:cs typeface="Pretendard"/>
+              </a:rPr>
+              <a:t>--network week6_default --bootstrap-server kafka:9092</a:t>
+            </a:r>
+          </a:p>
+        </p:txBody>
+      </p:sp>
+      <p:sp>
+        <p:nvSpPr>
           <p:cNvPr id="12" name="TextBox 11"/>
           <p:cNvSpPr txBox="1"/>
           <p:nvPr/>
         </p:nvSpPr>
         <p:spPr>
           <a:xfrm>
-            <a:off x="1633538" y="4838700"/>
-            <a:ext cx="6634162" cy="453390"/>
-          </a:xfrm>
-          <a:prstGeom prst="rect">
-            <a:avLst/>
-          </a:prstGeom>
-          <a:noFill/>
-        </p:spPr>
-        <p:txBody>
-          <a:bodyPr wrap="square" lIns="0" rIns="0" tIns="0" bIns="0" anchor="ctr">
+            <a:off x="2324100" y="3481388"/>
+            <a:ext cx="14478000" cy="361950"/>
+          </a:xfrm>
+          <a:prstGeom prst="rect">
+            <a:avLst/>
+          </a:prstGeom>
+          <a:noFill/>
+        </p:spPr>
+        <p:txBody>
+          <a:bodyPr wrap="square" lIns="0" rIns="0" tIns="0" bIns="0" anchor="t">
             <a:spAutoFit/>
           </a:bodyPr>
           <a:lstStyle/>
@@ -10941,7 +11861,7 @@
               </a:lnSpc>
             </a:pPr>
             <a:r>
-              <a:rPr sz="1575" b="0">
+              <a:rPr sz="2025" b="0">
                 <a:solidFill>
                   <a:srgbClr val="3D3D3D"/>
                 </a:solidFill>
@@ -10949,320 +11869,25 @@
                 <a:ea typeface="Pretendard"/>
                 <a:cs typeface="Pretendard"/>
               </a:rPr>
-              <a:t>kafka-console-consumer.sh</a:t>
-            </a:r>
-          </a:p>
-        </p:txBody>
-      </p:sp>
-      <p:sp>
-        <p:nvSpPr>
-          <p:cNvPr id="13" name="Oval 12"/>
-          <p:cNvSpPr/>
-          <p:nvPr/>
-        </p:nvSpPr>
-        <p:spPr>
-          <a:xfrm>
-            <a:off x="1447800" y="5527358"/>
-            <a:ext cx="97155" cy="97155"/>
-          </a:xfrm>
-          <a:prstGeom prst="ellipse">
-            <a:avLst/>
-          </a:prstGeom>
-          <a:solidFill>
-            <a:srgbClr val="1E5BC6"/>
-          </a:solidFill>
-          <a:ln>
-            <a:noFill/>
-          </a:ln>
-          <a:effectLst/>
-        </p:spPr>
-        <p:txBody>
-          <a:bodyPr rtlCol="0" anchor="ctr" wrap="square"/>
-          <a:lstStyle/>
-          <a:p>
-            <a:pPr algn="ctr"/>
-          </a:p>
-        </p:txBody>
-      </p:sp>
-      <p:sp>
-        <p:nvSpPr>
-          <p:cNvPr id="14" name="TextBox 13"/>
-          <p:cNvSpPr txBox="1"/>
-          <p:nvPr/>
-        </p:nvSpPr>
-        <p:spPr>
-          <a:xfrm>
-            <a:off x="1633538" y="5349240"/>
-            <a:ext cx="6634162" cy="453390"/>
-          </a:xfrm>
-          <a:prstGeom prst="rect">
-            <a:avLst/>
-          </a:prstGeom>
-          <a:noFill/>
-        </p:spPr>
-        <p:txBody>
-          <a:bodyPr wrap="square" lIns="0" rIns="0" tIns="0" bIns="0" anchor="ctr">
-            <a:spAutoFit/>
-          </a:bodyPr>
-          <a:lstStyle/>
-          <a:p>
-            <a:pPr algn="l">
-              <a:lnSpc>
-                <a:spcPct val="120000"/>
-              </a:lnSpc>
-            </a:pPr>
-            <a:r>
-              <a:rPr sz="1575" b="0">
-                <a:solidFill>
-                  <a:srgbClr val="3D3D3D"/>
-                </a:solidFill>
-                <a:latin typeface="Pretendard"/>
-                <a:ea typeface="Pretendard"/>
-                <a:cs typeface="Pretendard"/>
-              </a:rPr>
-              <a:t>--topic orders --group order-app</a:t>
-            </a:r>
-          </a:p>
-        </p:txBody>
-      </p:sp>
-      <p:sp>
-        <p:nvSpPr>
-          <p:cNvPr id="15" name="Oval 14"/>
-          <p:cNvSpPr/>
-          <p:nvPr/>
-        </p:nvSpPr>
-        <p:spPr>
-          <a:xfrm>
-            <a:off x="1447800" y="6037898"/>
-            <a:ext cx="97155" cy="97155"/>
-          </a:xfrm>
-          <a:prstGeom prst="ellipse">
-            <a:avLst/>
-          </a:prstGeom>
-          <a:solidFill>
-            <a:srgbClr val="1E5BC6"/>
-          </a:solidFill>
-          <a:ln>
-            <a:noFill/>
-          </a:ln>
-          <a:effectLst/>
-        </p:spPr>
-        <p:txBody>
-          <a:bodyPr rtlCol="0" anchor="ctr" wrap="square"/>
-          <a:lstStyle/>
-          <a:p>
-            <a:pPr algn="ctr"/>
-          </a:p>
-        </p:txBody>
-      </p:sp>
-      <p:sp>
-        <p:nvSpPr>
-          <p:cNvPr id="16" name="TextBox 15"/>
-          <p:cNvSpPr txBox="1"/>
-          <p:nvPr/>
-        </p:nvSpPr>
-        <p:spPr>
-          <a:xfrm>
-            <a:off x="1633538" y="5859780"/>
-            <a:ext cx="6634162" cy="453390"/>
-          </a:xfrm>
-          <a:prstGeom prst="rect">
-            <a:avLst/>
-          </a:prstGeom>
-          <a:noFill/>
-        </p:spPr>
-        <p:txBody>
-          <a:bodyPr wrap="square" lIns="0" rIns="0" tIns="0" bIns="0" anchor="ctr">
-            <a:spAutoFit/>
-          </a:bodyPr>
-          <a:lstStyle/>
-          <a:p>
-            <a:pPr algn="l">
-              <a:lnSpc>
-                <a:spcPct val="120000"/>
-              </a:lnSpc>
-            </a:pPr>
-            <a:r>
-              <a:rPr sz="1575" b="0">
-                <a:solidFill>
-                  <a:srgbClr val="3D3D3D"/>
-                </a:solidFill>
-                <a:latin typeface="Pretendard"/>
-                <a:ea typeface="Pretendard"/>
-                <a:cs typeface="Pretendard"/>
-              </a:rPr>
-              <a:t>--property print.key=true</a:t>
-            </a:r>
-          </a:p>
-        </p:txBody>
-      </p:sp>
-      <p:sp>
-        <p:nvSpPr>
-          <p:cNvPr id="17" name="Oval 16"/>
-          <p:cNvSpPr/>
-          <p:nvPr/>
-        </p:nvSpPr>
-        <p:spPr>
-          <a:xfrm>
-            <a:off x="1447800" y="6548438"/>
-            <a:ext cx="97155" cy="97155"/>
-          </a:xfrm>
-          <a:prstGeom prst="ellipse">
-            <a:avLst/>
-          </a:prstGeom>
-          <a:solidFill>
-            <a:srgbClr val="1E5BC6"/>
-          </a:solidFill>
-          <a:ln>
-            <a:noFill/>
-          </a:ln>
-          <a:effectLst/>
-        </p:spPr>
-        <p:txBody>
-          <a:bodyPr rtlCol="0" anchor="ctr" wrap="square"/>
-          <a:lstStyle/>
-          <a:p>
-            <a:pPr algn="ctr"/>
-          </a:p>
-        </p:txBody>
-      </p:sp>
-      <p:sp>
-        <p:nvSpPr>
-          <p:cNvPr id="18" name="TextBox 17"/>
-          <p:cNvSpPr txBox="1"/>
-          <p:nvPr/>
-        </p:nvSpPr>
-        <p:spPr>
-          <a:xfrm>
-            <a:off x="1633538" y="6370320"/>
-            <a:ext cx="6634162" cy="453390"/>
-          </a:xfrm>
-          <a:prstGeom prst="rect">
-            <a:avLst/>
-          </a:prstGeom>
-          <a:noFill/>
-        </p:spPr>
-        <p:txBody>
-          <a:bodyPr wrap="square" lIns="0" rIns="0" tIns="0" bIns="0" anchor="ctr">
-            <a:spAutoFit/>
-          </a:bodyPr>
-          <a:lstStyle/>
-          <a:p>
-            <a:pPr algn="l">
-              <a:lnSpc>
-                <a:spcPct val="120000"/>
-              </a:lnSpc>
-            </a:pPr>
-            <a:r>
-              <a:rPr sz="1575" b="0">
-                <a:solidFill>
-                  <a:srgbClr val="3D3D3D"/>
-                </a:solidFill>
-                <a:latin typeface="Pretendard"/>
-                <a:ea typeface="Pretendard"/>
-                <a:cs typeface="Pretendard"/>
-              </a:rPr>
-              <a:t>--property print.partition=true</a:t>
-            </a:r>
-          </a:p>
-        </p:txBody>
-      </p:sp>
-      <p:sp>
-        <p:nvSpPr>
-          <p:cNvPr id="19" name="TextBox 18"/>
-          <p:cNvSpPr txBox="1"/>
-          <p:nvPr/>
-        </p:nvSpPr>
-        <p:spPr>
-          <a:xfrm>
-            <a:off x="9772650" y="2857500"/>
-            <a:ext cx="7372350" cy="533400"/>
-          </a:xfrm>
-          <a:prstGeom prst="rect">
-            <a:avLst/>
-          </a:prstGeom>
-          <a:noFill/>
-        </p:spPr>
-        <p:txBody>
-          <a:bodyPr wrap="square" lIns="0" rIns="0" tIns="0" bIns="0" anchor="t">
-            <a:spAutoFit/>
-          </a:bodyPr>
-          <a:lstStyle/>
-          <a:p>
-            <a:pPr algn="l">
-              <a:lnSpc>
-                <a:spcPct val="110000"/>
-              </a:lnSpc>
-            </a:pPr>
-            <a:r>
-              <a:rPr sz="3150" b="1">
-                <a:solidFill>
-                  <a:srgbClr val="0D2B5E"/>
-                </a:solidFill>
-                <a:latin typeface="Pretendard"/>
-                <a:ea typeface="Pretendard"/>
-                <a:cs typeface="Pretendard"/>
-              </a:rPr>
-              <a:t>터미널 2 — Producer</a:t>
-            </a:r>
-          </a:p>
-        </p:txBody>
-      </p:sp>
-      <p:sp>
-        <p:nvSpPr>
-          <p:cNvPr id="20" name="TextBox 19"/>
-          <p:cNvSpPr txBox="1"/>
-          <p:nvPr/>
-        </p:nvSpPr>
-        <p:spPr>
-          <a:xfrm>
-            <a:off x="9772650" y="3467100"/>
-            <a:ext cx="7372350" cy="876300"/>
-          </a:xfrm>
-          <a:prstGeom prst="rect">
-            <a:avLst/>
-          </a:prstGeom>
-          <a:noFill/>
-        </p:spPr>
-        <p:txBody>
-          <a:bodyPr wrap="square" lIns="0" rIns="0" tIns="0" bIns="0" anchor="t">
-            <a:spAutoFit/>
-          </a:bodyPr>
-          <a:lstStyle/>
-          <a:p>
-            <a:pPr algn="l">
-              <a:lnSpc>
-                <a:spcPct val="146000"/>
-              </a:lnSpc>
-            </a:pPr>
-            <a:r>
-              <a:rPr sz="2250" b="0">
-                <a:solidFill>
-                  <a:srgbClr val="3D3D3D"/>
-                </a:solidFill>
-                <a:latin typeface="Pretendard"/>
-                <a:ea typeface="Pretendard"/>
-                <a:cs typeface="Pretendard"/>
-              </a:rPr>
-              <a:t>key:value 형식 · user1:주문A 처럼 입력</a:t>
-            </a:r>
-          </a:p>
-        </p:txBody>
-      </p:sp>
-      <p:sp>
-        <p:nvSpPr>
-          <p:cNvPr id="21" name="Rounded Rectangle 20"/>
-          <p:cNvSpPr/>
-          <p:nvPr/>
-        </p:nvSpPr>
-        <p:spPr>
-          <a:xfrm>
-            <a:off x="9772650" y="4610100"/>
-            <a:ext cx="7372350" cy="2857500"/>
+              <a:t>docker run 으로 다른 컨테이너에서 — 첫 접속은 된다</a:t>
+            </a:r>
+          </a:p>
+        </p:txBody>
+      </p:sp>
+      <p:sp>
+        <p:nvSpPr>
+          <p:cNvPr id="13" name="Rounded Rectangle 12"/>
+          <p:cNvSpPr/>
+          <p:nvPr/>
+        </p:nvSpPr>
+        <p:spPr>
+          <a:xfrm>
+            <a:off x="1143000" y="4105275"/>
+            <a:ext cx="16002000" cy="1000125"/>
           </a:xfrm>
           <a:prstGeom prst="roundRect">
             <a:avLst>
-              <a:gd name="adj" fmla="val 1666"/>
+              <a:gd name="adj" fmla="val 4761"/>
             </a:avLst>
           </a:prstGeom>
           <a:solidFill>
@@ -11285,20 +11910,20 @@
       </p:sp>
       <p:sp>
         <p:nvSpPr>
-          <p:cNvPr id="22" name="Oval 21"/>
-          <p:cNvSpPr/>
-          <p:nvPr/>
-        </p:nvSpPr>
-        <p:spPr>
-          <a:xfrm>
-            <a:off x="10077450" y="5016817"/>
-            <a:ext cx="97155" cy="97155"/>
+          <p:cNvPr id="14" name="Oval 13"/>
+          <p:cNvSpPr/>
+          <p:nvPr/>
+        </p:nvSpPr>
+        <p:spPr>
+          <a:xfrm>
+            <a:off x="1447800" y="4310062"/>
+            <a:ext cx="590550" cy="590550"/>
           </a:xfrm>
           <a:prstGeom prst="ellipse">
             <a:avLst/>
           </a:prstGeom>
           <a:solidFill>
-            <a:srgbClr val="1E5BC6"/>
+            <a:srgbClr val="0D2B5E"/>
           </a:solidFill>
           <a:ln>
             <a:noFill/>
@@ -11315,33 +11940,115 @@
       </p:sp>
       <p:sp>
         <p:nvSpPr>
-          <p:cNvPr id="23" name="TextBox 22"/>
-          <p:cNvSpPr txBox="1"/>
-          <p:nvPr/>
-        </p:nvSpPr>
-        <p:spPr>
-          <a:xfrm>
-            <a:off x="10263188" y="4838700"/>
-            <a:ext cx="6634162" cy="453390"/>
-          </a:xfrm>
-          <a:prstGeom prst="rect">
-            <a:avLst/>
-          </a:prstGeom>
-          <a:noFill/>
-        </p:spPr>
-        <p:txBody>
-          <a:bodyPr wrap="square" lIns="0" rIns="0" tIns="0" bIns="0" anchor="ctr">
+          <p:cNvPr id="15" name="TextBox 14"/>
+          <p:cNvSpPr txBox="1"/>
+          <p:nvPr/>
+        </p:nvSpPr>
+        <p:spPr>
+          <a:xfrm>
+            <a:off x="1447800" y="4462462"/>
+            <a:ext cx="590550" cy="323850"/>
+          </a:xfrm>
+          <a:prstGeom prst="rect">
+            <a:avLst/>
+          </a:prstGeom>
+          <a:noFill/>
+        </p:spPr>
+        <p:txBody>
+          <a:bodyPr wrap="square" lIns="0" rIns="0" tIns="0" bIns="0" anchor="t">
+            <a:spAutoFit/>
+          </a:bodyPr>
+          <a:lstStyle/>
+          <a:p>
+            <a:pPr algn="ctr">
+              <a:lnSpc>
+                <a:spcPct val="100000"/>
+              </a:lnSpc>
+            </a:pPr>
+            <a:r>
+              <a:rPr sz="2250" b="1">
+                <a:solidFill>
+                  <a:srgbClr val="FFFFFF"/>
+                </a:solidFill>
+                <a:latin typeface="Pretendard"/>
+                <a:ea typeface="Pretendard"/>
+                <a:cs typeface="Pretendard"/>
+              </a:rPr>
+              <a:t>2</a:t>
+            </a:r>
+          </a:p>
+        </p:txBody>
+      </p:sp>
+      <p:sp>
+        <p:nvSpPr>
+          <p:cNvPr id="16" name="TextBox 15"/>
+          <p:cNvSpPr txBox="1"/>
+          <p:nvPr/>
+        </p:nvSpPr>
+        <p:spPr>
+          <a:xfrm>
+            <a:off x="2324100" y="4195762"/>
+            <a:ext cx="14478000" cy="400050"/>
+          </a:xfrm>
+          <a:prstGeom prst="rect">
+            <a:avLst/>
+          </a:prstGeom>
+          <a:noFill/>
+        </p:spPr>
+        <p:txBody>
+          <a:bodyPr wrap="square" lIns="0" rIns="0" tIns="0" bIns="0" anchor="t">
             <a:spAutoFit/>
           </a:bodyPr>
           <a:lstStyle/>
           <a:p>
             <a:pPr algn="l">
               <a:lnSpc>
+                <a:spcPct val="110000"/>
+              </a:lnSpc>
+            </a:pPr>
+            <a:r>
+              <a:rPr sz="2475" b="1">
+                <a:solidFill>
+                  <a:srgbClr val="0D2B5E"/>
+                </a:solidFill>
+                <a:latin typeface="Pretendard"/>
+                <a:ea typeface="Pretendard"/>
+                <a:cs typeface="Pretendard"/>
+              </a:rPr>
+              <a:t>브로커의 안내 — 「다시 붙을 주소는 localhost:9092」</a:t>
+            </a:r>
+          </a:p>
+        </p:txBody>
+      </p:sp>
+      <p:sp>
+        <p:nvSpPr>
+          <p:cNvPr id="17" name="TextBox 16"/>
+          <p:cNvSpPr txBox="1"/>
+          <p:nvPr/>
+        </p:nvSpPr>
+        <p:spPr>
+          <a:xfrm>
+            <a:off x="2324100" y="4652962"/>
+            <a:ext cx="14478000" cy="361950"/>
+          </a:xfrm>
+          <a:prstGeom prst="rect">
+            <a:avLst/>
+          </a:prstGeom>
+          <a:noFill/>
+        </p:spPr>
+        <p:txBody>
+          <a:bodyPr wrap="square" lIns="0" rIns="0" tIns="0" bIns="0" anchor="t">
+            <a:spAutoFit/>
+          </a:bodyPr>
+          <a:lstStyle/>
+          <a:p>
+            <a:pPr algn="l">
+              <a:lnSpc>
                 <a:spcPct val="120000"/>
               </a:lnSpc>
             </a:pPr>
             <a:r>
-              <a:rPr sz="1575" b="0">
+              <a:rPr sz="2025" b="0">
                 <a:solidFill>
                   <a:srgbClr val="3D3D3D"/>
                 </a:solidFill>
@@ -11349,27 +12056,61 @@
                 <a:ea typeface="Pretendard"/>
                 <a:cs typeface="Pretendard"/>
               </a:rPr>
-              <a:t>kafka-console-producer.sh</a:t>
-            </a:r>
-          </a:p>
-        </p:txBody>
-      </p:sp>
-      <p:sp>
-        <p:nvSpPr>
-          <p:cNvPr id="24" name="Oval 23"/>
-          <p:cNvSpPr/>
-          <p:nvPr/>
-        </p:nvSpPr>
-        <p:spPr>
-          <a:xfrm>
-            <a:off x="10077450" y="5527358"/>
-            <a:ext cx="97155" cy="97155"/>
+              <a:t>이 컨테이너 안의 localhost 에는 브로커가 없다</a:t>
+            </a:r>
+          </a:p>
+        </p:txBody>
+      </p:sp>
+      <p:sp>
+        <p:nvSpPr>
+          <p:cNvPr id="18" name="Rounded Rectangle 17"/>
+          <p:cNvSpPr/>
+          <p:nvPr/>
+        </p:nvSpPr>
+        <p:spPr>
+          <a:xfrm>
+            <a:off x="1143000" y="5276850"/>
+            <a:ext cx="16002000" cy="1000125"/>
+          </a:xfrm>
+          <a:prstGeom prst="roundRect">
+            <a:avLst>
+              <a:gd name="adj" fmla="val 4761"/>
+            </a:avLst>
+          </a:prstGeom>
+          <a:solidFill>
+            <a:srgbClr val="FAFBFD"/>
+          </a:solidFill>
+          <a:ln w="9525">
+            <a:solidFill>
+              <a:srgbClr val="DCE1E8"/>
+            </a:solidFill>
+          </a:ln>
+          <a:effectLst/>
+        </p:spPr>
+        <p:txBody>
+          <a:bodyPr rtlCol="0" anchor="ctr" wrap="square"/>
+          <a:lstStyle/>
+          <a:p>
+            <a:pPr algn="ctr"/>
+          </a:p>
+        </p:txBody>
+      </p:sp>
+      <p:sp>
+        <p:nvSpPr>
+          <p:cNvPr id="19" name="Oval 18"/>
+          <p:cNvSpPr/>
+          <p:nvPr/>
+        </p:nvSpPr>
+        <p:spPr>
+          <a:xfrm>
+            <a:off x="1447800" y="5481638"/>
+            <a:ext cx="590550" cy="590550"/>
           </a:xfrm>
           <a:prstGeom prst="ellipse">
             <a:avLst/>
           </a:prstGeom>
           <a:solidFill>
-            <a:srgbClr val="1E5BC6"/>
+            <a:srgbClr val="0D2B5E"/>
           </a:solidFill>
           <a:ln>
             <a:noFill/>
@@ -11386,33 +12127,115 @@
       </p:sp>
       <p:sp>
         <p:nvSpPr>
-          <p:cNvPr id="25" name="TextBox 24"/>
-          <p:cNvSpPr txBox="1"/>
-          <p:nvPr/>
-        </p:nvSpPr>
-        <p:spPr>
-          <a:xfrm>
-            <a:off x="10263188" y="5349240"/>
-            <a:ext cx="6634162" cy="453390"/>
-          </a:xfrm>
-          <a:prstGeom prst="rect">
-            <a:avLst/>
-          </a:prstGeom>
-          <a:noFill/>
-        </p:spPr>
-        <p:txBody>
-          <a:bodyPr wrap="square" lIns="0" rIns="0" tIns="0" bIns="0" anchor="ctr">
+          <p:cNvPr id="20" name="TextBox 19"/>
+          <p:cNvSpPr txBox="1"/>
+          <p:nvPr/>
+        </p:nvSpPr>
+        <p:spPr>
+          <a:xfrm>
+            <a:off x="1447800" y="5634038"/>
+            <a:ext cx="590550" cy="323850"/>
+          </a:xfrm>
+          <a:prstGeom prst="rect">
+            <a:avLst/>
+          </a:prstGeom>
+          <a:noFill/>
+        </p:spPr>
+        <p:txBody>
+          <a:bodyPr wrap="square" lIns="0" rIns="0" tIns="0" bIns="0" anchor="t">
+            <a:spAutoFit/>
+          </a:bodyPr>
+          <a:lstStyle/>
+          <a:p>
+            <a:pPr algn="ctr">
+              <a:lnSpc>
+                <a:spcPct val="100000"/>
+              </a:lnSpc>
+            </a:pPr>
+            <a:r>
+              <a:rPr sz="2250" b="1">
+                <a:solidFill>
+                  <a:srgbClr val="FFFFFF"/>
+                </a:solidFill>
+                <a:latin typeface="Pretendard"/>
+                <a:ea typeface="Pretendard"/>
+                <a:cs typeface="Pretendard"/>
+              </a:rPr>
+              <a:t>3</a:t>
+            </a:r>
+          </a:p>
+        </p:txBody>
+      </p:sp>
+      <p:sp>
+        <p:nvSpPr>
+          <p:cNvPr id="21" name="TextBox 20"/>
+          <p:cNvSpPr txBox="1"/>
+          <p:nvPr/>
+        </p:nvSpPr>
+        <p:spPr>
+          <a:xfrm>
+            <a:off x="2324100" y="5367338"/>
+            <a:ext cx="14478000" cy="400050"/>
+          </a:xfrm>
+          <a:prstGeom prst="rect">
+            <a:avLst/>
+          </a:prstGeom>
+          <a:noFill/>
+        </p:spPr>
+        <p:txBody>
+          <a:bodyPr wrap="square" lIns="0" rIns="0" tIns="0" bIns="0" anchor="t">
             <a:spAutoFit/>
           </a:bodyPr>
           <a:lstStyle/>
           <a:p>
             <a:pPr algn="l">
               <a:lnSpc>
+                <a:spcPct val="110000"/>
+              </a:lnSpc>
+            </a:pPr>
+            <a:r>
+              <a:rPr sz="2475" b="1">
+                <a:solidFill>
+                  <a:srgbClr val="0D2B5E"/>
+                </a:solidFill>
+                <a:latin typeface="Pretendard"/>
+                <a:ea typeface="Pretendard"/>
+                <a:cs typeface="Pretendard"/>
+              </a:rPr>
+              <a:t>Connection to node 1 … could not be established</a:t>
+            </a:r>
+          </a:p>
+        </p:txBody>
+      </p:sp>
+      <p:sp>
+        <p:nvSpPr>
+          <p:cNvPr id="22" name="TextBox 21"/>
+          <p:cNvSpPr txBox="1"/>
+          <p:nvPr/>
+        </p:nvSpPr>
+        <p:spPr>
+          <a:xfrm>
+            <a:off x="2324100" y="5824538"/>
+            <a:ext cx="14478000" cy="361950"/>
+          </a:xfrm>
+          <a:prstGeom prst="rect">
+            <a:avLst/>
+          </a:prstGeom>
+          <a:noFill/>
+        </p:spPr>
+        <p:txBody>
+          <a:bodyPr wrap="square" lIns="0" rIns="0" tIns="0" bIns="0" anchor="t">
+            <a:spAutoFit/>
+          </a:bodyPr>
+          <a:lstStyle/>
+          <a:p>
+            <a:pPr algn="l">
+              <a:lnSpc>
                 <a:spcPct val="120000"/>
               </a:lnSpc>
             </a:pPr>
             <a:r>
-              <a:rPr sz="1575" b="0">
+              <a:rPr sz="2025" b="0">
                 <a:solidFill>
                   <a:srgbClr val="3D3D3D"/>
                 </a:solidFill>
@@ -11420,27 +12243,61 @@
                 <a:ea typeface="Pretendard"/>
                 <a:cs typeface="Pretendard"/>
               </a:rPr>
-              <a:t>--topic orders</a:t>
-            </a:r>
-          </a:p>
-        </p:txBody>
-      </p:sp>
-      <p:sp>
-        <p:nvSpPr>
-          <p:cNvPr id="26" name="Oval 25"/>
-          <p:cNvSpPr/>
-          <p:nvPr/>
-        </p:nvSpPr>
-        <p:spPr>
-          <a:xfrm>
-            <a:off x="10077450" y="6037898"/>
-            <a:ext cx="97155" cy="97155"/>
+              <a:t>(localhost/127.0.0.1:9092) — WARN 이 계속 찍힌다</a:t>
+            </a:r>
+          </a:p>
+        </p:txBody>
+      </p:sp>
+      <p:sp>
+        <p:nvSpPr>
+          <p:cNvPr id="23" name="Rounded Rectangle 22"/>
+          <p:cNvSpPr/>
+          <p:nvPr/>
+        </p:nvSpPr>
+        <p:spPr>
+          <a:xfrm>
+            <a:off x="1143000" y="6448425"/>
+            <a:ext cx="16002000" cy="1000125"/>
+          </a:xfrm>
+          <a:prstGeom prst="roundRect">
+            <a:avLst>
+              <a:gd name="adj" fmla="val 4761"/>
+            </a:avLst>
+          </a:prstGeom>
+          <a:solidFill>
+            <a:srgbClr val="FAFBFD"/>
+          </a:solidFill>
+          <a:ln w="9525">
+            <a:solidFill>
+              <a:srgbClr val="DCE1E8"/>
+            </a:solidFill>
+          </a:ln>
+          <a:effectLst/>
+        </p:spPr>
+        <p:txBody>
+          <a:bodyPr rtlCol="0" anchor="ctr" wrap="square"/>
+          <a:lstStyle/>
+          <a:p>
+            <a:pPr algn="ctr"/>
+          </a:p>
+        </p:txBody>
+      </p:sp>
+      <p:sp>
+        <p:nvSpPr>
+          <p:cNvPr id="24" name="Oval 23"/>
+          <p:cNvSpPr/>
+          <p:nvPr/>
+        </p:nvSpPr>
+        <p:spPr>
+          <a:xfrm>
+            <a:off x="1447800" y="6653212"/>
+            <a:ext cx="590550" cy="590550"/>
           </a:xfrm>
           <a:prstGeom prst="ellipse">
             <a:avLst/>
           </a:prstGeom>
           <a:solidFill>
-            <a:srgbClr val="1E5BC6"/>
+            <a:srgbClr val="0D2B5E"/>
           </a:solidFill>
           <a:ln>
             <a:noFill/>
@@ -11457,22 +12314,104 @@
       </p:sp>
       <p:sp>
         <p:nvSpPr>
+          <p:cNvPr id="25" name="TextBox 24"/>
+          <p:cNvSpPr txBox="1"/>
+          <p:nvPr/>
+        </p:nvSpPr>
+        <p:spPr>
+          <a:xfrm>
+            <a:off x="1447800" y="6805612"/>
+            <a:ext cx="590550" cy="323850"/>
+          </a:xfrm>
+          <a:prstGeom prst="rect">
+            <a:avLst/>
+          </a:prstGeom>
+          <a:noFill/>
+        </p:spPr>
+        <p:txBody>
+          <a:bodyPr wrap="square" lIns="0" rIns="0" tIns="0" bIns="0" anchor="t">
+            <a:spAutoFit/>
+          </a:bodyPr>
+          <a:lstStyle/>
+          <a:p>
+            <a:pPr algn="ctr">
+              <a:lnSpc>
+                <a:spcPct val="100000"/>
+              </a:lnSpc>
+            </a:pPr>
+            <a:r>
+              <a:rPr sz="2250" b="1">
+                <a:solidFill>
+                  <a:srgbClr val="FFFFFF"/>
+                </a:solidFill>
+                <a:latin typeface="Pretendard"/>
+                <a:ea typeface="Pretendard"/>
+                <a:cs typeface="Pretendard"/>
+              </a:rPr>
+              <a:t>4</a:t>
+            </a:r>
+          </a:p>
+        </p:txBody>
+      </p:sp>
+      <p:sp>
+        <p:nvSpPr>
+          <p:cNvPr id="26" name="TextBox 25"/>
+          <p:cNvSpPr txBox="1"/>
+          <p:nvPr/>
+        </p:nvSpPr>
+        <p:spPr>
+          <a:xfrm>
+            <a:off x="2324100" y="6538912"/>
+            <a:ext cx="14478000" cy="400050"/>
+          </a:xfrm>
+          <a:prstGeom prst="rect">
+            <a:avLst/>
+          </a:prstGeom>
+          <a:noFill/>
+        </p:spPr>
+        <p:txBody>
+          <a:bodyPr wrap="square" lIns="0" rIns="0" tIns="0" bIns="0" anchor="t">
+            <a:spAutoFit/>
+          </a:bodyPr>
+          <a:lstStyle/>
+          <a:p>
+            <a:pPr algn="l">
+              <a:lnSpc>
+                <a:spcPct val="110000"/>
+              </a:lnSpc>
+            </a:pPr>
+            <a:r>
+              <a:rPr sz="2475" b="1">
+                <a:solidFill>
+                  <a:srgbClr val="0D2B5E"/>
+                </a:solidFill>
+                <a:latin typeface="Pretendard"/>
+                <a:ea typeface="Pretendard"/>
+                <a:cs typeface="Pretendard"/>
+              </a:rPr>
+              <a:t>Ctrl+C 로 멈춘다</a:t>
+            </a:r>
+          </a:p>
+        </p:txBody>
+      </p:sp>
+      <p:sp>
+        <p:nvSpPr>
           <p:cNvPr id="27" name="TextBox 26"/>
           <p:cNvSpPr txBox="1"/>
           <p:nvPr/>
         </p:nvSpPr>
         <p:spPr>
           <a:xfrm>
-            <a:off x="10263188" y="5859780"/>
-            <a:ext cx="6634162" cy="453390"/>
-          </a:xfrm>
-          <a:prstGeom prst="rect">
-            <a:avLst/>
-          </a:prstGeom>
-          <a:noFill/>
-        </p:spPr>
-        <p:txBody>
-          <a:bodyPr wrap="square" lIns="0" rIns="0" tIns="0" bIns="0" anchor="ctr">
+            <a:off x="2324100" y="6996112"/>
+            <a:ext cx="14478000" cy="361950"/>
+          </a:xfrm>
+          <a:prstGeom prst="rect">
+            <a:avLst/>
+          </a:prstGeom>
+          <a:noFill/>
+        </p:spPr>
+        <p:txBody>
+          <a:bodyPr wrap="square" lIns="0" rIns="0" tIns="0" bIns="0" anchor="t">
             <a:spAutoFit/>
           </a:bodyPr>
           <a:lstStyle/>
@@ -11483,7 +12422,7 @@
               </a:lnSpc>
             </a:pPr>
             <a:r>
-              <a:rPr sz="1575" b="0">
+              <a:rPr sz="2025" b="0">
                 <a:solidFill>
                   <a:srgbClr val="3D3D3D"/>
                 </a:solidFill>
@@ -11491,27 +12430,27 @@
                 <a:ea typeface="Pretendard"/>
                 <a:cs typeface="Pretendard"/>
               </a:rPr>
-              <a:t>--property parse.key=true</a:t>
-            </a:r>
-          </a:p>
-        </p:txBody>
-      </p:sp>
-      <p:sp>
-        <p:nvSpPr>
-          <p:cNvPr id="28" name="Oval 27"/>
-          <p:cNvSpPr/>
-          <p:nvPr/>
-        </p:nvSpPr>
-        <p:spPr>
-          <a:xfrm>
-            <a:off x="10077450" y="6548438"/>
-            <a:ext cx="97155" cy="97155"/>
-          </a:xfrm>
-          <a:prstGeom prst="ellipse">
-            <a:avLst/>
-          </a:prstGeom>
-          <a:solidFill>
-            <a:srgbClr val="1E5BC6"/>
+              <a:t>「첫 통화는 되는데 실제 업무 통화가 안 되는」 상태 — 실측</a:t>
+            </a:r>
+          </a:p>
+        </p:txBody>
+      </p:sp>
+      <p:sp>
+        <p:nvSpPr>
+          <p:cNvPr id="28" name="Rectangle 27"/>
+          <p:cNvSpPr/>
+          <p:nvPr/>
+        </p:nvSpPr>
+        <p:spPr>
+          <a:xfrm>
+            <a:off x="1143000" y="7581900"/>
+            <a:ext cx="38100" cy="323850"/>
+          </a:xfrm>
+          <a:prstGeom prst="rect">
+            <a:avLst/>
+          </a:prstGeom>
+          <a:solidFill>
+            <a:srgbClr val="BFD3F5"/>
           </a:solidFill>
           <a:ln>
             <a:noFill/>
@@ -11534,55 +12473,55 @@
         </p:nvSpPr>
         <p:spPr>
           <a:xfrm>
-            <a:off x="10263188" y="6370320"/>
-            <a:ext cx="6634162" cy="453390"/>
-          </a:xfrm>
-          <a:prstGeom prst="rect">
-            <a:avLst/>
-          </a:prstGeom>
-          <a:noFill/>
-        </p:spPr>
-        <p:txBody>
-          <a:bodyPr wrap="square" lIns="0" rIns="0" tIns="0" bIns="0" anchor="ctr">
+            <a:off x="1314450" y="7581900"/>
+            <a:ext cx="15830550" cy="342900"/>
+          </a:xfrm>
+          <a:prstGeom prst="rect">
+            <a:avLst/>
+          </a:prstGeom>
+          <a:noFill/>
+        </p:spPr>
+        <p:txBody>
+          <a:bodyPr wrap="square" lIns="0" rIns="0" tIns="0" bIns="0" anchor="t">
             <a:spAutoFit/>
           </a:bodyPr>
           <a:lstStyle/>
           <a:p>
             <a:pPr algn="l">
               <a:lnSpc>
-                <a:spcPct val="120000"/>
-              </a:lnSpc>
-            </a:pPr>
-            <a:r>
-              <a:rPr sz="1575" b="0">
-                <a:solidFill>
-                  <a:srgbClr val="3D3D3D"/>
-                </a:solidFill>
-                <a:latin typeface="Pretendard"/>
-                <a:ea typeface="Pretendard"/>
-                <a:cs typeface="Pretendard"/>
-              </a:rPr>
-              <a:t>--property key.separator=:</a:t>
-            </a:r>
-          </a:p>
-        </p:txBody>
-      </p:sp>
-      <p:sp>
-        <p:nvSpPr>
-          <p:cNvPr id="30" name="Oval 29"/>
-          <p:cNvSpPr/>
-          <p:nvPr/>
-        </p:nvSpPr>
-        <p:spPr>
-          <a:xfrm>
-            <a:off x="8686800" y="3771900"/>
-            <a:ext cx="914400" cy="914400"/>
-          </a:xfrm>
-          <a:prstGeom prst="ellipse">
-            <a:avLst/>
-          </a:prstGeom>
-          <a:solidFill>
-            <a:srgbClr val="0D2B5E"/>
+                <a:spcPct val="100000"/>
+              </a:lnSpc>
+            </a:pPr>
+            <a:r>
+              <a:rPr sz="1725" b="1">
+                <a:solidFill>
+                  <a:srgbClr val="7D7D7D"/>
+                </a:solidFill>
+                <a:latin typeface="Pretendard"/>
+                <a:ea typeface="Pretendard"/>
+                <a:cs typeface="Pretendard"/>
+              </a:rPr>
+              <a:t>컨테이너끼리는 kafka:29092 — 6-4 의 Connect 가 그렇게 붙는다</a:t>
+            </a:r>
+          </a:p>
+        </p:txBody>
+      </p:sp>
+      <p:sp>
+        <p:nvSpPr>
+          <p:cNvPr id="30" name="Rectangle 29"/>
+          <p:cNvSpPr/>
+          <p:nvPr/>
+        </p:nvSpPr>
+        <p:spPr>
+          <a:xfrm>
+            <a:off x="1143000" y="8058150"/>
+            <a:ext cx="16002000" cy="9525"/>
+          </a:xfrm>
+          <a:prstGeom prst="rect">
+            <a:avLst/>
+          </a:prstGeom>
+          <a:solidFill>
+            <a:srgbClr val="DCE1E8"/>
           </a:solidFill>
           <a:ln>
             <a:noFill/>
@@ -11605,77 +12544,6 @@
         </p:nvSpPr>
         <p:spPr>
           <a:xfrm>
-            <a:off x="8686800" y="4057650"/>
-            <a:ext cx="914400" cy="381000"/>
-          </a:xfrm>
-          <a:prstGeom prst="rect">
-            <a:avLst/>
-          </a:prstGeom>
-          <a:noFill/>
-        </p:spPr>
-        <p:txBody>
-          <a:bodyPr wrap="square" lIns="0" rIns="0" tIns="0" bIns="0" anchor="t">
-            <a:spAutoFit/>
-          </a:bodyPr>
-          <a:lstStyle/>
-          <a:p>
-            <a:pPr algn="ctr">
-              <a:lnSpc>
-                <a:spcPct val="100000"/>
-              </a:lnSpc>
-            </a:pPr>
-            <a:r>
-              <a:rPr sz="2250" b="1">
-                <a:solidFill>
-                  <a:srgbClr val="FFFFFF"/>
-                </a:solidFill>
-                <a:latin typeface="Pretendard"/>
-                <a:ea typeface="Pretendard"/>
-                <a:cs typeface="Pretendard"/>
-              </a:rPr>
-              <a:t>VS</a:t>
-            </a:r>
-          </a:p>
-        </p:txBody>
-      </p:sp>
-      <p:sp>
-        <p:nvSpPr>
-          <p:cNvPr id="32" name="Rectangle 31"/>
-          <p:cNvSpPr/>
-          <p:nvPr/>
-        </p:nvSpPr>
-        <p:spPr>
-          <a:xfrm>
-            <a:off x="1143000" y="8058150"/>
-            <a:ext cx="16002000" cy="9525"/>
-          </a:xfrm>
-          <a:prstGeom prst="rect">
-            <a:avLst/>
-          </a:prstGeom>
-          <a:solidFill>
-            <a:srgbClr val="DCE1E8"/>
-          </a:solidFill>
-          <a:ln>
-            <a:noFill/>
-          </a:ln>
-          <a:effectLst/>
-        </p:spPr>
-        <p:txBody>
-          <a:bodyPr rtlCol="0" anchor="ctr" wrap="square"/>
-          <a:lstStyle/>
-          <a:p>
-            <a:pPr algn="ctr"/>
-          </a:p>
-        </p:txBody>
-      </p:sp>
-      <p:sp>
-        <p:nvSpPr>
-          <p:cNvPr id="33" name="TextBox 32"/>
-          <p:cNvSpPr txBox="1"/>
-          <p:nvPr/>
-        </p:nvSpPr>
-        <p:spPr>
-          <a:xfrm>
             <a:off x="1143000" y="8248650"/>
             <a:ext cx="13335000" cy="323850"/>
           </a:xfrm>
@@ -11711,7 +12579,7 @@
       </p:sp>
       <p:sp>
         <p:nvSpPr>
-          <p:cNvPr id="34" name="TextBox 33"/>
+          <p:cNvPr id="32" name="TextBox 31"/>
           <p:cNvSpPr txBox="1"/>
           <p:nvPr/>
         </p:nvSpPr>
@@ -11770,7 +12638,7 @@
       <p:grpSpPr/>
       <p:sp>
         <p:nvSpPr>
-          <p:cNvPr id="2" name="Oval 1"/>
+          <p:cNvPr id="2" name="deckgen:decor"/>
           <p:cNvSpPr/>
           <p:nvPr/>
         </p:nvSpPr>
@@ -11800,7 +12668,7 @@
       </p:sp>
       <p:sp>
         <p:nvSpPr>
-          <p:cNvPr id="3" name="Oval 2"/>
+          <p:cNvPr id="3" name="deckgen:decor"/>
           <p:cNvSpPr/>
           <p:nvPr/>
         </p:nvSpPr>
@@ -11830,7 +12698,7 @@
       </p:sp>
       <p:sp>
         <p:nvSpPr>
-          <p:cNvPr id="4" name="Oval 3"/>
+          <p:cNvPr id="4" name="deckgen:decor"/>
           <p:cNvSpPr/>
           <p:nvPr/>
         </p:nvSpPr>
@@ -11894,7 +12762,7 @@
                 <a:ea typeface="Pretendard"/>
                 <a:cs typeface="Pretendard"/>
               </a:rPr>
-              <a:t>5단계 — 일부러 끄기</a:t>
+              <a:t>4단계</a:t>
             </a:r>
           </a:p>
         </p:txBody>
@@ -11935,7 +12803,7 @@
                 <a:ea typeface="Pretendard"/>
                 <a:cs typeface="Pretendard"/>
               </a:rPr>
-              <a:t>LAG 을 읽고, 컨슈머를 꺼서 쌓이게 한다</a:t>
+              <a:t>메시지를 보내고 파티션 분배를 본다 — 같은 키는 같은 파티션</a:t>
             </a:r>
           </a:p>
         </p:txBody>
@@ -11972,18 +12840,100 @@
       </p:sp>
       <p:sp>
         <p:nvSpPr>
-          <p:cNvPr id="8" name="Rounded Rectangle 7"/>
-          <p:cNvSpPr/>
-          <p:nvPr/>
-        </p:nvSpPr>
-        <p:spPr>
-          <a:xfrm>
-            <a:off x="1143000" y="2933700"/>
-            <a:ext cx="11430000" cy="1095375"/>
+          <p:cNvPr id="8" name="TextBox 7"/>
+          <p:cNvSpPr txBox="1"/>
+          <p:nvPr/>
+        </p:nvSpPr>
+        <p:spPr>
+          <a:xfrm>
+            <a:off x="1143000" y="2857500"/>
+            <a:ext cx="7372350" cy="533400"/>
+          </a:xfrm>
+          <a:prstGeom prst="rect">
+            <a:avLst/>
+          </a:prstGeom>
+          <a:noFill/>
+        </p:spPr>
+        <p:txBody>
+          <a:bodyPr wrap="square" lIns="0" rIns="0" tIns="0" bIns="0" anchor="t">
+            <a:spAutoFit/>
+          </a:bodyPr>
+          <a:lstStyle/>
+          <a:p>
+            <a:pPr algn="l">
+              <a:lnSpc>
+                <a:spcPct val="110000"/>
+              </a:lnSpc>
+            </a:pPr>
+            <a:r>
+              <a:rPr sz="3150" b="1">
+                <a:solidFill>
+                  <a:srgbClr val="0D2B5E"/>
+                </a:solidFill>
+                <a:latin typeface="Pretendard"/>
+                <a:ea typeface="Pretendard"/>
+                <a:cs typeface="Pretendard"/>
+              </a:rPr>
+              <a:t>터미널 1 — Consumer</a:t>
+            </a:r>
+          </a:p>
+        </p:txBody>
+      </p:sp>
+      <p:sp>
+        <p:nvSpPr>
+          <p:cNvPr id="9" name="TextBox 8"/>
+          <p:cNvSpPr txBox="1"/>
+          <p:nvPr/>
+        </p:nvSpPr>
+        <p:spPr>
+          <a:xfrm>
+            <a:off x="1143000" y="3467100"/>
+            <a:ext cx="7372350" cy="876300"/>
+          </a:xfrm>
+          <a:prstGeom prst="rect">
+            <a:avLst/>
+          </a:prstGeom>
+          <a:noFill/>
+        </p:spPr>
+        <p:txBody>
+          <a:bodyPr wrap="square" lIns="0" rIns="0" tIns="0" bIns="0" anchor="t">
+            <a:spAutoFit/>
+          </a:bodyPr>
+          <a:lstStyle/>
+          <a:p>
+            <a:pPr algn="l">
+              <a:lnSpc>
+                <a:spcPct val="146000"/>
+              </a:lnSpc>
+            </a:pPr>
+            <a:r>
+              <a:rPr sz="2250" b="0">
+                <a:solidFill>
+                  <a:srgbClr val="3D3D3D"/>
+                </a:solidFill>
+                <a:latin typeface="Pretendard"/>
+                <a:ea typeface="Pretendard"/>
+                <a:cs typeface="Pretendard"/>
+              </a:rPr>
+              <a:t>먼저 켠다 — 새 그룹은 켠 뒤 온 것만 읽는다</a:t>
+            </a:r>
+          </a:p>
+        </p:txBody>
+      </p:sp>
+      <p:sp>
+        <p:nvSpPr>
+          <p:cNvPr id="10" name="Rounded Rectangle 9"/>
+          <p:cNvSpPr/>
+          <p:nvPr/>
+        </p:nvSpPr>
+        <p:spPr>
+          <a:xfrm>
+            <a:off x="1143000" y="4610100"/>
+            <a:ext cx="7372350" cy="2857500"/>
           </a:xfrm>
           <a:prstGeom prst="roundRect">
             <a:avLst>
-              <a:gd name="adj" fmla="val 4347"/>
+              <a:gd name="adj" fmla="val 1666"/>
             </a:avLst>
           </a:prstGeom>
           <a:solidFill>
@@ -12006,20 +12956,20 @@
       </p:sp>
       <p:sp>
         <p:nvSpPr>
-          <p:cNvPr id="9" name="Oval 8"/>
-          <p:cNvSpPr/>
-          <p:nvPr/>
-        </p:nvSpPr>
-        <p:spPr>
-          <a:xfrm>
-            <a:off x="1447800" y="3181350"/>
-            <a:ext cx="590550" cy="590550"/>
+          <p:cNvPr id="11" name="Oval 10"/>
+          <p:cNvSpPr/>
+          <p:nvPr/>
+        </p:nvSpPr>
+        <p:spPr>
+          <a:xfrm>
+            <a:off x="1447800" y="5016817"/>
+            <a:ext cx="97155" cy="97155"/>
           </a:xfrm>
           <a:prstGeom prst="ellipse">
             <a:avLst/>
           </a:prstGeom>
           <a:solidFill>
-            <a:srgbClr val="0D2B5E"/>
+            <a:srgbClr val="1E5BC6"/>
           </a:solidFill>
           <a:ln>
             <a:noFill/>
@@ -12036,14 +12986,268 @@
       </p:sp>
       <p:sp>
         <p:nvSpPr>
-          <p:cNvPr id="10" name="TextBox 9"/>
-          <p:cNvSpPr txBox="1"/>
-          <p:nvPr/>
-        </p:nvSpPr>
-        <p:spPr>
-          <a:xfrm>
-            <a:off x="1447800" y="3333750"/>
-            <a:ext cx="590550" cy="323850"/>
+          <p:cNvPr id="12" name="TextBox 11"/>
+          <p:cNvSpPr txBox="1"/>
+          <p:nvPr/>
+        </p:nvSpPr>
+        <p:spPr>
+          <a:xfrm>
+            <a:off x="1633538" y="4838700"/>
+            <a:ext cx="6634162" cy="453390"/>
+          </a:xfrm>
+          <a:prstGeom prst="rect">
+            <a:avLst/>
+          </a:prstGeom>
+          <a:noFill/>
+        </p:spPr>
+        <p:txBody>
+          <a:bodyPr wrap="square" lIns="0" rIns="0" tIns="0" bIns="0" anchor="ctr">
+            <a:spAutoFit/>
+          </a:bodyPr>
+          <a:lstStyle/>
+          <a:p>
+            <a:pPr algn="l">
+              <a:lnSpc>
+                <a:spcPct val="120000"/>
+              </a:lnSpc>
+            </a:pPr>
+            <a:r>
+              <a:rPr sz="1575" b="0">
+                <a:solidFill>
+                  <a:srgbClr val="3D3D3D"/>
+                </a:solidFill>
+                <a:latin typeface="Pretendard"/>
+                <a:ea typeface="Pretendard"/>
+                <a:cs typeface="Pretendard"/>
+              </a:rPr>
+              <a:t>kafka-console-consumer.sh</a:t>
+            </a:r>
+          </a:p>
+        </p:txBody>
+      </p:sp>
+      <p:sp>
+        <p:nvSpPr>
+          <p:cNvPr id="13" name="Oval 12"/>
+          <p:cNvSpPr/>
+          <p:nvPr/>
+        </p:nvSpPr>
+        <p:spPr>
+          <a:xfrm>
+            <a:off x="1447800" y="5527358"/>
+            <a:ext cx="97155" cy="97155"/>
+          </a:xfrm>
+          <a:prstGeom prst="ellipse">
+            <a:avLst/>
+          </a:prstGeom>
+          <a:solidFill>
+            <a:srgbClr val="1E5BC6"/>
+          </a:solidFill>
+          <a:ln>
+            <a:noFill/>
+          </a:ln>
+          <a:effectLst/>
+        </p:spPr>
+        <p:txBody>
+          <a:bodyPr rtlCol="0" anchor="ctr" wrap="square"/>
+          <a:lstStyle/>
+          <a:p>
+            <a:pPr algn="ctr"/>
+          </a:p>
+        </p:txBody>
+      </p:sp>
+      <p:sp>
+        <p:nvSpPr>
+          <p:cNvPr id="14" name="TextBox 13"/>
+          <p:cNvSpPr txBox="1"/>
+          <p:nvPr/>
+        </p:nvSpPr>
+        <p:spPr>
+          <a:xfrm>
+            <a:off x="1633538" y="5349240"/>
+            <a:ext cx="6634162" cy="453390"/>
+          </a:xfrm>
+          <a:prstGeom prst="rect">
+            <a:avLst/>
+          </a:prstGeom>
+          <a:noFill/>
+        </p:spPr>
+        <p:txBody>
+          <a:bodyPr wrap="square" lIns="0" rIns="0" tIns="0" bIns="0" anchor="ctr">
+            <a:spAutoFit/>
+          </a:bodyPr>
+          <a:lstStyle/>
+          <a:p>
+            <a:pPr algn="l">
+              <a:lnSpc>
+                <a:spcPct val="120000"/>
+              </a:lnSpc>
+            </a:pPr>
+            <a:r>
+              <a:rPr sz="1575" b="0">
+                <a:solidFill>
+                  <a:srgbClr val="3D3D3D"/>
+                </a:solidFill>
+                <a:latin typeface="Pretendard"/>
+                <a:ea typeface="Pretendard"/>
+                <a:cs typeface="Pretendard"/>
+              </a:rPr>
+              <a:t>--topic orders --group order-app</a:t>
+            </a:r>
+          </a:p>
+        </p:txBody>
+      </p:sp>
+      <p:sp>
+        <p:nvSpPr>
+          <p:cNvPr id="15" name="Oval 14"/>
+          <p:cNvSpPr/>
+          <p:nvPr/>
+        </p:nvSpPr>
+        <p:spPr>
+          <a:xfrm>
+            <a:off x="1447800" y="6037898"/>
+            <a:ext cx="97155" cy="97155"/>
+          </a:xfrm>
+          <a:prstGeom prst="ellipse">
+            <a:avLst/>
+          </a:prstGeom>
+          <a:solidFill>
+            <a:srgbClr val="1E5BC6"/>
+          </a:solidFill>
+          <a:ln>
+            <a:noFill/>
+          </a:ln>
+          <a:effectLst/>
+        </p:spPr>
+        <p:txBody>
+          <a:bodyPr rtlCol="0" anchor="ctr" wrap="square"/>
+          <a:lstStyle/>
+          <a:p>
+            <a:pPr algn="ctr"/>
+          </a:p>
+        </p:txBody>
+      </p:sp>
+      <p:sp>
+        <p:nvSpPr>
+          <p:cNvPr id="16" name="TextBox 15"/>
+          <p:cNvSpPr txBox="1"/>
+          <p:nvPr/>
+        </p:nvSpPr>
+        <p:spPr>
+          <a:xfrm>
+            <a:off x="1633538" y="5859780"/>
+            <a:ext cx="6634162" cy="453390"/>
+          </a:xfrm>
+          <a:prstGeom prst="rect">
+            <a:avLst/>
+          </a:prstGeom>
+          <a:noFill/>
+        </p:spPr>
+        <p:txBody>
+          <a:bodyPr wrap="square" lIns="0" rIns="0" tIns="0" bIns="0" anchor="ctr">
+            <a:spAutoFit/>
+          </a:bodyPr>
+          <a:lstStyle/>
+          <a:p>
+            <a:pPr algn="l">
+              <a:lnSpc>
+                <a:spcPct val="120000"/>
+              </a:lnSpc>
+            </a:pPr>
+            <a:r>
+              <a:rPr sz="1575" b="0">
+                <a:solidFill>
+                  <a:srgbClr val="3D3D3D"/>
+                </a:solidFill>
+                <a:latin typeface="Pretendard"/>
+                <a:ea typeface="Pretendard"/>
+                <a:cs typeface="Pretendard"/>
+              </a:rPr>
+              <a:t>--property print.key=true</a:t>
+            </a:r>
+          </a:p>
+        </p:txBody>
+      </p:sp>
+      <p:sp>
+        <p:nvSpPr>
+          <p:cNvPr id="17" name="Oval 16"/>
+          <p:cNvSpPr/>
+          <p:nvPr/>
+        </p:nvSpPr>
+        <p:spPr>
+          <a:xfrm>
+            <a:off x="1447800" y="6548438"/>
+            <a:ext cx="97155" cy="97155"/>
+          </a:xfrm>
+          <a:prstGeom prst="ellipse">
+            <a:avLst/>
+          </a:prstGeom>
+          <a:solidFill>
+            <a:srgbClr val="1E5BC6"/>
+          </a:solidFill>
+          <a:ln>
+            <a:noFill/>
+          </a:ln>
+          <a:effectLst/>
+        </p:spPr>
+        <p:txBody>
+          <a:bodyPr rtlCol="0" anchor="ctr" wrap="square"/>
+          <a:lstStyle/>
+          <a:p>
+            <a:pPr algn="ctr"/>
+          </a:p>
+        </p:txBody>
+      </p:sp>
+      <p:sp>
+        <p:nvSpPr>
+          <p:cNvPr id="18" name="TextBox 17"/>
+          <p:cNvSpPr txBox="1"/>
+          <p:nvPr/>
+        </p:nvSpPr>
+        <p:spPr>
+          <a:xfrm>
+            <a:off x="1633538" y="6370320"/>
+            <a:ext cx="6634162" cy="453390"/>
+          </a:xfrm>
+          <a:prstGeom prst="rect">
+            <a:avLst/>
+          </a:prstGeom>
+          <a:noFill/>
+        </p:spPr>
+        <p:txBody>
+          <a:bodyPr wrap="square" lIns="0" rIns="0" tIns="0" bIns="0" anchor="ctr">
+            <a:spAutoFit/>
+          </a:bodyPr>
+          <a:lstStyle/>
+          <a:p>
+            <a:pPr algn="l">
+              <a:lnSpc>
+                <a:spcPct val="120000"/>
+              </a:lnSpc>
+            </a:pPr>
+            <a:r>
+              <a:rPr sz="1575" b="0">
+                <a:solidFill>
+                  <a:srgbClr val="3D3D3D"/>
+                </a:solidFill>
+                <a:latin typeface="Pretendard"/>
+                <a:ea typeface="Pretendard"/>
+                <a:cs typeface="Pretendard"/>
+              </a:rPr>
+              <a:t>--property print.partition=true</a:t>
+            </a:r>
+          </a:p>
+        </p:txBody>
+      </p:sp>
+      <p:sp>
+        <p:nvSpPr>
+          <p:cNvPr id="19" name="TextBox 18"/>
+          <p:cNvSpPr txBox="1"/>
+          <p:nvPr/>
+        </p:nvSpPr>
+        <p:spPr>
+          <a:xfrm>
+            <a:off x="9772650" y="2857500"/>
+            <a:ext cx="7372350" cy="533400"/>
           </a:xfrm>
           <a:prstGeom prst="rect">
             <a:avLst/>
@@ -12056,35 +13260,35 @@
           </a:bodyPr>
           <a:lstStyle/>
           <a:p>
-            <a:pPr algn="ctr">
-              <a:lnSpc>
-                <a:spcPct val="100000"/>
-              </a:lnSpc>
-            </a:pPr>
-            <a:r>
-              <a:rPr sz="2250" b="1">
-                <a:solidFill>
-                  <a:srgbClr val="FFFFFF"/>
-                </a:solidFill>
-                <a:latin typeface="Pretendard"/>
-                <a:ea typeface="Pretendard"/>
-                <a:cs typeface="Pretendard"/>
-              </a:rPr>
-              <a:t>1</a:t>
-            </a:r>
-          </a:p>
-        </p:txBody>
-      </p:sp>
-      <p:sp>
-        <p:nvSpPr>
-          <p:cNvPr id="11" name="TextBox 10"/>
-          <p:cNvSpPr txBox="1"/>
-          <p:nvPr/>
-        </p:nvSpPr>
-        <p:spPr>
-          <a:xfrm>
-            <a:off x="2324100" y="3143250"/>
-            <a:ext cx="9906000" cy="400050"/>
+            <a:pPr algn="l">
+              <a:lnSpc>
+                <a:spcPct val="110000"/>
+              </a:lnSpc>
+            </a:pPr>
+            <a:r>
+              <a:rPr sz="3150" b="1">
+                <a:solidFill>
+                  <a:srgbClr val="0D2B5E"/>
+                </a:solidFill>
+                <a:latin typeface="Pretendard"/>
+                <a:ea typeface="Pretendard"/>
+                <a:cs typeface="Pretendard"/>
+              </a:rPr>
+              <a:t>터미널 2 — Producer</a:t>
+            </a:r>
+          </a:p>
+        </p:txBody>
+      </p:sp>
+      <p:sp>
+        <p:nvSpPr>
+          <p:cNvPr id="20" name="TextBox 19"/>
+          <p:cNvSpPr txBox="1"/>
+          <p:nvPr/>
+        </p:nvSpPr>
+        <p:spPr>
+          <a:xfrm>
+            <a:off x="9772650" y="3467100"/>
+            <a:ext cx="7372350" cy="876300"/>
           </a:xfrm>
           <a:prstGeom prst="rect">
             <a:avLst/>
@@ -12099,52 +13303,11 @@
           <a:p>
             <a:pPr algn="l">
               <a:lnSpc>
-                <a:spcPct val="110000"/>
-              </a:lnSpc>
-            </a:pPr>
-            <a:r>
-              <a:rPr sz="2475" b="1">
-                <a:solidFill>
-                  <a:srgbClr val="0D2B5E"/>
-                </a:solidFill>
-                <a:latin typeface="Pretendard"/>
-                <a:ea typeface="Pretendard"/>
-                <a:cs typeface="Pretendard"/>
-              </a:rPr>
-              <a:t>kafka-consumer-groups.sh --describe --group order-app</a:t>
-            </a:r>
-          </a:p>
-        </p:txBody>
-      </p:sp>
-      <p:sp>
-        <p:nvSpPr>
-          <p:cNvPr id="12" name="TextBox 11"/>
-          <p:cNvSpPr txBox="1"/>
-          <p:nvPr/>
-        </p:nvSpPr>
-        <p:spPr>
-          <a:xfrm>
-            <a:off x="2324100" y="3543300"/>
-            <a:ext cx="9906000" cy="361950"/>
-          </a:xfrm>
-          <a:prstGeom prst="rect">
-            <a:avLst/>
-          </a:prstGeom>
-          <a:noFill/>
-        </p:spPr>
-        <p:txBody>
-          <a:bodyPr wrap="square" lIns="0" rIns="0" tIns="0" bIns="0" anchor="t">
-            <a:spAutoFit/>
-          </a:bodyPr>
-          <a:lstStyle/>
-          <a:p>
-            <a:pPr algn="l">
-              <a:lnSpc>
-                <a:spcPct val="120000"/>
-              </a:lnSpc>
-            </a:pPr>
-            <a:r>
-              <a:rPr sz="2025" b="0">
+                <a:spcPct val="146000"/>
+              </a:lnSpc>
+            </a:pPr>
+            <a:r>
+              <a:rPr sz="2250" b="0">
                 <a:solidFill>
                   <a:srgbClr val="3D3D3D"/>
                 </a:solidFill>
@@ -12152,25 +13315,25 @@
                 <a:ea typeface="Pretendard"/>
                 <a:cs typeface="Pretendard"/>
               </a:rPr>
-              <a:t>파티션별 CURRENT-OFFSET / LOG-END-OFFSET / LAG — 다 읽었으면 LAG 0</a:t>
-            </a:r>
-          </a:p>
-        </p:txBody>
-      </p:sp>
-      <p:sp>
-        <p:nvSpPr>
-          <p:cNvPr id="13" name="Rounded Rectangle 12"/>
-          <p:cNvSpPr/>
-          <p:nvPr/>
-        </p:nvSpPr>
-        <p:spPr>
-          <a:xfrm>
-            <a:off x="1143000" y="4200525"/>
-            <a:ext cx="11430000" cy="1095375"/>
+              <a:t>실측 user1→0, user2·user3→2, 1번 빈 칸</a:t>
+            </a:r>
+          </a:p>
+        </p:txBody>
+      </p:sp>
+      <p:sp>
+        <p:nvSpPr>
+          <p:cNvPr id="21" name="Rounded Rectangle 20"/>
+          <p:cNvSpPr/>
+          <p:nvPr/>
+        </p:nvSpPr>
+        <p:spPr>
+          <a:xfrm>
+            <a:off x="9772650" y="4610100"/>
+            <a:ext cx="7372350" cy="2857500"/>
           </a:xfrm>
           <a:prstGeom prst="roundRect">
             <a:avLst>
-              <a:gd name="adj" fmla="val 4347"/>
+              <a:gd name="adj" fmla="val 1666"/>
             </a:avLst>
           </a:prstGeom>
           <a:solidFill>
@@ -12193,20 +13356,20 @@
       </p:sp>
       <p:sp>
         <p:nvSpPr>
-          <p:cNvPr id="14" name="Oval 13"/>
-          <p:cNvSpPr/>
-          <p:nvPr/>
-        </p:nvSpPr>
-        <p:spPr>
-          <a:xfrm>
-            <a:off x="1447800" y="4448175"/>
-            <a:ext cx="590550" cy="590550"/>
+          <p:cNvPr id="22" name="Oval 21"/>
+          <p:cNvSpPr/>
+          <p:nvPr/>
+        </p:nvSpPr>
+        <p:spPr>
+          <a:xfrm>
+            <a:off x="10077450" y="5016817"/>
+            <a:ext cx="97155" cy="97155"/>
           </a:xfrm>
           <a:prstGeom prst="ellipse">
             <a:avLst/>
           </a:prstGeom>
           <a:solidFill>
-            <a:srgbClr val="0D2B5E"/>
+            <a:srgbClr val="1E5BC6"/>
           </a:solidFill>
           <a:ln>
             <a:noFill/>
@@ -12223,115 +13386,33 @@
       </p:sp>
       <p:sp>
         <p:nvSpPr>
-          <p:cNvPr id="15" name="TextBox 14"/>
-          <p:cNvSpPr txBox="1"/>
-          <p:nvPr/>
-        </p:nvSpPr>
-        <p:spPr>
-          <a:xfrm>
-            <a:off x="1447800" y="4600575"/>
-            <a:ext cx="590550" cy="323850"/>
-          </a:xfrm>
-          <a:prstGeom prst="rect">
-            <a:avLst/>
-          </a:prstGeom>
-          <a:noFill/>
-        </p:spPr>
-        <p:txBody>
-          <a:bodyPr wrap="square" lIns="0" rIns="0" tIns="0" bIns="0" anchor="t">
-            <a:spAutoFit/>
-          </a:bodyPr>
-          <a:lstStyle/>
-          <a:p>
-            <a:pPr algn="ctr">
-              <a:lnSpc>
-                <a:spcPct val="100000"/>
-              </a:lnSpc>
-            </a:pPr>
-            <a:r>
-              <a:rPr sz="2250" b="1">
-                <a:solidFill>
-                  <a:srgbClr val="FFFFFF"/>
-                </a:solidFill>
-                <a:latin typeface="Pretendard"/>
-                <a:ea typeface="Pretendard"/>
-                <a:cs typeface="Pretendard"/>
-              </a:rPr>
-              <a:t>2</a:t>
-            </a:r>
-          </a:p>
-        </p:txBody>
-      </p:sp>
-      <p:sp>
-        <p:nvSpPr>
-          <p:cNvPr id="16" name="TextBox 15"/>
-          <p:cNvSpPr txBox="1"/>
-          <p:nvPr/>
-        </p:nvSpPr>
-        <p:spPr>
-          <a:xfrm>
-            <a:off x="2324100" y="4410075"/>
-            <a:ext cx="9906000" cy="400050"/>
-          </a:xfrm>
-          <a:prstGeom prst="rect">
-            <a:avLst/>
-          </a:prstGeom>
-          <a:noFill/>
-        </p:spPr>
-        <p:txBody>
-          <a:bodyPr wrap="square" lIns="0" rIns="0" tIns="0" bIns="0" anchor="t">
+          <p:cNvPr id="23" name="TextBox 22"/>
+          <p:cNvSpPr txBox="1"/>
+          <p:nvPr/>
+        </p:nvSpPr>
+        <p:spPr>
+          <a:xfrm>
+            <a:off x="10263188" y="4838700"/>
+            <a:ext cx="6634162" cy="453390"/>
+          </a:xfrm>
+          <a:prstGeom prst="rect">
+            <a:avLst/>
+          </a:prstGeom>
+          <a:noFill/>
+        </p:spPr>
+        <p:txBody>
+          <a:bodyPr wrap="square" lIns="0" rIns="0" tIns="0" bIns="0" anchor="ctr">
             <a:spAutoFit/>
           </a:bodyPr>
           <a:lstStyle/>
           <a:p>
             <a:pPr algn="l">
               <a:lnSpc>
-                <a:spcPct val="110000"/>
-              </a:lnSpc>
-            </a:pPr>
-            <a:r>
-              <a:rPr sz="2475" b="1">
-                <a:solidFill>
-                  <a:srgbClr val="0D2B5E"/>
-                </a:solidFill>
-                <a:latin typeface="Pretendard"/>
-                <a:ea typeface="Pretendard"/>
-                <a:cs typeface="Pretendard"/>
-              </a:rPr>
-              <a:t>터미널 1 컨슈머를 Ctrl+C 로 끈다</a:t>
-            </a:r>
-          </a:p>
-        </p:txBody>
-      </p:sp>
-      <p:sp>
-        <p:nvSpPr>
-          <p:cNvPr id="17" name="TextBox 16"/>
-          <p:cNvSpPr txBox="1"/>
-          <p:nvPr/>
-        </p:nvSpPr>
-        <p:spPr>
-          <a:xfrm>
-            <a:off x="2324100" y="4810125"/>
-            <a:ext cx="9906000" cy="361950"/>
-          </a:xfrm>
-          <a:prstGeom prst="rect">
-            <a:avLst/>
-          </a:prstGeom>
-          <a:noFill/>
-        </p:spPr>
-        <p:txBody>
-          <a:bodyPr wrap="square" lIns="0" rIns="0" tIns="0" bIns="0" anchor="t">
-            <a:spAutoFit/>
-          </a:bodyPr>
-          <a:lstStyle/>
-          <a:p>
-            <a:pPr algn="l">
-              <a:lnSpc>
                 <a:spcPct val="120000"/>
               </a:lnSpc>
             </a:pPr>
             <a:r>
-              <a:rPr sz="2025" b="0">
+              <a:rPr sz="1575" b="0">
                 <a:solidFill>
                   <a:srgbClr val="3D3D3D"/>
                 </a:solidFill>
@@ -12339,61 +13420,27 @@
                 <a:ea typeface="Pretendard"/>
                 <a:cs typeface="Pretendard"/>
               </a:rPr>
-              <a:t>터미널 2 에서 메시지를 몇 개 더 보내고 다시 describe</a:t>
-            </a:r>
-          </a:p>
-        </p:txBody>
-      </p:sp>
-      <p:sp>
-        <p:nvSpPr>
-          <p:cNvPr id="18" name="Rounded Rectangle 17"/>
-          <p:cNvSpPr/>
-          <p:nvPr/>
-        </p:nvSpPr>
-        <p:spPr>
-          <a:xfrm>
-            <a:off x="1143000" y="5467350"/>
-            <a:ext cx="11430000" cy="1095375"/>
-          </a:xfrm>
-          <a:prstGeom prst="roundRect">
-            <a:avLst>
-              <a:gd name="adj" fmla="val 4347"/>
-            </a:avLst>
-          </a:prstGeom>
-          <a:solidFill>
-            <a:srgbClr val="FAFBFD"/>
-          </a:solidFill>
-          <a:ln w="9525">
-            <a:solidFill>
-              <a:srgbClr val="DCE1E8"/>
-            </a:solidFill>
-          </a:ln>
-          <a:effectLst/>
-        </p:spPr>
-        <p:txBody>
-          <a:bodyPr rtlCol="0" anchor="ctr" wrap="square"/>
-          <a:lstStyle/>
-          <a:p>
-            <a:pPr algn="ctr"/>
-          </a:p>
-        </p:txBody>
-      </p:sp>
-      <p:sp>
-        <p:nvSpPr>
-          <p:cNvPr id="19" name="Oval 18"/>
-          <p:cNvSpPr/>
-          <p:nvPr/>
-        </p:nvSpPr>
-        <p:spPr>
-          <a:xfrm>
-            <a:off x="1447800" y="5715000"/>
-            <a:ext cx="590550" cy="590550"/>
+              <a:t>kafka-console-producer.sh</a:t>
+            </a:r>
+          </a:p>
+        </p:txBody>
+      </p:sp>
+      <p:sp>
+        <p:nvSpPr>
+          <p:cNvPr id="24" name="Oval 23"/>
+          <p:cNvSpPr/>
+          <p:nvPr/>
+        </p:nvSpPr>
+        <p:spPr>
+          <a:xfrm>
+            <a:off x="10077450" y="5527358"/>
+            <a:ext cx="97155" cy="97155"/>
           </a:xfrm>
           <a:prstGeom prst="ellipse">
             <a:avLst/>
           </a:prstGeom>
           <a:solidFill>
-            <a:srgbClr val="0D2B5E"/>
+            <a:srgbClr val="1E5BC6"/>
           </a:solidFill>
           <a:ln>
             <a:noFill/>
@@ -12410,14 +13457,227 @@
       </p:sp>
       <p:sp>
         <p:nvSpPr>
-          <p:cNvPr id="20" name="TextBox 19"/>
-          <p:cNvSpPr txBox="1"/>
-          <p:nvPr/>
-        </p:nvSpPr>
-        <p:spPr>
-          <a:xfrm>
-            <a:off x="1447800" y="5867400"/>
-            <a:ext cx="590550" cy="323850"/>
+          <p:cNvPr id="25" name="TextBox 24"/>
+          <p:cNvSpPr txBox="1"/>
+          <p:nvPr/>
+        </p:nvSpPr>
+        <p:spPr>
+          <a:xfrm>
+            <a:off x="10263188" y="5349240"/>
+            <a:ext cx="6634162" cy="453390"/>
+          </a:xfrm>
+          <a:prstGeom prst="rect">
+            <a:avLst/>
+          </a:prstGeom>
+          <a:noFill/>
+        </p:spPr>
+        <p:txBody>
+          <a:bodyPr wrap="square" lIns="0" rIns="0" tIns="0" bIns="0" anchor="ctr">
+            <a:spAutoFit/>
+          </a:bodyPr>
+          <a:lstStyle/>
+          <a:p>
+            <a:pPr algn="l">
+              <a:lnSpc>
+                <a:spcPct val="120000"/>
+              </a:lnSpc>
+            </a:pPr>
+            <a:r>
+              <a:rPr sz="1575" b="0">
+                <a:solidFill>
+                  <a:srgbClr val="3D3D3D"/>
+                </a:solidFill>
+                <a:latin typeface="Pretendard"/>
+                <a:ea typeface="Pretendard"/>
+                <a:cs typeface="Pretendard"/>
+              </a:rPr>
+              <a:t>--topic orders</a:t>
+            </a:r>
+          </a:p>
+        </p:txBody>
+      </p:sp>
+      <p:sp>
+        <p:nvSpPr>
+          <p:cNvPr id="26" name="Oval 25"/>
+          <p:cNvSpPr/>
+          <p:nvPr/>
+        </p:nvSpPr>
+        <p:spPr>
+          <a:xfrm>
+            <a:off x="10077450" y="6037898"/>
+            <a:ext cx="97155" cy="97155"/>
+          </a:xfrm>
+          <a:prstGeom prst="ellipse">
+            <a:avLst/>
+          </a:prstGeom>
+          <a:solidFill>
+            <a:srgbClr val="1E5BC6"/>
+          </a:solidFill>
+          <a:ln>
+            <a:noFill/>
+          </a:ln>
+          <a:effectLst/>
+        </p:spPr>
+        <p:txBody>
+          <a:bodyPr rtlCol="0" anchor="ctr" wrap="square"/>
+          <a:lstStyle/>
+          <a:p>
+            <a:pPr algn="ctr"/>
+          </a:p>
+        </p:txBody>
+      </p:sp>
+      <p:sp>
+        <p:nvSpPr>
+          <p:cNvPr id="27" name="TextBox 26"/>
+          <p:cNvSpPr txBox="1"/>
+          <p:nvPr/>
+        </p:nvSpPr>
+        <p:spPr>
+          <a:xfrm>
+            <a:off x="10263188" y="5859780"/>
+            <a:ext cx="6634162" cy="453390"/>
+          </a:xfrm>
+          <a:prstGeom prst="rect">
+            <a:avLst/>
+          </a:prstGeom>
+          <a:noFill/>
+        </p:spPr>
+        <p:txBody>
+          <a:bodyPr wrap="square" lIns="0" rIns="0" tIns="0" bIns="0" anchor="ctr">
+            <a:spAutoFit/>
+          </a:bodyPr>
+          <a:lstStyle/>
+          <a:p>
+            <a:pPr algn="l">
+              <a:lnSpc>
+                <a:spcPct val="120000"/>
+              </a:lnSpc>
+            </a:pPr>
+            <a:r>
+              <a:rPr sz="1575" b="0">
+                <a:solidFill>
+                  <a:srgbClr val="3D3D3D"/>
+                </a:solidFill>
+                <a:latin typeface="Pretendard"/>
+                <a:ea typeface="Pretendard"/>
+                <a:cs typeface="Pretendard"/>
+              </a:rPr>
+              <a:t>--property parse.key=true</a:t>
+            </a:r>
+          </a:p>
+        </p:txBody>
+      </p:sp>
+      <p:sp>
+        <p:nvSpPr>
+          <p:cNvPr id="28" name="Oval 27"/>
+          <p:cNvSpPr/>
+          <p:nvPr/>
+        </p:nvSpPr>
+        <p:spPr>
+          <a:xfrm>
+            <a:off x="10077450" y="6548438"/>
+            <a:ext cx="97155" cy="97155"/>
+          </a:xfrm>
+          <a:prstGeom prst="ellipse">
+            <a:avLst/>
+          </a:prstGeom>
+          <a:solidFill>
+            <a:srgbClr val="1E5BC6"/>
+          </a:solidFill>
+          <a:ln>
+            <a:noFill/>
+          </a:ln>
+          <a:effectLst/>
+        </p:spPr>
+        <p:txBody>
+          <a:bodyPr rtlCol="0" anchor="ctr" wrap="square"/>
+          <a:lstStyle/>
+          <a:p>
+            <a:pPr algn="ctr"/>
+          </a:p>
+        </p:txBody>
+      </p:sp>
+      <p:sp>
+        <p:nvSpPr>
+          <p:cNvPr id="29" name="TextBox 28"/>
+          <p:cNvSpPr txBox="1"/>
+          <p:nvPr/>
+        </p:nvSpPr>
+        <p:spPr>
+          <a:xfrm>
+            <a:off x="10263188" y="6370320"/>
+            <a:ext cx="6634162" cy="453390"/>
+          </a:xfrm>
+          <a:prstGeom prst="rect">
+            <a:avLst/>
+          </a:prstGeom>
+          <a:noFill/>
+        </p:spPr>
+        <p:txBody>
+          <a:bodyPr wrap="square" lIns="0" rIns="0" tIns="0" bIns="0" anchor="ctr">
+            <a:spAutoFit/>
+          </a:bodyPr>
+          <a:lstStyle/>
+          <a:p>
+            <a:pPr algn="l">
+              <a:lnSpc>
+                <a:spcPct val="120000"/>
+              </a:lnSpc>
+            </a:pPr>
+            <a:r>
+              <a:rPr sz="1575" b="0">
+                <a:solidFill>
+                  <a:srgbClr val="3D3D3D"/>
+                </a:solidFill>
+                <a:latin typeface="Pretendard"/>
+                <a:ea typeface="Pretendard"/>
+                <a:cs typeface="Pretendard"/>
+              </a:rPr>
+              <a:t>--property key.separator=:</a:t>
+            </a:r>
+          </a:p>
+        </p:txBody>
+      </p:sp>
+      <p:sp>
+        <p:nvSpPr>
+          <p:cNvPr id="30" name="Oval 29"/>
+          <p:cNvSpPr/>
+          <p:nvPr/>
+        </p:nvSpPr>
+        <p:spPr>
+          <a:xfrm>
+            <a:off x="8686800" y="3771900"/>
+            <a:ext cx="914400" cy="914400"/>
+          </a:xfrm>
+          <a:prstGeom prst="ellipse">
+            <a:avLst/>
+          </a:prstGeom>
+          <a:solidFill>
+            <a:srgbClr val="0D2B5E"/>
+          </a:solidFill>
+          <a:ln>
+            <a:noFill/>
+          </a:ln>
+          <a:effectLst/>
+        </p:spPr>
+        <p:txBody>
+          <a:bodyPr rtlCol="0" anchor="ctr" wrap="square"/>
+          <a:lstStyle/>
+          <a:p>
+            <a:pPr algn="ctr"/>
+          </a:p>
+        </p:txBody>
+      </p:sp>
+      <p:sp>
+        <p:nvSpPr>
+          <p:cNvPr id="31" name="TextBox 30"/>
+          <p:cNvSpPr txBox="1"/>
+          <p:nvPr/>
+        </p:nvSpPr>
+        <p:spPr>
+          <a:xfrm>
+            <a:off x="8686800" y="4057650"/>
+            <a:ext cx="914400" cy="381000"/>
           </a:xfrm>
           <a:prstGeom prst="rect">
             <a:avLst/>
@@ -12444,230 +13704,14 @@
                 <a:ea typeface="Pretendard"/>
                 <a:cs typeface="Pretendard"/>
               </a:rPr>
-              <a:t>3</a:t>
-            </a:r>
-          </a:p>
-        </p:txBody>
-      </p:sp>
-      <p:sp>
-        <p:nvSpPr>
-          <p:cNvPr id="21" name="TextBox 20"/>
-          <p:cNvSpPr txBox="1"/>
-          <p:nvPr/>
-        </p:nvSpPr>
-        <p:spPr>
-          <a:xfrm>
-            <a:off x="2324100" y="5676900"/>
-            <a:ext cx="9906000" cy="400050"/>
-          </a:xfrm>
-          <a:prstGeom prst="rect">
-            <a:avLst/>
-          </a:prstGeom>
-          <a:noFill/>
-        </p:spPr>
-        <p:txBody>
-          <a:bodyPr wrap="square" lIns="0" rIns="0" tIns="0" bIns="0" anchor="t">
-            <a:spAutoFit/>
-          </a:bodyPr>
-          <a:lstStyle/>
-          <a:p>
-            <a:pPr algn="l">
-              <a:lnSpc>
-                <a:spcPct val="110000"/>
-              </a:lnSpc>
-            </a:pPr>
-            <a:r>
-              <a:rPr sz="2475" b="1">
-                <a:solidFill>
-                  <a:srgbClr val="0D2B5E"/>
-                </a:solidFill>
-                <a:latin typeface="Pretendard"/>
-                <a:ea typeface="Pretendard"/>
-                <a:cs typeface="Pretendard"/>
-              </a:rPr>
-              <a:t>LAG 이 0 보다 커진다</a:t>
-            </a:r>
-          </a:p>
-        </p:txBody>
-      </p:sp>
-      <p:sp>
-        <p:nvSpPr>
-          <p:cNvPr id="22" name="TextBox 21"/>
-          <p:cNvSpPr txBox="1"/>
-          <p:nvPr/>
-        </p:nvSpPr>
-        <p:spPr>
-          <a:xfrm>
-            <a:off x="2324100" y="6076950"/>
-            <a:ext cx="9906000" cy="361950"/>
-          </a:xfrm>
-          <a:prstGeom prst="rect">
-            <a:avLst/>
-          </a:prstGeom>
-          <a:noFill/>
-        </p:spPr>
-        <p:txBody>
-          <a:bodyPr wrap="square" lIns="0" rIns="0" tIns="0" bIns="0" anchor="t">
-            <a:spAutoFit/>
-          </a:bodyPr>
-          <a:lstStyle/>
-          <a:p>
-            <a:pPr algn="l">
-              <a:lnSpc>
-                <a:spcPct val="120000"/>
-              </a:lnSpc>
-            </a:pPr>
-            <a:r>
-              <a:rPr sz="2025" b="0">
-                <a:solidFill>
-                  <a:srgbClr val="3D3D3D"/>
-                </a:solidFill>
-                <a:latin typeface="Pretendard"/>
-                <a:ea typeface="Pretendard"/>
-                <a:cs typeface="Pretendard"/>
-              </a:rPr>
-              <a:t>보내는 쪽은 쌓는데 읽는 쪽이 없다 — 컨슈머를 다시 켜면 0 으로 돌아온다</a:t>
-            </a:r>
-          </a:p>
-        </p:txBody>
-      </p:sp>
-      <p:sp>
-        <p:nvSpPr>
-          <p:cNvPr id="23" name="Rounded Rectangle 22"/>
-          <p:cNvSpPr/>
-          <p:nvPr/>
-        </p:nvSpPr>
-        <p:spPr>
-          <a:xfrm>
-            <a:off x="13144500" y="2933700"/>
-            <a:ext cx="4000500" cy="3629025"/>
-          </a:xfrm>
-          <a:prstGeom prst="roundRect">
-            <a:avLst>
-              <a:gd name="adj" fmla="val 1312"/>
-            </a:avLst>
-          </a:prstGeom>
-          <a:solidFill>
-            <a:srgbClr val="EDF3FD"/>
-          </a:solidFill>
-          <a:ln w="9525">
-            <a:solidFill>
-              <a:srgbClr val="BFD3F5"/>
-            </a:solidFill>
-          </a:ln>
-          <a:effectLst/>
-        </p:spPr>
-        <p:txBody>
-          <a:bodyPr rtlCol="0" anchor="ctr" wrap="square"/>
-          <a:lstStyle/>
-          <a:p>
-            <a:pPr algn="ctr"/>
-          </a:p>
-        </p:txBody>
-      </p:sp>
-      <p:sp>
-        <p:nvSpPr>
-          <p:cNvPr id="24" name="TextBox 23"/>
-          <p:cNvSpPr txBox="1"/>
-          <p:nvPr/>
-        </p:nvSpPr>
-        <p:spPr>
-          <a:xfrm>
-            <a:off x="13487400" y="3929062"/>
-            <a:ext cx="3314700" cy="304800"/>
-          </a:xfrm>
-          <a:prstGeom prst="rect">
-            <a:avLst/>
-          </a:prstGeom>
-          <a:noFill/>
-        </p:spPr>
-        <p:txBody>
-          <a:bodyPr wrap="square" lIns="0" rIns="0" tIns="0" bIns="0" anchor="t">
-            <a:spAutoFit/>
-          </a:bodyPr>
-          <a:lstStyle/>
-          <a:p>
-            <a:pPr algn="l">
-              <a:lnSpc>
-                <a:spcPct val="100000"/>
-              </a:lnSpc>
-            </a:pPr>
-            <a:r>
-              <a:rPr sz="1800" b="1" spc="190">
-                <a:solidFill>
-                  <a:srgbClr val="1E5BC6"/>
-                </a:solidFill>
-                <a:latin typeface="Pretendard"/>
-                <a:ea typeface="Pretendard"/>
-                <a:cs typeface="Pretendard"/>
-              </a:rPr>
-              <a:t>운영에서 LAG 을 감시하는 이유</a:t>
-            </a:r>
-          </a:p>
-        </p:txBody>
-      </p:sp>
-      <p:sp>
-        <p:nvSpPr>
-          <p:cNvPr id="25" name="TextBox 24"/>
-          <p:cNvSpPr txBox="1"/>
-          <p:nvPr/>
-        </p:nvSpPr>
-        <p:spPr>
-          <a:xfrm>
-            <a:off x="13487400" y="4329112"/>
-            <a:ext cx="3314700" cy="1238250"/>
-          </a:xfrm>
-          <a:prstGeom prst="rect">
-            <a:avLst/>
-          </a:prstGeom>
-          <a:noFill/>
-        </p:spPr>
-        <p:txBody>
-          <a:bodyPr wrap="square" lIns="0" rIns="0" tIns="0" bIns="0" anchor="t">
-            <a:spAutoFit/>
-          </a:bodyPr>
-          <a:lstStyle/>
-          <a:p>
-            <a:pPr algn="l">
-              <a:lnSpc>
-                <a:spcPct val="138000"/>
-              </a:lnSpc>
-            </a:pPr>
-            <a:r>
-              <a:rPr sz="2700" b="1">
-                <a:solidFill>
-                  <a:srgbClr val="0D2B5E"/>
-                </a:solidFill>
-                <a:latin typeface="Pretendard"/>
-                <a:ea typeface="Pretendard"/>
-                <a:cs typeface="Pretendard"/>
-              </a:rPr>
-              <a:t>읽는 쪽 멈춤</a:t>
-            </a:r>
-          </a:p>
-          <a:p>
-            <a:pPr algn="l">
-              <a:lnSpc>
-                <a:spcPct val="138000"/>
-              </a:lnSpc>
-            </a:pPr>
-            <a:r>
-              <a:rPr sz="2700" b="1">
-                <a:solidFill>
-                  <a:srgbClr val="0D2B5E"/>
-                </a:solidFill>
-                <a:latin typeface="Pretendard"/>
-                <a:ea typeface="Pretendard"/>
-                <a:cs typeface="Pretendard"/>
-              </a:rPr>
-              <a:t>= LAG 증가</a:t>
-            </a:r>
-          </a:p>
-        </p:txBody>
-      </p:sp>
-      <p:sp>
-        <p:nvSpPr>
-          <p:cNvPr id="26" name="Rectangle 25"/>
+              <a:t>VS</a:t>
+            </a:r>
+          </a:p>
+        </p:txBody>
+      </p:sp>
+      <p:sp>
+        <p:nvSpPr>
+          <p:cNvPr id="32" name="Rectangle 31"/>
           <p:cNvSpPr/>
           <p:nvPr/>
         </p:nvSpPr>
@@ -12697,7 +13741,7 @@
       </p:sp>
       <p:sp>
         <p:nvSpPr>
-          <p:cNvPr id="27" name="TextBox 26"/>
+          <p:cNvPr id="33" name="TextBox 32"/>
           <p:cNvSpPr txBox="1"/>
           <p:nvPr/>
         </p:nvSpPr>
@@ -12738,7 +13782,7 @@
       </p:sp>
       <p:sp>
         <p:nvSpPr>
-          <p:cNvPr id="28" name="TextBox 27"/>
+          <p:cNvPr id="34" name="TextBox 33"/>
           <p:cNvSpPr txBox="1"/>
           <p:nvPr/>
         </p:nvSpPr>
@@ -12797,7 +13841,7 @@
       <p:grpSpPr/>
       <p:sp>
         <p:nvSpPr>
-          <p:cNvPr id="2" name="Oval 1"/>
+          <p:cNvPr id="2" name="deckgen:decor"/>
           <p:cNvSpPr/>
           <p:nvPr/>
         </p:nvSpPr>
@@ -12827,7 +13871,7 @@
       </p:sp>
       <p:sp>
         <p:nvSpPr>
-          <p:cNvPr id="3" name="Oval 2"/>
+          <p:cNvPr id="3" name="deckgen:decor"/>
           <p:cNvSpPr/>
           <p:nvPr/>
         </p:nvSpPr>
@@ -12857,7 +13901,7 @@
       </p:sp>
       <p:sp>
         <p:nvSpPr>
-          <p:cNvPr id="4" name="Oval 3"/>
+          <p:cNvPr id="4" name="deckgen:decor"/>
           <p:cNvSpPr/>
           <p:nvPr/>
         </p:nvSpPr>
@@ -12921,7 +13965,7 @@
                 <a:ea typeface="Pretendard"/>
                 <a:cs typeface="Pretendard"/>
               </a:rPr>
-              <a:t>6·7단계 — 일부러 죽이기</a:t>
+              <a:t>5단계 — 일부러 끄기</a:t>
             </a:r>
           </a:p>
         </p:txBody>
@@ -12962,7 +14006,7 @@
                 <a:ea typeface="Pretendard"/>
                 <a:cs typeface="Pretendard"/>
               </a:rPr>
-              <a:t>컨슈머를 둘 붙였다가 하나를 끈다 — 분배와 리밸런싱</a:t>
+              <a:t>LAG 을 읽고, 컨슈머를 꺼서 쌓이게 한다</a:t>
             </a:r>
           </a:p>
         </p:txBody>
@@ -12999,59 +14043,18 @@
       </p:sp>
       <p:sp>
         <p:nvSpPr>
-          <p:cNvPr id="8" name="TextBox 7"/>
-          <p:cNvSpPr txBox="1"/>
-          <p:nvPr/>
-        </p:nvSpPr>
-        <p:spPr>
-          <a:xfrm>
-            <a:off x="1143000" y="3067050"/>
-            <a:ext cx="16002000" cy="438150"/>
-          </a:xfrm>
-          <a:prstGeom prst="rect">
-            <a:avLst/>
-          </a:prstGeom>
-          <a:noFill/>
-        </p:spPr>
-        <p:txBody>
-          <a:bodyPr wrap="square" lIns="0" rIns="0" tIns="0" bIns="0" anchor="t">
-            <a:spAutoFit/>
-          </a:bodyPr>
-          <a:lstStyle/>
-          <a:p>
-            <a:pPr algn="l">
-              <a:lnSpc>
-                <a:spcPct val="130000"/>
-              </a:lnSpc>
-            </a:pPr>
-            <a:r>
-              <a:rPr sz="2550" b="1">
-                <a:solidFill>
-                  <a:srgbClr val="3D3D3D"/>
-                </a:solidFill>
-                <a:latin typeface="Pretendard"/>
-                <a:ea typeface="Pretendard"/>
-                <a:cs typeface="Pretendard"/>
-              </a:rPr>
-              <a:t>이론의 「파티션을 나눠 갖는다」와 「컨슈머가 죽어도 처리가 멈추지 않는다」를 직접 겪어 봅니다</a:t>
-            </a:r>
-          </a:p>
-        </p:txBody>
-      </p:sp>
-      <p:sp>
-        <p:nvSpPr>
-          <p:cNvPr id="9" name="Rounded Rectangle 8"/>
-          <p:cNvSpPr/>
-          <p:nvPr/>
-        </p:nvSpPr>
-        <p:spPr>
-          <a:xfrm>
-            <a:off x="1143000" y="3924300"/>
-            <a:ext cx="2895600" cy="3143250"/>
+          <p:cNvPr id="8" name="Rounded Rectangle 7"/>
+          <p:cNvSpPr/>
+          <p:nvPr/>
+        </p:nvSpPr>
+        <p:spPr>
+          <a:xfrm>
+            <a:off x="1143000" y="2933700"/>
+            <a:ext cx="11430000" cy="1095375"/>
           </a:xfrm>
           <a:prstGeom prst="roundRect">
             <a:avLst>
-              <a:gd name="adj" fmla="val 1644"/>
+              <a:gd name="adj" fmla="val 4347"/>
             </a:avLst>
           </a:prstGeom>
           <a:solidFill>
@@ -13074,16 +14077,16 @@
       </p:sp>
       <p:sp>
         <p:nvSpPr>
-          <p:cNvPr id="10" name="Rectangle 9"/>
-          <p:cNvSpPr/>
-          <p:nvPr/>
-        </p:nvSpPr>
-        <p:spPr>
-          <a:xfrm>
-            <a:off x="1143000" y="3924300"/>
-            <a:ext cx="2895600" cy="914400"/>
-          </a:xfrm>
-          <a:prstGeom prst="rect">
+          <p:cNvPr id="9" name="Oval 8"/>
+          <p:cNvSpPr/>
+          <p:nvPr/>
+        </p:nvSpPr>
+        <p:spPr>
+          <a:xfrm>
+            <a:off x="1447800" y="3181350"/>
+            <a:ext cx="590550" cy="590550"/>
+          </a:xfrm>
+          <a:prstGeom prst="ellipse">
             <a:avLst/>
           </a:prstGeom>
           <a:solidFill>
@@ -13104,14 +14107,55 @@
       </p:sp>
       <p:sp>
         <p:nvSpPr>
+          <p:cNvPr id="10" name="TextBox 9"/>
+          <p:cNvSpPr txBox="1"/>
+          <p:nvPr/>
+        </p:nvSpPr>
+        <p:spPr>
+          <a:xfrm>
+            <a:off x="1447800" y="3333750"/>
+            <a:ext cx="590550" cy="323850"/>
+          </a:xfrm>
+          <a:prstGeom prst="rect">
+            <a:avLst/>
+          </a:prstGeom>
+          <a:noFill/>
+        </p:spPr>
+        <p:txBody>
+          <a:bodyPr wrap="square" lIns="0" rIns="0" tIns="0" bIns="0" anchor="t">
+            <a:spAutoFit/>
+          </a:bodyPr>
+          <a:lstStyle/>
+          <a:p>
+            <a:pPr algn="ctr">
+              <a:lnSpc>
+                <a:spcPct val="100000"/>
+              </a:lnSpc>
+            </a:pPr>
+            <a:r>
+              <a:rPr sz="2250" b="1">
+                <a:solidFill>
+                  <a:srgbClr val="FFFFFF"/>
+                </a:solidFill>
+                <a:latin typeface="Pretendard"/>
+                <a:ea typeface="Pretendard"/>
+                <a:cs typeface="Pretendard"/>
+              </a:rPr>
+              <a:t>1</a:t>
+            </a:r>
+          </a:p>
+        </p:txBody>
+      </p:sp>
+      <p:sp>
+        <p:nvSpPr>
           <p:cNvPr id="11" name="TextBox 10"/>
           <p:cNvSpPr txBox="1"/>
           <p:nvPr/>
         </p:nvSpPr>
         <p:spPr>
           <a:xfrm>
-            <a:off x="1143000" y="4171950"/>
-            <a:ext cx="2895600" cy="419100"/>
+            <a:off x="2324100" y="3143250"/>
+            <a:ext cx="9906000" cy="400050"/>
           </a:xfrm>
           <a:prstGeom prst="rect">
             <a:avLst/>
@@ -13124,21 +14168,21 @@
           </a:bodyPr>
           <a:lstStyle/>
           <a:p>
-            <a:pPr algn="ctr">
-              <a:lnSpc>
-                <a:spcPct val="100000"/>
+            <a:pPr algn="l">
+              <a:lnSpc>
+                <a:spcPct val="110000"/>
               </a:lnSpc>
             </a:pPr>
             <a:r>
               <a:rPr sz="2475" b="1">
                 <a:solidFill>
-                  <a:srgbClr val="FFFFFF"/>
-                </a:solidFill>
-                <a:latin typeface="Pretendard"/>
-                <a:ea typeface="Pretendard"/>
-                <a:cs typeface="Pretendard"/>
-              </a:rPr>
-              <a:t>터미널 4 추가</a:t>
+                  <a:srgbClr val="0D2B5E"/>
+                </a:solidFill>
+                <a:latin typeface="Pretendard"/>
+                <a:ea typeface="Pretendard"/>
+                <a:cs typeface="Pretendard"/>
+              </a:rPr>
+              <a:t>kafka-consumer-groups.sh --describe --group order-app</a:t>
             </a:r>
           </a:p>
         </p:txBody>
@@ -13151,8 +14195,8 @@
         </p:nvSpPr>
         <p:spPr>
           <a:xfrm>
-            <a:off x="1352550" y="5143500"/>
-            <a:ext cx="2476500" cy="1524000"/>
+            <a:off x="2324100" y="3543300"/>
+            <a:ext cx="9906000" cy="361950"/>
           </a:xfrm>
           <a:prstGeom prst="rect">
             <a:avLst/>
@@ -13165,13 +14209,13 @@
           </a:bodyPr>
           <a:lstStyle/>
           <a:p>
-            <a:pPr algn="ctr">
-              <a:lnSpc>
-                <a:spcPct val="146000"/>
-              </a:lnSpc>
-            </a:pPr>
-            <a:r>
-              <a:rPr sz="2100" b="0">
+            <a:pPr algn="l">
+              <a:lnSpc>
+                <a:spcPct val="120000"/>
+              </a:lnSpc>
+            </a:pPr>
+            <a:r>
+              <a:rPr sz="2025" b="0">
                 <a:solidFill>
                   <a:srgbClr val="3D3D3D"/>
                 </a:solidFill>
@@ -13179,25 +14223,7 @@
                 <a:ea typeface="Pretendard"/>
                 <a:cs typeface="Pretendard"/>
               </a:rPr>
-              <a:t>같은 그룹</a:t>
-            </a:r>
-          </a:p>
-          <a:p>
-            <a:pPr algn="ctr">
-              <a:lnSpc>
-                <a:spcPct val="146000"/>
-              </a:lnSpc>
-            </a:pPr>
-            <a:r>
-              <a:rPr sz="2100" b="0">
-                <a:solidFill>
-                  <a:srgbClr val="3D3D3D"/>
-                </a:solidFill>
-                <a:latin typeface="Pretendard"/>
-                <a:ea typeface="Pretendard"/>
-                <a:cs typeface="Pretendard"/>
-              </a:rPr>
-              <a:t>order-app</a:t>
+              <a:t>파티션별 CURRENT-OFFSET / LOG-END-OFFSET / LAG — 다 읽었으면 LAG 0</a:t>
             </a:r>
           </a:p>
         </p:txBody>
@@ -13210,12 +14236,12 @@
         </p:nvSpPr>
         <p:spPr>
           <a:xfrm>
-            <a:off x="4419600" y="3924300"/>
-            <a:ext cx="2895600" cy="3143250"/>
+            <a:off x="1143000" y="4200525"/>
+            <a:ext cx="11430000" cy="1095375"/>
           </a:xfrm>
           <a:prstGeom prst="roundRect">
             <a:avLst>
-              <a:gd name="adj" fmla="val 1644"/>
+              <a:gd name="adj" fmla="val 4347"/>
             </a:avLst>
           </a:prstGeom>
           <a:solidFill>
@@ -13238,20 +14264,20 @@
       </p:sp>
       <p:sp>
         <p:nvSpPr>
-          <p:cNvPr id="14" name="Rectangle 13"/>
-          <p:cNvSpPr/>
-          <p:nvPr/>
-        </p:nvSpPr>
-        <p:spPr>
-          <a:xfrm>
-            <a:off x="4419600" y="3924300"/>
-            <a:ext cx="2895600" cy="914400"/>
-          </a:xfrm>
-          <a:prstGeom prst="rect">
-            <a:avLst/>
-          </a:prstGeom>
-          <a:solidFill>
-            <a:srgbClr val="1E5BC6"/>
+          <p:cNvPr id="14" name="Oval 13"/>
+          <p:cNvSpPr/>
+          <p:nvPr/>
+        </p:nvSpPr>
+        <p:spPr>
+          <a:xfrm>
+            <a:off x="1447800" y="4448175"/>
+            <a:ext cx="590550" cy="590550"/>
+          </a:xfrm>
+          <a:prstGeom prst="ellipse">
+            <a:avLst/>
+          </a:prstGeom>
+          <a:solidFill>
+            <a:srgbClr val="0D2B5E"/>
           </a:solidFill>
           <a:ln>
             <a:noFill/>
@@ -13274,8 +14300,8 @@
         </p:nvSpPr>
         <p:spPr>
           <a:xfrm>
-            <a:off x="4419600" y="4171950"/>
-            <a:ext cx="2895600" cy="419100"/>
+            <a:off x="1447800" y="4600575"/>
+            <a:ext cx="590550" cy="323850"/>
           </a:xfrm>
           <a:prstGeom prst="rect">
             <a:avLst/>
@@ -13294,29 +14320,70 @@
               </a:lnSpc>
             </a:pPr>
             <a:r>
+              <a:rPr sz="2250" b="1">
+                <a:solidFill>
+                  <a:srgbClr val="FFFFFF"/>
+                </a:solidFill>
+                <a:latin typeface="Pretendard"/>
+                <a:ea typeface="Pretendard"/>
+                <a:cs typeface="Pretendard"/>
+              </a:rPr>
+              <a:t>2</a:t>
+            </a:r>
+          </a:p>
+        </p:txBody>
+      </p:sp>
+      <p:sp>
+        <p:nvSpPr>
+          <p:cNvPr id="16" name="TextBox 15"/>
+          <p:cNvSpPr txBox="1"/>
+          <p:nvPr/>
+        </p:nvSpPr>
+        <p:spPr>
+          <a:xfrm>
+            <a:off x="2324100" y="4410075"/>
+            <a:ext cx="9906000" cy="400050"/>
+          </a:xfrm>
+          <a:prstGeom prst="rect">
+            <a:avLst/>
+          </a:prstGeom>
+          <a:noFill/>
+        </p:spPr>
+        <p:txBody>
+          <a:bodyPr wrap="square" lIns="0" rIns="0" tIns="0" bIns="0" anchor="t">
+            <a:spAutoFit/>
+          </a:bodyPr>
+          <a:lstStyle/>
+          <a:p>
+            <a:pPr algn="l">
+              <a:lnSpc>
+                <a:spcPct val="110000"/>
+              </a:lnSpc>
+            </a:pPr>
+            <a:r>
               <a:rPr sz="2475" b="1">
                 <a:solidFill>
-                  <a:srgbClr val="FFFFFF"/>
-                </a:solidFill>
-                <a:latin typeface="Pretendard"/>
-                <a:ea typeface="Pretendard"/>
-                <a:cs typeface="Pretendard"/>
-              </a:rPr>
-              <a:t>describe</a:t>
-            </a:r>
-          </a:p>
-        </p:txBody>
-      </p:sp>
-      <p:sp>
-        <p:nvSpPr>
-          <p:cNvPr id="16" name="TextBox 15"/>
-          <p:cNvSpPr txBox="1"/>
-          <p:nvPr/>
-        </p:nvSpPr>
-        <p:spPr>
-          <a:xfrm>
-            <a:off x="4629150" y="5143500"/>
-            <a:ext cx="2476500" cy="1524000"/>
+                  <a:srgbClr val="0D2B5E"/>
+                </a:solidFill>
+                <a:latin typeface="Pretendard"/>
+                <a:ea typeface="Pretendard"/>
+                <a:cs typeface="Pretendard"/>
+              </a:rPr>
+              <a:t>터미널 1 컨슈머를 Ctrl+C 로 끈다</a:t>
+            </a:r>
+          </a:p>
+        </p:txBody>
+      </p:sp>
+      <p:sp>
+        <p:nvSpPr>
+          <p:cNvPr id="17" name="TextBox 16"/>
+          <p:cNvSpPr txBox="1"/>
+          <p:nvPr/>
+        </p:nvSpPr>
+        <p:spPr>
+          <a:xfrm>
+            <a:off x="2324100" y="4810125"/>
+            <a:ext cx="9906000" cy="361950"/>
           </a:xfrm>
           <a:prstGeom prst="rect">
             <a:avLst/>
@@ -13329,13 +14396,13 @@
           </a:bodyPr>
           <a:lstStyle/>
           <a:p>
-            <a:pPr algn="ctr">
-              <a:lnSpc>
-                <a:spcPct val="146000"/>
-              </a:lnSpc>
-            </a:pPr>
-            <a:r>
-              <a:rPr sz="2100" b="0">
+            <a:pPr algn="l">
+              <a:lnSpc>
+                <a:spcPct val="120000"/>
+              </a:lnSpc>
+            </a:pPr>
+            <a:r>
+              <a:rPr sz="2025" b="0">
                 <a:solidFill>
                   <a:srgbClr val="3D3D3D"/>
                 </a:solidFill>
@@ -13343,43 +14410,25 @@
                 <a:ea typeface="Pretendard"/>
                 <a:cs typeface="Pretendard"/>
               </a:rPr>
-              <a:t>CONSUMER-ID</a:t>
-            </a:r>
-          </a:p>
-          <a:p>
-            <a:pPr algn="ctr">
-              <a:lnSpc>
-                <a:spcPct val="146000"/>
-              </a:lnSpc>
-            </a:pPr>
-            <a:r>
-              <a:rPr sz="2100" b="0">
-                <a:solidFill>
-                  <a:srgbClr val="3D3D3D"/>
-                </a:solidFill>
-                <a:latin typeface="Pretendard"/>
-                <a:ea typeface="Pretendard"/>
-                <a:cs typeface="Pretendard"/>
-              </a:rPr>
-              <a:t>두 종류 · 2:1</a:t>
-            </a:r>
-          </a:p>
-        </p:txBody>
-      </p:sp>
-      <p:sp>
-        <p:nvSpPr>
-          <p:cNvPr id="17" name="Rounded Rectangle 16"/>
-          <p:cNvSpPr/>
-          <p:nvPr/>
-        </p:nvSpPr>
-        <p:spPr>
-          <a:xfrm>
-            <a:off x="7696200" y="3924300"/>
-            <a:ext cx="2895600" cy="3143250"/>
+              <a:t>터미널 2 에서 메시지를 몇 개 더 보내고 다시 describe</a:t>
+            </a:r>
+          </a:p>
+        </p:txBody>
+      </p:sp>
+      <p:sp>
+        <p:nvSpPr>
+          <p:cNvPr id="18" name="Rounded Rectangle 17"/>
+          <p:cNvSpPr/>
+          <p:nvPr/>
+        </p:nvSpPr>
+        <p:spPr>
+          <a:xfrm>
+            <a:off x="1143000" y="5467350"/>
+            <a:ext cx="11430000" cy="1095375"/>
           </a:xfrm>
           <a:prstGeom prst="roundRect">
             <a:avLst>
-              <a:gd name="adj" fmla="val 1644"/>
+              <a:gd name="adj" fmla="val 4347"/>
             </a:avLst>
           </a:prstGeom>
           <a:solidFill>
@@ -13402,16 +14451,16 @@
       </p:sp>
       <p:sp>
         <p:nvSpPr>
-          <p:cNvPr id="18" name="Rectangle 17"/>
-          <p:cNvSpPr/>
-          <p:nvPr/>
-        </p:nvSpPr>
-        <p:spPr>
-          <a:xfrm>
-            <a:off x="7696200" y="3924300"/>
-            <a:ext cx="2895600" cy="914400"/>
-          </a:xfrm>
-          <a:prstGeom prst="rect">
+          <p:cNvPr id="19" name="Oval 18"/>
+          <p:cNvSpPr/>
+          <p:nvPr/>
+        </p:nvSpPr>
+        <p:spPr>
+          <a:xfrm>
+            <a:off x="1447800" y="5715000"/>
+            <a:ext cx="590550" cy="590550"/>
+          </a:xfrm>
+          <a:prstGeom prst="ellipse">
             <a:avLst/>
           </a:prstGeom>
           <a:solidFill>
@@ -13432,14 +14481,14 @@
       </p:sp>
       <p:sp>
         <p:nvSpPr>
-          <p:cNvPr id="19" name="TextBox 18"/>
-          <p:cNvSpPr txBox="1"/>
-          <p:nvPr/>
-        </p:nvSpPr>
-        <p:spPr>
-          <a:xfrm>
-            <a:off x="7696200" y="4171950"/>
-            <a:ext cx="2895600" cy="419100"/>
+          <p:cNvPr id="20" name="TextBox 19"/>
+          <p:cNvSpPr txBox="1"/>
+          <p:nvPr/>
+        </p:nvSpPr>
+        <p:spPr>
+          <a:xfrm>
+            <a:off x="1447800" y="5867400"/>
+            <a:ext cx="590550" cy="323850"/>
           </a:xfrm>
           <a:prstGeom prst="rect">
             <a:avLst/>
@@ -13458,29 +14507,70 @@
               </a:lnSpc>
             </a:pPr>
             <a:r>
+              <a:rPr sz="2250" b="1">
+                <a:solidFill>
+                  <a:srgbClr val="FFFFFF"/>
+                </a:solidFill>
+                <a:latin typeface="Pretendard"/>
+                <a:ea typeface="Pretendard"/>
+                <a:cs typeface="Pretendard"/>
+              </a:rPr>
+              <a:t>3</a:t>
+            </a:r>
+          </a:p>
+        </p:txBody>
+      </p:sp>
+      <p:sp>
+        <p:nvSpPr>
+          <p:cNvPr id="21" name="TextBox 20"/>
+          <p:cNvSpPr txBox="1"/>
+          <p:nvPr/>
+        </p:nvSpPr>
+        <p:spPr>
+          <a:xfrm>
+            <a:off x="2324100" y="5676900"/>
+            <a:ext cx="9906000" cy="400050"/>
+          </a:xfrm>
+          <a:prstGeom prst="rect">
+            <a:avLst/>
+          </a:prstGeom>
+          <a:noFill/>
+        </p:spPr>
+        <p:txBody>
+          <a:bodyPr wrap="square" lIns="0" rIns="0" tIns="0" bIns="0" anchor="t">
+            <a:spAutoFit/>
+          </a:bodyPr>
+          <a:lstStyle/>
+          <a:p>
+            <a:pPr algn="l">
+              <a:lnSpc>
+                <a:spcPct val="110000"/>
+              </a:lnSpc>
+            </a:pPr>
+            <a:r>
               <a:rPr sz="2475" b="1">
                 <a:solidFill>
-                  <a:srgbClr val="FFFFFF"/>
-                </a:solidFill>
-                <a:latin typeface="Pretendard"/>
-                <a:ea typeface="Pretendard"/>
-                <a:cs typeface="Pretendard"/>
-              </a:rPr>
-              <a:t>메시지 전송</a:t>
-            </a:r>
-          </a:p>
-        </p:txBody>
-      </p:sp>
-      <p:sp>
-        <p:nvSpPr>
-          <p:cNvPr id="20" name="TextBox 19"/>
-          <p:cNvSpPr txBox="1"/>
-          <p:nvPr/>
-        </p:nvSpPr>
-        <p:spPr>
-          <a:xfrm>
-            <a:off x="7905750" y="5143500"/>
-            <a:ext cx="2476500" cy="1524000"/>
+                  <a:srgbClr val="0D2B5E"/>
+                </a:solidFill>
+                <a:latin typeface="Pretendard"/>
+                <a:ea typeface="Pretendard"/>
+                <a:cs typeface="Pretendard"/>
+              </a:rPr>
+              <a:t>LAG 이 0 보다 커진다</a:t>
+            </a:r>
+          </a:p>
+        </p:txBody>
+      </p:sp>
+      <p:sp>
+        <p:nvSpPr>
+          <p:cNvPr id="22" name="TextBox 21"/>
+          <p:cNvSpPr txBox="1"/>
+          <p:nvPr/>
+        </p:nvSpPr>
+        <p:spPr>
+          <a:xfrm>
+            <a:off x="2324100" y="6076950"/>
+            <a:ext cx="9906000" cy="361950"/>
           </a:xfrm>
           <a:prstGeom prst="rect">
             <a:avLst/>
@@ -13493,13 +14583,13 @@
           </a:bodyPr>
           <a:lstStyle/>
           <a:p>
-            <a:pPr algn="ctr">
-              <a:lnSpc>
-                <a:spcPct val="146000"/>
-              </a:lnSpc>
-            </a:pPr>
-            <a:r>
-              <a:rPr sz="2100" b="0">
+            <a:pPr algn="l">
+              <a:lnSpc>
+                <a:spcPct val="120000"/>
+              </a:lnSpc>
+            </a:pPr>
+            <a:r>
+              <a:rPr sz="2025" b="0">
                 <a:solidFill>
                   <a:srgbClr val="3D3D3D"/>
                 </a:solidFill>
@@ -13507,51 +14597,33 @@
                 <a:ea typeface="Pretendard"/>
                 <a:cs typeface="Pretendard"/>
               </a:rPr>
-              <a:t>맡은 파티션</a:t>
-            </a:r>
-          </a:p>
-          <a:p>
-            <a:pPr algn="ctr">
-              <a:lnSpc>
-                <a:spcPct val="146000"/>
-              </a:lnSpc>
-            </a:pPr>
-            <a:r>
-              <a:rPr sz="2100" b="0">
-                <a:solidFill>
-                  <a:srgbClr val="3D3D3D"/>
-                </a:solidFill>
-                <a:latin typeface="Pretendard"/>
-                <a:ea typeface="Pretendard"/>
-                <a:cs typeface="Pretendard"/>
-              </a:rPr>
-              <a:t>것만 받는다</a:t>
-            </a:r>
-          </a:p>
-        </p:txBody>
-      </p:sp>
-      <p:sp>
-        <p:nvSpPr>
-          <p:cNvPr id="21" name="Rounded Rectangle 20"/>
-          <p:cNvSpPr/>
-          <p:nvPr/>
-        </p:nvSpPr>
-        <p:spPr>
-          <a:xfrm>
-            <a:off x="10972800" y="3924300"/>
-            <a:ext cx="2895600" cy="3143250"/>
+              <a:t>실측 세 건 더 보내니 0번 LAG 1 · 2번 LAG 2 — 다시 켜면 0</a:t>
+            </a:r>
+          </a:p>
+        </p:txBody>
+      </p:sp>
+      <p:sp>
+        <p:nvSpPr>
+          <p:cNvPr id="23" name="Rounded Rectangle 22"/>
+          <p:cNvSpPr/>
+          <p:nvPr/>
+        </p:nvSpPr>
+        <p:spPr>
+          <a:xfrm>
+            <a:off x="13144500" y="2933700"/>
+            <a:ext cx="4000500" cy="3629025"/>
           </a:xfrm>
           <a:prstGeom prst="roundRect">
             <a:avLst>
-              <a:gd name="adj" fmla="val 1644"/>
+              <a:gd name="adj" fmla="val 1312"/>
             </a:avLst>
           </a:prstGeom>
           <a:solidFill>
-            <a:srgbClr val="FAFBFD"/>
+            <a:srgbClr val="EDF3FD"/>
           </a:solidFill>
           <a:ln w="9525">
             <a:solidFill>
-              <a:srgbClr val="DCE1E8"/>
+              <a:srgbClr val="BFD3F5"/>
             </a:solidFill>
           </a:ln>
           <a:effectLst/>
@@ -13566,20 +14638,120 @@
       </p:sp>
       <p:sp>
         <p:nvSpPr>
-          <p:cNvPr id="22" name="Rectangle 21"/>
-          <p:cNvSpPr/>
-          <p:nvPr/>
-        </p:nvSpPr>
-        <p:spPr>
-          <a:xfrm>
-            <a:off x="10972800" y="3924300"/>
-            <a:ext cx="2895600" cy="914400"/>
-          </a:xfrm>
-          <a:prstGeom prst="rect">
-            <a:avLst/>
-          </a:prstGeom>
-          <a:solidFill>
-            <a:srgbClr val="1E5BC6"/>
+          <p:cNvPr id="24" name="TextBox 23"/>
+          <p:cNvSpPr txBox="1"/>
+          <p:nvPr/>
+        </p:nvSpPr>
+        <p:spPr>
+          <a:xfrm>
+            <a:off x="13487400" y="3929062"/>
+            <a:ext cx="3314700" cy="304800"/>
+          </a:xfrm>
+          <a:prstGeom prst="rect">
+            <a:avLst/>
+          </a:prstGeom>
+          <a:noFill/>
+        </p:spPr>
+        <p:txBody>
+          <a:bodyPr wrap="square" lIns="0" rIns="0" tIns="0" bIns="0" anchor="t">
+            <a:spAutoFit/>
+          </a:bodyPr>
+          <a:lstStyle/>
+          <a:p>
+            <a:pPr algn="l">
+              <a:lnSpc>
+                <a:spcPct val="100000"/>
+              </a:lnSpc>
+            </a:pPr>
+            <a:r>
+              <a:rPr sz="1800" b="1" spc="190">
+                <a:solidFill>
+                  <a:srgbClr val="1E5BC6"/>
+                </a:solidFill>
+                <a:latin typeface="Pretendard"/>
+                <a:ea typeface="Pretendard"/>
+                <a:cs typeface="Pretendard"/>
+              </a:rPr>
+              <a:t>운영에서 LAG 을 감시하는 이유</a:t>
+            </a:r>
+          </a:p>
+        </p:txBody>
+      </p:sp>
+      <p:sp>
+        <p:nvSpPr>
+          <p:cNvPr id="25" name="TextBox 24"/>
+          <p:cNvSpPr txBox="1"/>
+          <p:nvPr/>
+        </p:nvSpPr>
+        <p:spPr>
+          <a:xfrm>
+            <a:off x="13487400" y="4329112"/>
+            <a:ext cx="3314700" cy="1238250"/>
+          </a:xfrm>
+          <a:prstGeom prst="rect">
+            <a:avLst/>
+          </a:prstGeom>
+          <a:noFill/>
+        </p:spPr>
+        <p:txBody>
+          <a:bodyPr wrap="square" lIns="0" rIns="0" tIns="0" bIns="0" anchor="t">
+            <a:spAutoFit/>
+          </a:bodyPr>
+          <a:lstStyle/>
+          <a:p>
+            <a:pPr algn="l">
+              <a:lnSpc>
+                <a:spcPct val="138000"/>
+              </a:lnSpc>
+            </a:pPr>
+            <a:r>
+              <a:rPr sz="2700" b="1">
+                <a:solidFill>
+                  <a:srgbClr val="0D2B5E"/>
+                </a:solidFill>
+                <a:latin typeface="Pretendard"/>
+                <a:ea typeface="Pretendard"/>
+                <a:cs typeface="Pretendard"/>
+              </a:rPr>
+              <a:t>읽는 쪽 멈춤</a:t>
+            </a:r>
+          </a:p>
+          <a:p>
+            <a:pPr algn="l">
+              <a:lnSpc>
+                <a:spcPct val="138000"/>
+              </a:lnSpc>
+            </a:pPr>
+            <a:r>
+              <a:rPr sz="2700" b="1">
+                <a:solidFill>
+                  <a:srgbClr val="0D2B5E"/>
+                </a:solidFill>
+                <a:latin typeface="Pretendard"/>
+                <a:ea typeface="Pretendard"/>
+                <a:cs typeface="Pretendard"/>
+              </a:rPr>
+              <a:t>= LAG 증가</a:t>
+            </a:r>
+          </a:p>
+        </p:txBody>
+      </p:sp>
+      <p:sp>
+        <p:nvSpPr>
+          <p:cNvPr id="26" name="Rectangle 25"/>
+          <p:cNvSpPr/>
+          <p:nvPr/>
+        </p:nvSpPr>
+        <p:spPr>
+          <a:xfrm>
+            <a:off x="1143000" y="8058150"/>
+            <a:ext cx="16002000" cy="9525"/>
+          </a:xfrm>
+          <a:prstGeom prst="rect">
+            <a:avLst/>
+          </a:prstGeom>
+          <a:solidFill>
+            <a:srgbClr val="DCE1E8"/>
           </a:solidFill>
           <a:ln>
             <a:noFill/>
@@ -13596,301 +14768,7 @@
       </p:sp>
       <p:sp>
         <p:nvSpPr>
-          <p:cNvPr id="23" name="TextBox 22"/>
-          <p:cNvSpPr txBox="1"/>
-          <p:nvPr/>
-        </p:nvSpPr>
-        <p:spPr>
-          <a:xfrm>
-            <a:off x="10972800" y="4171950"/>
-            <a:ext cx="2895600" cy="419100"/>
-          </a:xfrm>
-          <a:prstGeom prst="rect">
-            <a:avLst/>
-          </a:prstGeom>
-          <a:noFill/>
-        </p:spPr>
-        <p:txBody>
-          <a:bodyPr wrap="square" lIns="0" rIns="0" tIns="0" bIns="0" anchor="t">
-            <a:spAutoFit/>
-          </a:bodyPr>
-          <a:lstStyle/>
-          <a:p>
-            <a:pPr algn="ctr">
-              <a:lnSpc>
-                <a:spcPct val="100000"/>
-              </a:lnSpc>
-            </a:pPr>
-            <a:r>
-              <a:rPr sz="2475" b="1">
-                <a:solidFill>
-                  <a:srgbClr val="FFFFFF"/>
-                </a:solidFill>
-                <a:latin typeface="Pretendard"/>
-                <a:ea typeface="Pretendard"/>
-                <a:cs typeface="Pretendard"/>
-              </a:rPr>
-              <a:t>하나를 Ctrl+C</a:t>
-            </a:r>
-          </a:p>
-        </p:txBody>
-      </p:sp>
-      <p:sp>
-        <p:nvSpPr>
-          <p:cNvPr id="24" name="TextBox 23"/>
-          <p:cNvSpPr txBox="1"/>
-          <p:nvPr/>
-        </p:nvSpPr>
-        <p:spPr>
-          <a:xfrm>
-            <a:off x="11182350" y="5143500"/>
-            <a:ext cx="2476500" cy="1524000"/>
-          </a:xfrm>
-          <a:prstGeom prst="rect">
-            <a:avLst/>
-          </a:prstGeom>
-          <a:noFill/>
-        </p:spPr>
-        <p:txBody>
-          <a:bodyPr wrap="square" lIns="0" rIns="0" tIns="0" bIns="0" anchor="t">
-            <a:spAutoFit/>
-          </a:bodyPr>
-          <a:lstStyle/>
-          <a:p>
-            <a:pPr algn="ctr">
-              <a:lnSpc>
-                <a:spcPct val="146000"/>
-              </a:lnSpc>
-            </a:pPr>
-            <a:r>
-              <a:rPr sz="2100" b="0">
-                <a:solidFill>
-                  <a:srgbClr val="3D3D3D"/>
-                </a:solidFill>
-                <a:latin typeface="Pretendard"/>
-                <a:ea typeface="Pretendard"/>
-                <a:cs typeface="Pretendard"/>
-              </a:rPr>
-              <a:t>몇 초 뒤</a:t>
-            </a:r>
-          </a:p>
-          <a:p>
-            <a:pPr algn="ctr">
-              <a:lnSpc>
-                <a:spcPct val="146000"/>
-              </a:lnSpc>
-            </a:pPr>
-            <a:r>
-              <a:rPr sz="2100" b="0">
-                <a:solidFill>
-                  <a:srgbClr val="3D3D3D"/>
-                </a:solidFill>
-                <a:latin typeface="Pretendard"/>
-                <a:ea typeface="Pretendard"/>
-                <a:cs typeface="Pretendard"/>
-              </a:rPr>
-              <a:t>다시 describe</a:t>
-            </a:r>
-          </a:p>
-        </p:txBody>
-      </p:sp>
-      <p:sp>
-        <p:nvSpPr>
-          <p:cNvPr id="25" name="Rounded Rectangle 24"/>
-          <p:cNvSpPr/>
-          <p:nvPr/>
-        </p:nvSpPr>
-        <p:spPr>
-          <a:xfrm>
-            <a:off x="14249400" y="3924300"/>
-            <a:ext cx="2895600" cy="3143250"/>
-          </a:xfrm>
-          <a:prstGeom prst="roundRect">
-            <a:avLst>
-              <a:gd name="adj" fmla="val 1644"/>
-            </a:avLst>
-          </a:prstGeom>
-          <a:solidFill>
-            <a:srgbClr val="FAFBFD"/>
-          </a:solidFill>
-          <a:ln w="9525">
-            <a:solidFill>
-              <a:srgbClr val="DCE1E8"/>
-            </a:solidFill>
-          </a:ln>
-          <a:effectLst/>
-        </p:spPr>
-        <p:txBody>
-          <a:bodyPr rtlCol="0" anchor="ctr" wrap="square"/>
-          <a:lstStyle/>
-          <a:p>
-            <a:pPr algn="ctr"/>
-          </a:p>
-        </p:txBody>
-      </p:sp>
-      <p:sp>
-        <p:nvSpPr>
-          <p:cNvPr id="26" name="Rectangle 25"/>
-          <p:cNvSpPr/>
-          <p:nvPr/>
-        </p:nvSpPr>
-        <p:spPr>
-          <a:xfrm>
-            <a:off x="14249400" y="3924300"/>
-            <a:ext cx="2895600" cy="914400"/>
-          </a:xfrm>
-          <a:prstGeom prst="rect">
-            <a:avLst/>
-          </a:prstGeom>
-          <a:solidFill>
-            <a:srgbClr val="0D2B5E"/>
-          </a:solidFill>
-          <a:ln>
-            <a:noFill/>
-          </a:ln>
-          <a:effectLst/>
-        </p:spPr>
-        <p:txBody>
-          <a:bodyPr rtlCol="0" anchor="ctr" wrap="square"/>
-          <a:lstStyle/>
-          <a:p>
-            <a:pPr algn="ctr"/>
-          </a:p>
-        </p:txBody>
-      </p:sp>
-      <p:sp>
-        <p:nvSpPr>
           <p:cNvPr id="27" name="TextBox 26"/>
-          <p:cNvSpPr txBox="1"/>
-          <p:nvPr/>
-        </p:nvSpPr>
-        <p:spPr>
-          <a:xfrm>
-            <a:off x="14249400" y="4171950"/>
-            <a:ext cx="2895600" cy="419100"/>
-          </a:xfrm>
-          <a:prstGeom prst="rect">
-            <a:avLst/>
-          </a:prstGeom>
-          <a:noFill/>
-        </p:spPr>
-        <p:txBody>
-          <a:bodyPr wrap="square" lIns="0" rIns="0" tIns="0" bIns="0" anchor="t">
-            <a:spAutoFit/>
-          </a:bodyPr>
-          <a:lstStyle/>
-          <a:p>
-            <a:pPr algn="ctr">
-              <a:lnSpc>
-                <a:spcPct val="100000"/>
-              </a:lnSpc>
-            </a:pPr>
-            <a:r>
-              <a:rPr sz="2475" b="1">
-                <a:solidFill>
-                  <a:srgbClr val="FFFFFF"/>
-                </a:solidFill>
-                <a:latin typeface="Pretendard"/>
-                <a:ea typeface="Pretendard"/>
-                <a:cs typeface="Pretendard"/>
-              </a:rPr>
-              <a:t>리밸런싱</a:t>
-            </a:r>
-          </a:p>
-        </p:txBody>
-      </p:sp>
-      <p:sp>
-        <p:nvSpPr>
-          <p:cNvPr id="28" name="TextBox 27"/>
-          <p:cNvSpPr txBox="1"/>
-          <p:nvPr/>
-        </p:nvSpPr>
-        <p:spPr>
-          <a:xfrm>
-            <a:off x="14458950" y="5143500"/>
-            <a:ext cx="2476500" cy="1524000"/>
-          </a:xfrm>
-          <a:prstGeom prst="rect">
-            <a:avLst/>
-          </a:prstGeom>
-          <a:noFill/>
-        </p:spPr>
-        <p:txBody>
-          <a:bodyPr wrap="square" lIns="0" rIns="0" tIns="0" bIns="0" anchor="t">
-            <a:spAutoFit/>
-          </a:bodyPr>
-          <a:lstStyle/>
-          <a:p>
-            <a:pPr algn="ctr">
-              <a:lnSpc>
-                <a:spcPct val="146000"/>
-              </a:lnSpc>
-            </a:pPr>
-            <a:r>
-              <a:rPr sz="2100" b="0">
-                <a:solidFill>
-                  <a:srgbClr val="3D3D3D"/>
-                </a:solidFill>
-                <a:latin typeface="Pretendard"/>
-                <a:ea typeface="Pretendard"/>
-                <a:cs typeface="Pretendard"/>
-              </a:rPr>
-              <a:t>남은 쪽이</a:t>
-            </a:r>
-          </a:p>
-          <a:p>
-            <a:pPr algn="ctr">
-              <a:lnSpc>
-                <a:spcPct val="146000"/>
-              </a:lnSpc>
-            </a:pPr>
-            <a:r>
-              <a:rPr sz="2100" b="0">
-                <a:solidFill>
-                  <a:srgbClr val="3D3D3D"/>
-                </a:solidFill>
-                <a:latin typeface="Pretendard"/>
-                <a:ea typeface="Pretendard"/>
-                <a:cs typeface="Pretendard"/>
-              </a:rPr>
-              <a:t>3개 모두</a:t>
-            </a:r>
-          </a:p>
-        </p:txBody>
-      </p:sp>
-      <p:sp>
-        <p:nvSpPr>
-          <p:cNvPr id="29" name="Rectangle 28"/>
-          <p:cNvSpPr/>
-          <p:nvPr/>
-        </p:nvSpPr>
-        <p:spPr>
-          <a:xfrm>
-            <a:off x="1143000" y="8058150"/>
-            <a:ext cx="16002000" cy="9525"/>
-          </a:xfrm>
-          <a:prstGeom prst="rect">
-            <a:avLst/>
-          </a:prstGeom>
-          <a:solidFill>
-            <a:srgbClr val="DCE1E8"/>
-          </a:solidFill>
-          <a:ln>
-            <a:noFill/>
-          </a:ln>
-          <a:effectLst/>
-        </p:spPr>
-        <p:txBody>
-          <a:bodyPr rtlCol="0" anchor="ctr" wrap="square"/>
-          <a:lstStyle/>
-          <a:p>
-            <a:pPr algn="ctr"/>
-          </a:p>
-        </p:txBody>
-      </p:sp>
-      <p:sp>
-        <p:nvSpPr>
-          <p:cNvPr id="30" name="TextBox 29"/>
           <p:cNvSpPr txBox="1"/>
           <p:nvPr/>
         </p:nvSpPr>
@@ -13931,7 +14809,7 @@
       </p:sp>
       <p:sp>
         <p:nvSpPr>
-          <p:cNvPr id="31" name="TextBox 30"/>
+          <p:cNvPr id="28" name="TextBox 27"/>
           <p:cNvSpPr txBox="1"/>
           <p:nvPr/>
         </p:nvSpPr>
@@ -13990,7 +14868,7 @@
       <p:grpSpPr/>
       <p:sp>
         <p:nvSpPr>
-          <p:cNvPr id="2" name="Oval 1"/>
+          <p:cNvPr id="2" name="deckgen:decor"/>
           <p:cNvSpPr/>
           <p:nvPr/>
         </p:nvSpPr>
@@ -14020,7 +14898,7 @@
       </p:sp>
       <p:sp>
         <p:nvSpPr>
-          <p:cNvPr id="3" name="Oval 2"/>
+          <p:cNvPr id="3" name="deckgen:decor"/>
           <p:cNvSpPr/>
           <p:nvPr/>
         </p:nvSpPr>
@@ -14050,7 +14928,7 @@
       </p:sp>
       <p:sp>
         <p:nvSpPr>
-          <p:cNvPr id="4" name="Oval 3"/>
+          <p:cNvPr id="4" name="deckgen:decor"/>
           <p:cNvSpPr/>
           <p:nvPr/>
         </p:nvSpPr>
@@ -14114,7 +14992,7 @@
                 <a:ea typeface="Pretendard"/>
                 <a:cs typeface="Pretendard"/>
               </a:rPr>
-              <a:t>8단계</a:t>
+              <a:t>6·7단계 — 일부러 죽이기</a:t>
             </a:r>
           </a:p>
         </p:txBody>
@@ -14155,7 +15033,7 @@
                 <a:ea typeface="Pretendard"/>
                 <a:cs typeface="Pretendard"/>
               </a:rPr>
-              <a:t>다른 그룹은 독립적이다 — 그룹마다 오프셋을 따로 관리</a:t>
+              <a:t>컨슈머를 둘 붙였다가 하나를 끈다 — 분배와 리밸런싱</a:t>
             </a:r>
           </a:p>
         </p:txBody>
@@ -14198,8 +15076,8 @@
         </p:nvSpPr>
         <p:spPr>
           <a:xfrm>
-            <a:off x="1143000" y="2857500"/>
-            <a:ext cx="7372350" cy="533400"/>
+            <a:off x="1143000" y="3067050"/>
+            <a:ext cx="16002000" cy="438150"/>
           </a:xfrm>
           <a:prstGeom prst="rect">
             <a:avLst/>
@@ -14214,52 +15092,11 @@
           <a:p>
             <a:pPr algn="l">
               <a:lnSpc>
-                <a:spcPct val="110000"/>
-              </a:lnSpc>
-            </a:pPr>
-            <a:r>
-              <a:rPr sz="3150" b="1">
-                <a:solidFill>
-                  <a:srgbClr val="0D2B5E"/>
-                </a:solidFill>
-                <a:latin typeface="Pretendard"/>
-                <a:ea typeface="Pretendard"/>
-                <a:cs typeface="Pretendard"/>
-              </a:rPr>
-              <a:t>order-app</a:t>
-            </a:r>
-          </a:p>
-        </p:txBody>
-      </p:sp>
-      <p:sp>
-        <p:nvSpPr>
-          <p:cNvPr id="9" name="TextBox 8"/>
-          <p:cNvSpPr txBox="1"/>
-          <p:nvPr/>
-        </p:nvSpPr>
-        <p:spPr>
-          <a:xfrm>
-            <a:off x="1143000" y="3467100"/>
-            <a:ext cx="7372350" cy="876300"/>
-          </a:xfrm>
-          <a:prstGeom prst="rect">
-            <a:avLst/>
-          </a:prstGeom>
-          <a:noFill/>
-        </p:spPr>
-        <p:txBody>
-          <a:bodyPr wrap="square" lIns="0" rIns="0" tIns="0" bIns="0" anchor="t">
-            <a:spAutoFit/>
-          </a:bodyPr>
-          <a:lstStyle/>
-          <a:p>
-            <a:pPr algn="l">
-              <a:lnSpc>
-                <a:spcPct val="146000"/>
-              </a:lnSpc>
-            </a:pPr>
-            <a:r>
-              <a:rPr sz="2250" b="0">
+                <a:spcPct val="130000"/>
+              </a:lnSpc>
+            </a:pPr>
+            <a:r>
+              <a:rPr sz="2550" b="1">
                 <a:solidFill>
                   <a:srgbClr val="3D3D3D"/>
                 </a:solidFill>
@@ -14267,25 +15104,25 @@
                 <a:ea typeface="Pretendard"/>
                 <a:cs typeface="Pretendard"/>
               </a:rPr>
-              <a:t>이미 읽은 메시지는 다시 오지 않는다</a:t>
-            </a:r>
-          </a:p>
-        </p:txBody>
-      </p:sp>
-      <p:sp>
-        <p:nvSpPr>
-          <p:cNvPr id="10" name="Rounded Rectangle 9"/>
-          <p:cNvSpPr/>
-          <p:nvPr/>
-        </p:nvSpPr>
-        <p:spPr>
-          <a:xfrm>
-            <a:off x="1143000" y="4610100"/>
-            <a:ext cx="7372350" cy="2857500"/>
+              <a:t>이론의 「파티션을 나눠 갖는다」와 「컨슈머가 죽어도 처리가 멈추지 않는다」를 직접 겪어 봅니다</a:t>
+            </a:r>
+          </a:p>
+        </p:txBody>
+      </p:sp>
+      <p:sp>
+        <p:nvSpPr>
+          <p:cNvPr id="9" name="Rounded Rectangle 8"/>
+          <p:cNvSpPr/>
+          <p:nvPr/>
+        </p:nvSpPr>
+        <p:spPr>
+          <a:xfrm>
+            <a:off x="1143000" y="3924300"/>
+            <a:ext cx="2895600" cy="3143250"/>
           </a:xfrm>
           <a:prstGeom prst="roundRect">
             <a:avLst>
-              <a:gd name="adj" fmla="val 1666"/>
+              <a:gd name="adj" fmla="val 1644"/>
             </a:avLst>
           </a:prstGeom>
           <a:solidFill>
@@ -14308,20 +15145,20 @@
       </p:sp>
       <p:sp>
         <p:nvSpPr>
-          <p:cNvPr id="11" name="Oval 10"/>
-          <p:cNvSpPr/>
-          <p:nvPr/>
-        </p:nvSpPr>
-        <p:spPr>
-          <a:xfrm>
-            <a:off x="1447800" y="5016817"/>
-            <a:ext cx="97155" cy="97155"/>
-          </a:xfrm>
-          <a:prstGeom prst="ellipse">
-            <a:avLst/>
-          </a:prstGeom>
-          <a:solidFill>
-            <a:srgbClr val="1E5BC6"/>
+          <p:cNvPr id="10" name="Rectangle 9"/>
+          <p:cNvSpPr/>
+          <p:nvPr/>
+        </p:nvSpPr>
+        <p:spPr>
+          <a:xfrm>
+            <a:off x="1143000" y="3924300"/>
+            <a:ext cx="2895600" cy="914400"/>
+          </a:xfrm>
+          <a:prstGeom prst="rect">
+            <a:avLst/>
+          </a:prstGeom>
+          <a:solidFill>
+            <a:srgbClr val="0D2B5E"/>
           </a:solidFill>
           <a:ln>
             <a:noFill/>
@@ -14338,33 +15175,74 @@
       </p:sp>
       <p:sp>
         <p:nvSpPr>
+          <p:cNvPr id="11" name="TextBox 10"/>
+          <p:cNvSpPr txBox="1"/>
+          <p:nvPr/>
+        </p:nvSpPr>
+        <p:spPr>
+          <a:xfrm>
+            <a:off x="1143000" y="4171950"/>
+            <a:ext cx="2895600" cy="419100"/>
+          </a:xfrm>
+          <a:prstGeom prst="rect">
+            <a:avLst/>
+          </a:prstGeom>
+          <a:noFill/>
+        </p:spPr>
+        <p:txBody>
+          <a:bodyPr wrap="square" lIns="0" rIns="0" tIns="0" bIns="0" anchor="t">
+            <a:spAutoFit/>
+          </a:bodyPr>
+          <a:lstStyle/>
+          <a:p>
+            <a:pPr algn="ctr">
+              <a:lnSpc>
+                <a:spcPct val="100000"/>
+              </a:lnSpc>
+            </a:pPr>
+            <a:r>
+              <a:rPr sz="2475" b="1">
+                <a:solidFill>
+                  <a:srgbClr val="FFFFFF"/>
+                </a:solidFill>
+                <a:latin typeface="Pretendard"/>
+                <a:ea typeface="Pretendard"/>
+                <a:cs typeface="Pretendard"/>
+              </a:rPr>
+              <a:t>터미널 4 추가</a:t>
+            </a:r>
+          </a:p>
+        </p:txBody>
+      </p:sp>
+      <p:sp>
+        <p:nvSpPr>
           <p:cNvPr id="12" name="TextBox 11"/>
           <p:cNvSpPr txBox="1"/>
           <p:nvPr/>
         </p:nvSpPr>
         <p:spPr>
           <a:xfrm>
-            <a:off x="1633538" y="4838700"/>
-            <a:ext cx="6634162" cy="453390"/>
-          </a:xfrm>
-          <a:prstGeom prst="rect">
-            <a:avLst/>
-          </a:prstGeom>
-          <a:noFill/>
-        </p:spPr>
-        <p:txBody>
-          <a:bodyPr wrap="square" lIns="0" rIns="0" tIns="0" bIns="0" anchor="ctr">
-            <a:spAutoFit/>
-          </a:bodyPr>
-          <a:lstStyle/>
-          <a:p>
-            <a:pPr algn="l">
-              <a:lnSpc>
-                <a:spcPct val="120000"/>
-              </a:lnSpc>
-            </a:pPr>
-            <a:r>
-              <a:rPr sz="1575" b="0">
+            <a:off x="1352550" y="5143500"/>
+            <a:ext cx="2476500" cy="1524000"/>
+          </a:xfrm>
+          <a:prstGeom prst="rect">
+            <a:avLst/>
+          </a:prstGeom>
+          <a:noFill/>
+        </p:spPr>
+        <p:txBody>
+          <a:bodyPr wrap="square" lIns="0" rIns="0" tIns="0" bIns="0" anchor="t">
+            <a:spAutoFit/>
+          </a:bodyPr>
+          <a:lstStyle/>
+          <a:p>
+            <a:pPr algn="ctr">
+              <a:lnSpc>
+                <a:spcPct val="146000"/>
+              </a:lnSpc>
+            </a:pPr>
+            <a:r>
+              <a:rPr sz="2100" b="0">
                 <a:solidFill>
                   <a:srgbClr val="3D3D3D"/>
                 </a:solidFill>
@@ -14372,70 +15250,17 @@
                 <a:ea typeface="Pretendard"/>
                 <a:cs typeface="Pretendard"/>
               </a:rPr>
-              <a:t>그룹의 오프셋이 저장돼 있다</a:t>
-            </a:r>
-          </a:p>
-        </p:txBody>
-      </p:sp>
-      <p:sp>
-        <p:nvSpPr>
-          <p:cNvPr id="13" name="Oval 12"/>
-          <p:cNvSpPr/>
-          <p:nvPr/>
-        </p:nvSpPr>
-        <p:spPr>
-          <a:xfrm>
-            <a:off x="1447800" y="5527358"/>
-            <a:ext cx="97155" cy="97155"/>
-          </a:xfrm>
-          <a:prstGeom prst="ellipse">
-            <a:avLst/>
-          </a:prstGeom>
-          <a:solidFill>
-            <a:srgbClr val="1E5BC6"/>
-          </a:solidFill>
-          <a:ln>
-            <a:noFill/>
-          </a:ln>
-          <a:effectLst/>
-        </p:spPr>
-        <p:txBody>
-          <a:bodyPr rtlCol="0" anchor="ctr" wrap="square"/>
-          <a:lstStyle/>
-          <a:p>
-            <a:pPr algn="ctr"/>
-          </a:p>
-        </p:txBody>
-      </p:sp>
-      <p:sp>
-        <p:nvSpPr>
-          <p:cNvPr id="14" name="TextBox 13"/>
-          <p:cNvSpPr txBox="1"/>
-          <p:nvPr/>
-        </p:nvSpPr>
-        <p:spPr>
-          <a:xfrm>
-            <a:off x="1633538" y="5349240"/>
-            <a:ext cx="6634162" cy="453390"/>
-          </a:xfrm>
-          <a:prstGeom prst="rect">
-            <a:avLst/>
-          </a:prstGeom>
-          <a:noFill/>
-        </p:spPr>
-        <p:txBody>
-          <a:bodyPr wrap="square" lIns="0" rIns="0" tIns="0" bIns="0" anchor="ctr">
-            <a:spAutoFit/>
-          </a:bodyPr>
-          <a:lstStyle/>
-          <a:p>
-            <a:pPr algn="l">
-              <a:lnSpc>
-                <a:spcPct val="120000"/>
-              </a:lnSpc>
-            </a:pPr>
-            <a:r>
-              <a:rPr sz="1575" b="0">
+              <a:t>같은 그룹</a:t>
+            </a:r>
+          </a:p>
+          <a:p>
+            <a:pPr algn="ctr">
+              <a:lnSpc>
+                <a:spcPct val="146000"/>
+              </a:lnSpc>
+            </a:pPr>
+            <a:r>
+              <a:rPr sz="2100" b="0">
                 <a:solidFill>
                   <a:srgbClr val="3D3D3D"/>
                 </a:solidFill>
@@ -14443,107 +15268,25 @@
                 <a:ea typeface="Pretendard"/>
                 <a:cs typeface="Pretendard"/>
               </a:rPr>
-              <a:t>다시 붙으면 이어서 읽는다</a:t>
-            </a:r>
-          </a:p>
-        </p:txBody>
-      </p:sp>
-      <p:sp>
-        <p:nvSpPr>
-          <p:cNvPr id="15" name="TextBox 14"/>
-          <p:cNvSpPr txBox="1"/>
-          <p:nvPr/>
-        </p:nvSpPr>
-        <p:spPr>
-          <a:xfrm>
-            <a:off x="9772650" y="2857500"/>
-            <a:ext cx="7372350" cy="533400"/>
-          </a:xfrm>
-          <a:prstGeom prst="rect">
-            <a:avLst/>
-          </a:prstGeom>
-          <a:noFill/>
-        </p:spPr>
-        <p:txBody>
-          <a:bodyPr wrap="square" lIns="0" rIns="0" tIns="0" bIns="0" anchor="t">
-            <a:spAutoFit/>
-          </a:bodyPr>
-          <a:lstStyle/>
-          <a:p>
-            <a:pPr algn="l">
-              <a:lnSpc>
-                <a:spcPct val="110000"/>
-              </a:lnSpc>
-            </a:pPr>
-            <a:r>
-              <a:rPr sz="3150" b="1">
-                <a:solidFill>
-                  <a:srgbClr val="0D2B5E"/>
-                </a:solidFill>
-                <a:latin typeface="Pretendard"/>
-                <a:ea typeface="Pretendard"/>
-                <a:cs typeface="Pretendard"/>
-              </a:rPr>
-              <a:t>analytics-app --from-beginning</a:t>
-            </a:r>
-          </a:p>
-        </p:txBody>
-      </p:sp>
-      <p:sp>
-        <p:nvSpPr>
-          <p:cNvPr id="16" name="TextBox 15"/>
-          <p:cNvSpPr txBox="1"/>
-          <p:nvPr/>
-        </p:nvSpPr>
-        <p:spPr>
-          <a:xfrm>
-            <a:off x="9772650" y="3467100"/>
-            <a:ext cx="7372350" cy="876300"/>
-          </a:xfrm>
-          <a:prstGeom prst="rect">
-            <a:avLst/>
-          </a:prstGeom>
-          <a:noFill/>
-        </p:spPr>
-        <p:txBody>
-          <a:bodyPr wrap="square" lIns="0" rIns="0" tIns="0" bIns="0" anchor="t">
-            <a:spAutoFit/>
-          </a:bodyPr>
-          <a:lstStyle/>
-          <a:p>
-            <a:pPr algn="l">
-              <a:lnSpc>
-                <a:spcPct val="146000"/>
-              </a:lnSpc>
-            </a:pPr>
-            <a:r>
-              <a:rPr sz="2250" b="0">
-                <a:solidFill>
-                  <a:srgbClr val="3D3D3D"/>
-                </a:solidFill>
-                <a:latin typeface="Pretendard"/>
-                <a:ea typeface="Pretendard"/>
-                <a:cs typeface="Pretendard"/>
-              </a:rPr>
-              <a:t>처음부터 다시 받는다</a:t>
-            </a:r>
-          </a:p>
-        </p:txBody>
-      </p:sp>
-      <p:sp>
-        <p:nvSpPr>
-          <p:cNvPr id="17" name="Rounded Rectangle 16"/>
-          <p:cNvSpPr/>
-          <p:nvPr/>
-        </p:nvSpPr>
-        <p:spPr>
-          <a:xfrm>
-            <a:off x="9772650" y="4610100"/>
-            <a:ext cx="7372350" cy="2857500"/>
+              <a:t>order-app</a:t>
+            </a:r>
+          </a:p>
+        </p:txBody>
+      </p:sp>
+      <p:sp>
+        <p:nvSpPr>
+          <p:cNvPr id="13" name="Rounded Rectangle 12"/>
+          <p:cNvSpPr/>
+          <p:nvPr/>
+        </p:nvSpPr>
+        <p:spPr>
+          <a:xfrm>
+            <a:off x="4419600" y="3924300"/>
+            <a:ext cx="2895600" cy="3143250"/>
           </a:xfrm>
           <a:prstGeom prst="roundRect">
             <a:avLst>
-              <a:gd name="adj" fmla="val 1666"/>
+              <a:gd name="adj" fmla="val 1644"/>
             </a:avLst>
           </a:prstGeom>
           <a:solidFill>
@@ -14566,16 +15309,16 @@
       </p:sp>
       <p:sp>
         <p:nvSpPr>
-          <p:cNvPr id="18" name="Oval 17"/>
-          <p:cNvSpPr/>
-          <p:nvPr/>
-        </p:nvSpPr>
-        <p:spPr>
-          <a:xfrm>
-            <a:off x="10077450" y="5016817"/>
-            <a:ext cx="97155" cy="97155"/>
-          </a:xfrm>
-          <a:prstGeom prst="ellipse">
+          <p:cNvPr id="14" name="Rectangle 13"/>
+          <p:cNvSpPr/>
+          <p:nvPr/>
+        </p:nvSpPr>
+        <p:spPr>
+          <a:xfrm>
+            <a:off x="4419600" y="3924300"/>
+            <a:ext cx="2895600" cy="914400"/>
+          </a:xfrm>
+          <a:prstGeom prst="rect">
             <a:avLst/>
           </a:prstGeom>
           <a:solidFill>
@@ -14596,33 +15339,74 @@
       </p:sp>
       <p:sp>
         <p:nvSpPr>
-          <p:cNvPr id="19" name="TextBox 18"/>
-          <p:cNvSpPr txBox="1"/>
-          <p:nvPr/>
-        </p:nvSpPr>
-        <p:spPr>
-          <a:xfrm>
-            <a:off x="10263188" y="4838700"/>
-            <a:ext cx="6634162" cy="453390"/>
-          </a:xfrm>
-          <a:prstGeom prst="rect">
-            <a:avLst/>
-          </a:prstGeom>
-          <a:noFill/>
-        </p:spPr>
-        <p:txBody>
-          <a:bodyPr wrap="square" lIns="0" rIns="0" tIns="0" bIns="0" anchor="ctr">
-            <a:spAutoFit/>
-          </a:bodyPr>
-          <a:lstStyle/>
-          <a:p>
-            <a:pPr algn="l">
-              <a:lnSpc>
-                <a:spcPct val="120000"/>
-              </a:lnSpc>
-            </a:pPr>
-            <a:r>
-              <a:rPr sz="1575" b="0">
+          <p:cNvPr id="15" name="TextBox 14"/>
+          <p:cNvSpPr txBox="1"/>
+          <p:nvPr/>
+        </p:nvSpPr>
+        <p:spPr>
+          <a:xfrm>
+            <a:off x="4419600" y="4171950"/>
+            <a:ext cx="2895600" cy="419100"/>
+          </a:xfrm>
+          <a:prstGeom prst="rect">
+            <a:avLst/>
+          </a:prstGeom>
+          <a:noFill/>
+        </p:spPr>
+        <p:txBody>
+          <a:bodyPr wrap="square" lIns="0" rIns="0" tIns="0" bIns="0" anchor="t">
+            <a:spAutoFit/>
+          </a:bodyPr>
+          <a:lstStyle/>
+          <a:p>
+            <a:pPr algn="ctr">
+              <a:lnSpc>
+                <a:spcPct val="100000"/>
+              </a:lnSpc>
+            </a:pPr>
+            <a:r>
+              <a:rPr sz="2475" b="1">
+                <a:solidFill>
+                  <a:srgbClr val="FFFFFF"/>
+                </a:solidFill>
+                <a:latin typeface="Pretendard"/>
+                <a:ea typeface="Pretendard"/>
+                <a:cs typeface="Pretendard"/>
+              </a:rPr>
+              <a:t>describe</a:t>
+            </a:r>
+          </a:p>
+        </p:txBody>
+      </p:sp>
+      <p:sp>
+        <p:nvSpPr>
+          <p:cNvPr id="16" name="TextBox 15"/>
+          <p:cNvSpPr txBox="1"/>
+          <p:nvPr/>
+        </p:nvSpPr>
+        <p:spPr>
+          <a:xfrm>
+            <a:off x="4629150" y="5143500"/>
+            <a:ext cx="2476500" cy="1524000"/>
+          </a:xfrm>
+          <a:prstGeom prst="rect">
+            <a:avLst/>
+          </a:prstGeom>
+          <a:noFill/>
+        </p:spPr>
+        <p:txBody>
+          <a:bodyPr wrap="square" lIns="0" rIns="0" tIns="0" bIns="0" anchor="t">
+            <a:spAutoFit/>
+          </a:bodyPr>
+          <a:lstStyle/>
+          <a:p>
+            <a:pPr algn="ctr">
+              <a:lnSpc>
+                <a:spcPct val="146000"/>
+              </a:lnSpc>
+            </a:pPr>
+            <a:r>
+              <a:rPr sz="2100" b="0">
                 <a:solidFill>
                   <a:srgbClr val="3D3D3D"/>
                 </a:solidFill>
@@ -14630,27 +15414,79 @@
                 <a:ea typeface="Pretendard"/>
                 <a:cs typeface="Pretendard"/>
               </a:rPr>
-              <a:t>새 그룹 이름 = 새 오프셋</a:t>
-            </a:r>
-          </a:p>
-        </p:txBody>
-      </p:sp>
-      <p:sp>
-        <p:nvSpPr>
-          <p:cNvPr id="20" name="Oval 19"/>
-          <p:cNvSpPr/>
-          <p:nvPr/>
-        </p:nvSpPr>
-        <p:spPr>
-          <a:xfrm>
-            <a:off x="10077450" y="5527358"/>
-            <a:ext cx="97155" cy="97155"/>
-          </a:xfrm>
-          <a:prstGeom prst="ellipse">
-            <a:avLst/>
-          </a:prstGeom>
-          <a:solidFill>
-            <a:srgbClr val="1E5BC6"/>
+              <a:t>CONSUMER-ID 둘</a:t>
+            </a:r>
+          </a:p>
+          <a:p>
+            <a:pPr algn="ctr">
+              <a:lnSpc>
+                <a:spcPct val="146000"/>
+              </a:lnSpc>
+            </a:pPr>
+            <a:r>
+              <a:rPr sz="2100" b="0">
+                <a:solidFill>
+                  <a:srgbClr val="3D3D3D"/>
+                </a:solidFill>
+                <a:latin typeface="Pretendard"/>
+                <a:ea typeface="Pretendard"/>
+                <a:cs typeface="Pretendard"/>
+              </a:rPr>
+              <a:t>0·1번 / 2번</a:t>
+            </a:r>
+          </a:p>
+        </p:txBody>
+      </p:sp>
+      <p:sp>
+        <p:nvSpPr>
+          <p:cNvPr id="17" name="Rounded Rectangle 16"/>
+          <p:cNvSpPr/>
+          <p:nvPr/>
+        </p:nvSpPr>
+        <p:spPr>
+          <a:xfrm>
+            <a:off x="7696200" y="3924300"/>
+            <a:ext cx="2895600" cy="3143250"/>
+          </a:xfrm>
+          <a:prstGeom prst="roundRect">
+            <a:avLst>
+              <a:gd name="adj" fmla="val 1644"/>
+            </a:avLst>
+          </a:prstGeom>
+          <a:solidFill>
+            <a:srgbClr val="FAFBFD"/>
+          </a:solidFill>
+          <a:ln w="9525">
+            <a:solidFill>
+              <a:srgbClr val="DCE1E8"/>
+            </a:solidFill>
+          </a:ln>
+          <a:effectLst/>
+        </p:spPr>
+        <p:txBody>
+          <a:bodyPr rtlCol="0" anchor="ctr" wrap="square"/>
+          <a:lstStyle/>
+          <a:p>
+            <a:pPr algn="ctr"/>
+          </a:p>
+        </p:txBody>
+      </p:sp>
+      <p:sp>
+        <p:nvSpPr>
+          <p:cNvPr id="18" name="Rectangle 17"/>
+          <p:cNvSpPr/>
+          <p:nvPr/>
+        </p:nvSpPr>
+        <p:spPr>
+          <a:xfrm>
+            <a:off x="7696200" y="3924300"/>
+            <a:ext cx="2895600" cy="914400"/>
+          </a:xfrm>
+          <a:prstGeom prst="rect">
+            <a:avLst/>
+          </a:prstGeom>
+          <a:solidFill>
+            <a:srgbClr val="0D2B5E"/>
           </a:solidFill>
           <a:ln>
             <a:noFill/>
@@ -14667,33 +15503,74 @@
       </p:sp>
       <p:sp>
         <p:nvSpPr>
-          <p:cNvPr id="21" name="TextBox 20"/>
-          <p:cNvSpPr txBox="1"/>
-          <p:nvPr/>
-        </p:nvSpPr>
-        <p:spPr>
-          <a:xfrm>
-            <a:off x="10263188" y="5349240"/>
-            <a:ext cx="6634162" cy="453390"/>
-          </a:xfrm>
-          <a:prstGeom prst="rect">
-            <a:avLst/>
-          </a:prstGeom>
-          <a:noFill/>
-        </p:spPr>
-        <p:txBody>
-          <a:bodyPr wrap="square" lIns="0" rIns="0" tIns="0" bIns="0" anchor="ctr">
-            <a:spAutoFit/>
-          </a:bodyPr>
-          <a:lstStyle/>
-          <a:p>
-            <a:pPr algn="l">
-              <a:lnSpc>
-                <a:spcPct val="120000"/>
-              </a:lnSpc>
-            </a:pPr>
-            <a:r>
-              <a:rPr sz="1575" b="0">
+          <p:cNvPr id="19" name="TextBox 18"/>
+          <p:cNvSpPr txBox="1"/>
+          <p:nvPr/>
+        </p:nvSpPr>
+        <p:spPr>
+          <a:xfrm>
+            <a:off x="7696200" y="4171950"/>
+            <a:ext cx="2895600" cy="419100"/>
+          </a:xfrm>
+          <a:prstGeom prst="rect">
+            <a:avLst/>
+          </a:prstGeom>
+          <a:noFill/>
+        </p:spPr>
+        <p:txBody>
+          <a:bodyPr wrap="square" lIns="0" rIns="0" tIns="0" bIns="0" anchor="t">
+            <a:spAutoFit/>
+          </a:bodyPr>
+          <a:lstStyle/>
+          <a:p>
+            <a:pPr algn="ctr">
+              <a:lnSpc>
+                <a:spcPct val="100000"/>
+              </a:lnSpc>
+            </a:pPr>
+            <a:r>
+              <a:rPr sz="2475" b="1">
+                <a:solidFill>
+                  <a:srgbClr val="FFFFFF"/>
+                </a:solidFill>
+                <a:latin typeface="Pretendard"/>
+                <a:ea typeface="Pretendard"/>
+                <a:cs typeface="Pretendard"/>
+              </a:rPr>
+              <a:t>메시지 전송</a:t>
+            </a:r>
+          </a:p>
+        </p:txBody>
+      </p:sp>
+      <p:sp>
+        <p:nvSpPr>
+          <p:cNvPr id="20" name="TextBox 19"/>
+          <p:cNvSpPr txBox="1"/>
+          <p:nvPr/>
+        </p:nvSpPr>
+        <p:spPr>
+          <a:xfrm>
+            <a:off x="7905750" y="5143500"/>
+            <a:ext cx="2476500" cy="1524000"/>
+          </a:xfrm>
+          <a:prstGeom prst="rect">
+            <a:avLst/>
+          </a:prstGeom>
+          <a:noFill/>
+        </p:spPr>
+        <p:txBody>
+          <a:bodyPr wrap="square" lIns="0" rIns="0" tIns="0" bIns="0" anchor="t">
+            <a:spAutoFit/>
+          </a:bodyPr>
+          <a:lstStyle/>
+          <a:p>
+            <a:pPr algn="ctr">
+              <a:lnSpc>
+                <a:spcPct val="146000"/>
+              </a:lnSpc>
+            </a:pPr>
+            <a:r>
+              <a:rPr sz="2100" b="0">
                 <a:solidFill>
                   <a:srgbClr val="3D3D3D"/>
                 </a:solidFill>
@@ -14701,27 +15578,79 @@
                 <a:ea typeface="Pretendard"/>
                 <a:cs typeface="Pretendard"/>
               </a:rPr>
-              <a:t>6-1 의 「여러 부서가 같은 편지를 각자 읽는다」의 실물</a:t>
-            </a:r>
-          </a:p>
-        </p:txBody>
-      </p:sp>
-      <p:sp>
-        <p:nvSpPr>
-          <p:cNvPr id="22" name="Oval 21"/>
-          <p:cNvSpPr/>
-          <p:nvPr/>
-        </p:nvSpPr>
-        <p:spPr>
-          <a:xfrm>
-            <a:off x="8686800" y="3771900"/>
-            <a:ext cx="914400" cy="914400"/>
-          </a:xfrm>
-          <a:prstGeom prst="ellipse">
-            <a:avLst/>
-          </a:prstGeom>
-          <a:solidFill>
-            <a:srgbClr val="0D2B5E"/>
+              <a:t>0·1번 쪽은</a:t>
+            </a:r>
+          </a:p>
+          <a:p>
+            <a:pPr algn="ctr">
+              <a:lnSpc>
+                <a:spcPct val="146000"/>
+              </a:lnSpc>
+            </a:pPr>
+            <a:r>
+              <a:rPr sz="2100" b="0">
+                <a:solidFill>
+                  <a:srgbClr val="3D3D3D"/>
+                </a:solidFill>
+                <a:latin typeface="Pretendard"/>
+                <a:ea typeface="Pretendard"/>
+                <a:cs typeface="Pretendard"/>
+              </a:rPr>
+              <a:t>user1 것만</a:t>
+            </a:r>
+          </a:p>
+        </p:txBody>
+      </p:sp>
+      <p:sp>
+        <p:nvSpPr>
+          <p:cNvPr id="21" name="Rounded Rectangle 20"/>
+          <p:cNvSpPr/>
+          <p:nvPr/>
+        </p:nvSpPr>
+        <p:spPr>
+          <a:xfrm>
+            <a:off x="10972800" y="3924300"/>
+            <a:ext cx="2895600" cy="3143250"/>
+          </a:xfrm>
+          <a:prstGeom prst="roundRect">
+            <a:avLst>
+              <a:gd name="adj" fmla="val 1644"/>
+            </a:avLst>
+          </a:prstGeom>
+          <a:solidFill>
+            <a:srgbClr val="FAFBFD"/>
+          </a:solidFill>
+          <a:ln w="9525">
+            <a:solidFill>
+              <a:srgbClr val="DCE1E8"/>
+            </a:solidFill>
+          </a:ln>
+          <a:effectLst/>
+        </p:spPr>
+        <p:txBody>
+          <a:bodyPr rtlCol="0" anchor="ctr" wrap="square"/>
+          <a:lstStyle/>
+          <a:p>
+            <a:pPr algn="ctr"/>
+          </a:p>
+        </p:txBody>
+      </p:sp>
+      <p:sp>
+        <p:nvSpPr>
+          <p:cNvPr id="22" name="Rectangle 21"/>
+          <p:cNvSpPr/>
+          <p:nvPr/>
+        </p:nvSpPr>
+        <p:spPr>
+          <a:xfrm>
+            <a:off x="10972800" y="3924300"/>
+            <a:ext cx="2895600" cy="914400"/>
+          </a:xfrm>
+          <a:prstGeom prst="rect">
+            <a:avLst/>
+          </a:prstGeom>
+          <a:solidFill>
+            <a:srgbClr val="1E5BC6"/>
           </a:solidFill>
           <a:ln>
             <a:noFill/>
@@ -14744,8 +15673,8 @@
         </p:nvSpPr>
         <p:spPr>
           <a:xfrm>
-            <a:off x="8686800" y="4057650"/>
-            <a:ext cx="914400" cy="381000"/>
+            <a:off x="10972800" y="4171950"/>
+            <a:ext cx="2895600" cy="419100"/>
           </a:xfrm>
           <a:prstGeom prst="rect">
             <a:avLst/>
@@ -14764,7 +15693,7 @@
               </a:lnSpc>
             </a:pPr>
             <a:r>
-              <a:rPr sz="2250" b="1">
+              <a:rPr sz="2475" b="1">
                 <a:solidFill>
                   <a:srgbClr val="FFFFFF"/>
                 </a:solidFill>
@@ -14772,14 +15701,237 @@
                 <a:ea typeface="Pretendard"/>
                 <a:cs typeface="Pretendard"/>
               </a:rPr>
-              <a:t>VS</a:t>
-            </a:r>
-          </a:p>
-        </p:txBody>
-      </p:sp>
-      <p:sp>
-        <p:nvSpPr>
-          <p:cNvPr id="24" name="Rectangle 23"/>
+              <a:t>하나를 Ctrl+C</a:t>
+            </a:r>
+          </a:p>
+        </p:txBody>
+      </p:sp>
+      <p:sp>
+        <p:nvSpPr>
+          <p:cNvPr id="24" name="TextBox 23"/>
+          <p:cNvSpPr txBox="1"/>
+          <p:nvPr/>
+        </p:nvSpPr>
+        <p:spPr>
+          <a:xfrm>
+            <a:off x="11182350" y="5143500"/>
+            <a:ext cx="2476500" cy="1524000"/>
+          </a:xfrm>
+          <a:prstGeom prst="rect">
+            <a:avLst/>
+          </a:prstGeom>
+          <a:noFill/>
+        </p:spPr>
+        <p:txBody>
+          <a:bodyPr wrap="square" lIns="0" rIns="0" tIns="0" bIns="0" anchor="t">
+            <a:spAutoFit/>
+          </a:bodyPr>
+          <a:lstStyle/>
+          <a:p>
+            <a:pPr algn="ctr">
+              <a:lnSpc>
+                <a:spcPct val="146000"/>
+              </a:lnSpc>
+            </a:pPr>
+            <a:r>
+              <a:rPr sz="2100" b="0">
+                <a:solidFill>
+                  <a:srgbClr val="3D3D3D"/>
+                </a:solidFill>
+                <a:latin typeface="Pretendard"/>
+                <a:ea typeface="Pretendard"/>
+                <a:cs typeface="Pretendard"/>
+              </a:rPr>
+              <a:t>몇 초 뒤</a:t>
+            </a:r>
+          </a:p>
+          <a:p>
+            <a:pPr algn="ctr">
+              <a:lnSpc>
+                <a:spcPct val="146000"/>
+              </a:lnSpc>
+            </a:pPr>
+            <a:r>
+              <a:rPr sz="2100" b="0">
+                <a:solidFill>
+                  <a:srgbClr val="3D3D3D"/>
+                </a:solidFill>
+                <a:latin typeface="Pretendard"/>
+                <a:ea typeface="Pretendard"/>
+                <a:cs typeface="Pretendard"/>
+              </a:rPr>
+              <a:t>다시 describe</a:t>
+            </a:r>
+          </a:p>
+        </p:txBody>
+      </p:sp>
+      <p:sp>
+        <p:nvSpPr>
+          <p:cNvPr id="25" name="Rounded Rectangle 24"/>
+          <p:cNvSpPr/>
+          <p:nvPr/>
+        </p:nvSpPr>
+        <p:spPr>
+          <a:xfrm>
+            <a:off x="14249400" y="3924300"/>
+            <a:ext cx="2895600" cy="3143250"/>
+          </a:xfrm>
+          <a:prstGeom prst="roundRect">
+            <a:avLst>
+              <a:gd name="adj" fmla="val 1644"/>
+            </a:avLst>
+          </a:prstGeom>
+          <a:solidFill>
+            <a:srgbClr val="FAFBFD"/>
+          </a:solidFill>
+          <a:ln w="9525">
+            <a:solidFill>
+              <a:srgbClr val="DCE1E8"/>
+            </a:solidFill>
+          </a:ln>
+          <a:effectLst/>
+        </p:spPr>
+        <p:txBody>
+          <a:bodyPr rtlCol="0" anchor="ctr" wrap="square"/>
+          <a:lstStyle/>
+          <a:p>
+            <a:pPr algn="ctr"/>
+          </a:p>
+        </p:txBody>
+      </p:sp>
+      <p:sp>
+        <p:nvSpPr>
+          <p:cNvPr id="26" name="Rectangle 25"/>
+          <p:cNvSpPr/>
+          <p:nvPr/>
+        </p:nvSpPr>
+        <p:spPr>
+          <a:xfrm>
+            <a:off x="14249400" y="3924300"/>
+            <a:ext cx="2895600" cy="914400"/>
+          </a:xfrm>
+          <a:prstGeom prst="rect">
+            <a:avLst/>
+          </a:prstGeom>
+          <a:solidFill>
+            <a:srgbClr val="0D2B5E"/>
+          </a:solidFill>
+          <a:ln>
+            <a:noFill/>
+          </a:ln>
+          <a:effectLst/>
+        </p:spPr>
+        <p:txBody>
+          <a:bodyPr rtlCol="0" anchor="ctr" wrap="square"/>
+          <a:lstStyle/>
+          <a:p>
+            <a:pPr algn="ctr"/>
+          </a:p>
+        </p:txBody>
+      </p:sp>
+      <p:sp>
+        <p:nvSpPr>
+          <p:cNvPr id="27" name="TextBox 26"/>
+          <p:cNvSpPr txBox="1"/>
+          <p:nvPr/>
+        </p:nvSpPr>
+        <p:spPr>
+          <a:xfrm>
+            <a:off x="14249400" y="4171950"/>
+            <a:ext cx="2895600" cy="419100"/>
+          </a:xfrm>
+          <a:prstGeom prst="rect">
+            <a:avLst/>
+          </a:prstGeom>
+          <a:noFill/>
+        </p:spPr>
+        <p:txBody>
+          <a:bodyPr wrap="square" lIns="0" rIns="0" tIns="0" bIns="0" anchor="t">
+            <a:spAutoFit/>
+          </a:bodyPr>
+          <a:lstStyle/>
+          <a:p>
+            <a:pPr algn="ctr">
+              <a:lnSpc>
+                <a:spcPct val="100000"/>
+              </a:lnSpc>
+            </a:pPr>
+            <a:r>
+              <a:rPr sz="2475" b="1">
+                <a:solidFill>
+                  <a:srgbClr val="FFFFFF"/>
+                </a:solidFill>
+                <a:latin typeface="Pretendard"/>
+                <a:ea typeface="Pretendard"/>
+                <a:cs typeface="Pretendard"/>
+              </a:rPr>
+              <a:t>리밸런싱</a:t>
+            </a:r>
+          </a:p>
+        </p:txBody>
+      </p:sp>
+      <p:sp>
+        <p:nvSpPr>
+          <p:cNvPr id="28" name="TextBox 27"/>
+          <p:cNvSpPr txBox="1"/>
+          <p:nvPr/>
+        </p:nvSpPr>
+        <p:spPr>
+          <a:xfrm>
+            <a:off x="14458950" y="5143500"/>
+            <a:ext cx="2476500" cy="1524000"/>
+          </a:xfrm>
+          <a:prstGeom prst="rect">
+            <a:avLst/>
+          </a:prstGeom>
+          <a:noFill/>
+        </p:spPr>
+        <p:txBody>
+          <a:bodyPr wrap="square" lIns="0" rIns="0" tIns="0" bIns="0" anchor="t">
+            <a:spAutoFit/>
+          </a:bodyPr>
+          <a:lstStyle/>
+          <a:p>
+            <a:pPr algn="ctr">
+              <a:lnSpc>
+                <a:spcPct val="146000"/>
+              </a:lnSpc>
+            </a:pPr>
+            <a:r>
+              <a:rPr sz="2100" b="0">
+                <a:solidFill>
+                  <a:srgbClr val="3D3D3D"/>
+                </a:solidFill>
+                <a:latin typeface="Pretendard"/>
+                <a:ea typeface="Pretendard"/>
+                <a:cs typeface="Pretendard"/>
+              </a:rPr>
+              <a:t>남은 쪽이</a:t>
+            </a:r>
+          </a:p>
+          <a:p>
+            <a:pPr algn="ctr">
+              <a:lnSpc>
+                <a:spcPct val="146000"/>
+              </a:lnSpc>
+            </a:pPr>
+            <a:r>
+              <a:rPr sz="2100" b="0">
+                <a:solidFill>
+                  <a:srgbClr val="3D3D3D"/>
+                </a:solidFill>
+                <a:latin typeface="Pretendard"/>
+                <a:ea typeface="Pretendard"/>
+                <a:cs typeface="Pretendard"/>
+              </a:rPr>
+              <a:t>3개 모두</a:t>
+            </a:r>
+          </a:p>
+        </p:txBody>
+      </p:sp>
+      <p:sp>
+        <p:nvSpPr>
+          <p:cNvPr id="29" name="Rectangle 28"/>
           <p:cNvSpPr/>
           <p:nvPr/>
         </p:nvSpPr>
@@ -14809,7 +15961,7 @@
       </p:sp>
       <p:sp>
         <p:nvSpPr>
-          <p:cNvPr id="25" name="TextBox 24"/>
+          <p:cNvPr id="30" name="TextBox 29"/>
           <p:cNvSpPr txBox="1"/>
           <p:nvPr/>
         </p:nvSpPr>
@@ -14850,7 +16002,7 @@
       </p:sp>
       <p:sp>
         <p:nvSpPr>
-          <p:cNvPr id="26" name="TextBox 25"/>
+          <p:cNvPr id="31" name="TextBox 30"/>
           <p:cNvSpPr txBox="1"/>
           <p:nvPr/>
         </p:nvSpPr>
